--- a/sjoskolan/vecka-41/aktuell/v41_02_Y_och_trefaseffekt_elev.pptx
+++ b/sjoskolan/vecka-41/aktuell/v41_02_Y_och_trefaseffekt_elev.pptx
@@ -3792,7 +3792,7 @@
       </p:sp>
       <p:sp>
         <p:nvSpPr>
-          <p:cNvPr id="10" name="Y: Ugren = Uᴸ/√3">
+          <p:cNvPr id="10" name="Y: Ugren = UL/√3">
             <a:extLst xmlns:a="http://schemas.openxmlformats.org/drawingml/2006/main">
               <a:ext uri="{FF2B5EF4-FFF2-40B4-BE49-F238E27FC236}">
                 <a16:creationId xmlns:a16="http://schemas.microsoft.com/office/drawing/2014/main" id="{EA47EC4F-B38B-435D-ADF9-9849A48AB836}"/>
@@ -3842,14 +3842,36 @@
                 <a:ea typeface="Calibri"/>
                 <a:cs typeface="Calibri"/>
               </a:rPr>
-              <a:t>Y: Ugren = Uᴸ/√3</a:t>
-            </a:r>
-          </a:p>
-        </p:txBody>
-      </p:sp>
-      <p:sp>
-        <p:nvSpPr>
-          <p:cNvPr id="11" name="Uᴸ är linjespänning. Ugren är spänningen över en enskild resistor">
+              <a:t>Y: Ugren = U</a:t>
+            </a:r>
+            <a:r>
+              <a:rPr sz="2400" b="1" baseline="-25000">
+                <a:solidFill>
+                  <a:srgbClr val="064F91"/>
+                </a:solidFill>
+                <a:latin typeface="Calibri"/>
+                <a:ea typeface="Calibri"/>
+                <a:cs typeface="Calibri"/>
+              </a:rPr>
+              <a:t>L</a:t>
+            </a:r>
+            <a:r>
+              <a:rPr sz="2400" b="1">
+                <a:solidFill>
+                  <a:srgbClr val="064F91"/>
+                </a:solidFill>
+                <a:latin typeface="Calibri"/>
+                <a:ea typeface="Calibri"/>
+                <a:cs typeface="Calibri"/>
+              </a:rPr>
+              <a:t>/√3</a:t>
+            </a:r>
+          </a:p>
+        </p:txBody>
+      </p:sp>
+      <p:sp>
+        <p:nvSpPr>
+          <p:cNvPr id="11" name="UL är linjespänning. Ugren är spänningen över en enskild resistor">
             <a:extLst xmlns:a="http://schemas.openxmlformats.org/drawingml/2006/main">
               <a:ext uri="{FF2B5EF4-FFF2-40B4-BE49-F238E27FC236}">
                 <a16:creationId xmlns:a16="http://schemas.microsoft.com/office/drawing/2014/main" id="{996EA335-C488-46D1-85F1-50BC1F75E37E}"/>
@@ -3899,7 +3921,29 @@
                 <a:ea typeface="Calibri"/>
                 <a:cs typeface="Calibri"/>
               </a:rPr>
-              <a:t>Uᴸ är linjespänning. Ugren är spänningen över en enskild resistor i Y-lasten.</a:t>
+              <a:t>U</a:t>
+            </a:r>
+            <a:r>
+              <a:rPr sz="2100" b="0" baseline="-25000">
+                <a:solidFill>
+                  <a:srgbClr val="111111"/>
+                </a:solidFill>
+                <a:latin typeface="Calibri"/>
+                <a:ea typeface="Calibri"/>
+                <a:cs typeface="Calibri"/>
+              </a:rPr>
+              <a:t>L</a:t>
+            </a:r>
+            <a:r>
+              <a:rPr sz="2100" b="0">
+                <a:solidFill>
+                  <a:srgbClr val="111111"/>
+                </a:solidFill>
+                <a:latin typeface="Calibri"/>
+                <a:ea typeface="Calibri"/>
+                <a:cs typeface="Calibri"/>
+              </a:rPr>
+              <a:t> är linjespänning. Ugren är spänningen över en enskild resistor i Y-lasten.</a:t>
             </a:r>
           </a:p>
         </p:txBody>
@@ -3956,7 +4000,29 @@
                 <a:ea typeface="Calibri"/>
                 <a:cs typeface="Calibri"/>
               </a:rPr>
-              <a:t>Förutsättningar: Symmetrisk källa och tre lika ohmska grenar på 40 Ω. Uᴸ = 400 V RMS.</a:t>
+              <a:t>Förutsättningar: Symmetrisk källa och tre lika ohmska grenar på 40 Ω. U</a:t>
+            </a:r>
+            <a:r>
+              <a:rPr sz="2025" b="0" baseline="-25000">
+                <a:solidFill>
+                  <a:srgbClr val="111111"/>
+                </a:solidFill>
+                <a:latin typeface="Calibri"/>
+                <a:ea typeface="Calibri"/>
+                <a:cs typeface="Calibri"/>
+              </a:rPr>
+              <a:t>L</a:t>
+            </a:r>
+            <a:r>
+              <a:rPr sz="2025" b="0">
+                <a:solidFill>
+                  <a:srgbClr val="111111"/>
+                </a:solidFill>
+                <a:latin typeface="Calibri"/>
+                <a:ea typeface="Calibri"/>
+                <a:cs typeface="Calibri"/>
+              </a:rPr>
+              <a:t> = 400 V RMS.</a:t>
             </a:r>
           </a:p>
         </p:txBody>
@@ -4254,7 +4320,7 @@
         <p:spPr>
           <a:xfrm xmlns:a="http://schemas.openxmlformats.org/drawingml/2006/main">
             <a:off x="762000" y="2533650"/>
-            <a:ext cx="7620000" cy="2286000"/>
+            <a:ext cx="3886200" cy="2606040"/>
           </a:xfrm>
           <a:prstGeom xmlns:a="http://schemas.openxmlformats.org/drawingml/2006/main" prst="rect">
             <a:avLst/>
@@ -4290,7 +4356,7 @@
                 <a:ea typeface="Calibri"/>
                 <a:cs typeface="Calibri"/>
               </a:rPr>
-              <a:t>Tre lika resistorer på 40 Ω kopplas i Y till 400 V linjespänning. Bestäm grenspänningen.</a:t>
+              <a:t>Tre lika resistorer på 40 Ω kopplas i Y till 400 V linjespänning. Bestäm grenspänningen.</a:t>
             </a:r>
           </a:p>
         </p:txBody>
@@ -4411,6 +4477,30 @@
           </a:p>
         </p:txBody>
       </p:sp>
+      <p:pic xmlns:a="http://schemas.openxmlformats.org/drawingml/2006/main" xmlns:r="http://schemas.openxmlformats.org/officeDocument/2006/relationships">
+        <p:nvPicPr>
+          <p:cNvPr id="9" name="Figur: Y-last med tre resistorer på 40 ohm vid " descr="Y-last med tre resistorer på 40 ohm vid linjespänningen 400 V; grenspänningen okänd"/>
+          <p:cNvPicPr>
+            <a:picLocks noChangeAspect="1"/>
+          </p:cNvPicPr>
+          <p:nvPr/>
+        </p:nvPicPr>
+        <p:blipFill>
+          <a:blip r:embed="rId3"/>
+          <a:stretch>
+            <a:fillRect/>
+          </a:stretch>
+        </p:blipFill>
+        <p:spPr>
+          <a:xfrm>
+            <a:off x="4846320" y="2331720"/>
+            <a:ext cx="3931920" cy="2740984"/>
+          </a:xfrm>
+          <a:prstGeom prst="rect">
+            <a:avLst/>
+          </a:prstGeom>
+        </p:spPr>
+      </p:pic>
     </p:spTree>
     <p:extLst>
       <p:ext uri="{BB962C8B-B14F-4D97-AF65-F5344CB8AC3E}">
@@ -4516,7 +4606,7 @@
       </p:sp>
       <p:sp>
         <p:nvSpPr>
-          <p:cNvPr id="10" name="Igren = Ugren/R     Y: Iᴸ = Igren">
+          <p:cNvPr id="10" name="Igren = Ugren/R     Y: IL = Igren">
             <a:extLst xmlns:a="http://schemas.openxmlformats.org/drawingml/2006/main">
               <a:ext uri="{FF2B5EF4-FFF2-40B4-BE49-F238E27FC236}">
                 <a16:creationId xmlns:a16="http://schemas.microsoft.com/office/drawing/2014/main" id="{75D7C668-9E05-4BBB-A45C-74617FFEB550}"/>
@@ -4566,14 +4656,36 @@
                 <a:ea typeface="Calibri"/>
                 <a:cs typeface="Calibri"/>
               </a:rPr>
-              <a:t>Igren = Ugren/R     Y: Iᴸ = Igren</a:t>
-            </a:r>
-          </a:p>
-        </p:txBody>
-      </p:sp>
-      <p:sp>
-        <p:nvSpPr>
-          <p:cNvPr id="11" name="Linjeström Iᴸ och grenström Igren är lika i Y eftersom samma strö">
+              <a:t>Igren = Ugren/R     Y: I</a:t>
+            </a:r>
+            <a:r>
+              <a:rPr sz="2400" b="1" baseline="-25000">
+                <a:solidFill>
+                  <a:srgbClr val="064F91"/>
+                </a:solidFill>
+                <a:latin typeface="Calibri"/>
+                <a:ea typeface="Calibri"/>
+                <a:cs typeface="Calibri"/>
+              </a:rPr>
+              <a:t>L</a:t>
+            </a:r>
+            <a:r>
+              <a:rPr sz="2400" b="1">
+                <a:solidFill>
+                  <a:srgbClr val="064F91"/>
+                </a:solidFill>
+                <a:latin typeface="Calibri"/>
+                <a:ea typeface="Calibri"/>
+                <a:cs typeface="Calibri"/>
+              </a:rPr>
+              <a:t> = Igren</a:t>
+            </a:r>
+          </a:p>
+        </p:txBody>
+      </p:sp>
+      <p:sp>
+        <p:nvSpPr>
+          <p:cNvPr id="11" name="Linjeström IL och grenström Igren är lika i Y eftersom samma strö">
             <a:extLst xmlns:a="http://schemas.openxmlformats.org/drawingml/2006/main">
               <a:ext uri="{FF2B5EF4-FFF2-40B4-BE49-F238E27FC236}">
                 <a16:creationId xmlns:a16="http://schemas.microsoft.com/office/drawing/2014/main" id="{C3EFCFE4-F474-4E96-8DCD-3D5A648781A6}"/>
@@ -4623,14 +4735,36 @@
                 <a:ea typeface="Calibri"/>
                 <a:cs typeface="Calibri"/>
               </a:rPr>
-              <a:t>Linjeström Iᴸ och grenström Igren är lika i Y eftersom samma strömväg passerar grenen.</a:t>
-            </a:r>
-          </a:p>
-        </p:txBody>
-      </p:sp>
-      <p:sp>
-        <p:nvSpPr>
-          <p:cNvPr id="12" name="Förutsättningar: Y-last med tre 40 Ω-resistorer och Uᴸ = 400 V. U">
+              <a:t>Linjeström I</a:t>
+            </a:r>
+            <a:r>
+              <a:rPr sz="2100" b="0" baseline="-25000">
+                <a:solidFill>
+                  <a:srgbClr val="111111"/>
+                </a:solidFill>
+                <a:latin typeface="Calibri"/>
+                <a:ea typeface="Calibri"/>
+                <a:cs typeface="Calibri"/>
+              </a:rPr>
+              <a:t>L</a:t>
+            </a:r>
+            <a:r>
+              <a:rPr sz="2100" b="0">
+                <a:solidFill>
+                  <a:srgbClr val="111111"/>
+                </a:solidFill>
+                <a:latin typeface="Calibri"/>
+                <a:ea typeface="Calibri"/>
+                <a:cs typeface="Calibri"/>
+              </a:rPr>
+              <a:t> och grenström Igren är lika i Y eftersom samma strömväg passerar grenen.</a:t>
+            </a:r>
+          </a:p>
+        </p:txBody>
+      </p:sp>
+      <p:sp>
+        <p:nvSpPr>
+          <p:cNvPr id="12" name="Förutsättningar: Y-last med tre 40 Ω-resistorer och UL = 400 V. U">
             <a:extLst xmlns:a="http://schemas.openxmlformats.org/drawingml/2006/main">
               <a:ext uri="{FF2B5EF4-FFF2-40B4-BE49-F238E27FC236}">
                 <a16:creationId xmlns:a16="http://schemas.microsoft.com/office/drawing/2014/main" id="{7BC201DD-5776-432E-833D-F696862F4135}"/>
@@ -4680,7 +4814,29 @@
                 <a:ea typeface="Calibri"/>
                 <a:cs typeface="Calibri"/>
               </a:rPr>
-              <a:t>Förutsättningar: Y-last med tre 40 Ω-resistorer och Uᴸ = 400 V. Ugren = 400/√3 V.</a:t>
+              <a:t>Förutsättningar: Y-last med tre 40 Ω-resistorer och U</a:t>
+            </a:r>
+            <a:r>
+              <a:rPr sz="2025" b="0" baseline="-25000">
+                <a:solidFill>
+                  <a:srgbClr val="111111"/>
+                </a:solidFill>
+                <a:latin typeface="Calibri"/>
+                <a:ea typeface="Calibri"/>
+                <a:cs typeface="Calibri"/>
+              </a:rPr>
+              <a:t>L</a:t>
+            </a:r>
+            <a:r>
+              <a:rPr sz="2025" b="0">
+                <a:solidFill>
+                  <a:srgbClr val="111111"/>
+                </a:solidFill>
+                <a:latin typeface="Calibri"/>
+                <a:ea typeface="Calibri"/>
+                <a:cs typeface="Calibri"/>
+              </a:rPr>
+              <a:t> = 400 V. Ugren = 400/√3 V.</a:t>
             </a:r>
           </a:p>
         </p:txBody>
@@ -4978,7 +5134,7 @@
         <p:spPr>
           <a:xfrm xmlns:a="http://schemas.openxmlformats.org/drawingml/2006/main">
             <a:off x="762000" y="2533650"/>
-            <a:ext cx="7620000" cy="2286000"/>
+            <a:ext cx="3886200" cy="2606040"/>
           </a:xfrm>
           <a:prstGeom xmlns:a="http://schemas.openxmlformats.org/drawingml/2006/main" prst="rect">
             <a:avLst/>
@@ -5135,6 +5291,30 @@
           </a:p>
         </p:txBody>
       </p:sp>
+      <p:pic xmlns:a="http://schemas.openxmlformats.org/drawingml/2006/main" xmlns:r="http://schemas.openxmlformats.org/officeDocument/2006/relationships">
+        <p:nvPicPr>
+          <p:cNvPr id="9" name="Figur: Y-last med tre resistorer på 40 ohm vid " descr="Y-last med tre resistorer på 40 ohm vid 400 V; linjeström och grenström okända"/>
+          <p:cNvPicPr>
+            <a:picLocks noChangeAspect="1"/>
+          </p:cNvPicPr>
+          <p:nvPr/>
+        </p:nvPicPr>
+        <p:blipFill>
+          <a:blip r:embed="rId3"/>
+          <a:stretch>
+            <a:fillRect/>
+          </a:stretch>
+        </p:blipFill>
+        <p:spPr>
+          <a:xfrm>
+            <a:off x="4846320" y="2331720"/>
+            <a:ext cx="3931920" cy="2740984"/>
+          </a:xfrm>
+          <a:prstGeom prst="rect">
+            <a:avLst/>
+          </a:prstGeom>
+        </p:spPr>
+      </p:pic>
     </p:spTree>
     <p:extLst>
       <p:ext uri="{BB962C8B-B14F-4D97-AF65-F5344CB8AC3E}">
@@ -5240,7 +5420,7 @@
       </p:sp>
       <p:sp>
         <p:nvSpPr>
-          <p:cNvPr id="10" name="Δ: Ugren = Uᴸ     Igren = Ugren/R&#10;Iᴸ = √3 · Igren">
+          <p:cNvPr id="10" name="Δ: Ugren = UL     Igren = Ugren/R&#10;IL = √3 · Igren">
             <a:extLst xmlns:a="http://schemas.openxmlformats.org/drawingml/2006/main">
               <a:ext uri="{FF2B5EF4-FFF2-40B4-BE49-F238E27FC236}">
                 <a16:creationId xmlns:a16="http://schemas.microsoft.com/office/drawing/2014/main" id="{D7AA56F2-7058-4FAB-B7DC-1844B2144D8F}"/>
@@ -5290,7 +5470,29 @@
                 <a:ea typeface="Calibri"/>
                 <a:cs typeface="Calibri"/>
               </a:rPr>
-              <a:t>Δ: Ugren = Uᴸ     Igren = Ugren/R</a:t>
+              <a:t>Δ: Ugren = U</a:t>
+            </a:r>
+            <a:r>
+              <a:rPr sz="2400" b="1" baseline="-25000">
+                <a:solidFill>
+                  <a:srgbClr val="064F91"/>
+                </a:solidFill>
+                <a:latin typeface="Calibri"/>
+                <a:ea typeface="Calibri"/>
+                <a:cs typeface="Calibri"/>
+              </a:rPr>
+              <a:t>L</a:t>
+            </a:r>
+            <a:r>
+              <a:rPr sz="2400" b="1">
+                <a:solidFill>
+                  <a:srgbClr val="064F91"/>
+                </a:solidFill>
+                <a:latin typeface="Calibri"/>
+                <a:ea typeface="Calibri"/>
+                <a:cs typeface="Calibri"/>
+              </a:rPr>
+              <a:t>     Igren = Ugren/R</a:t>
             </a:r>
           </a:p>
           <a:p xmlns:a="http://schemas.openxmlformats.org/drawingml/2006/main">
@@ -5313,7 +5515,29 @@
                 <a:ea typeface="Calibri"/>
                 <a:cs typeface="Calibri"/>
               </a:rPr>
-              <a:t>Iᴸ = √3 · Igren</a:t>
+              <a:t>I</a:t>
+            </a:r>
+            <a:r>
+              <a:rPr sz="2400" b="1" baseline="-25000">
+                <a:solidFill>
+                  <a:srgbClr val="064F91"/>
+                </a:solidFill>
+                <a:latin typeface="Calibri"/>
+                <a:ea typeface="Calibri"/>
+                <a:cs typeface="Calibri"/>
+              </a:rPr>
+              <a:t>L</a:t>
+            </a:r>
+            <a:r>
+              <a:rPr sz="2400" b="1">
+                <a:solidFill>
+                  <a:srgbClr val="064F91"/>
+                </a:solidFill>
+                <a:latin typeface="Calibri"/>
+                <a:ea typeface="Calibri"/>
+                <a:cs typeface="Calibri"/>
+              </a:rPr>
+              <a:t> = √3 · Igren</a:t>
             </a:r>
           </a:p>
         </p:txBody>
@@ -5377,7 +5601,7 @@
       </p:sp>
       <p:sp>
         <p:nvSpPr>
-          <p:cNvPr id="12" name="Förutsättningar: Symmetrisk Δ-last, tre resistorer på 40 Ω och Uᴸ">
+          <p:cNvPr id="12" name="Förutsättningar: Symmetrisk Δ-last, tre resistorer på 40 Ω och UL">
             <a:extLst xmlns:a="http://schemas.openxmlformats.org/drawingml/2006/main">
               <a:ext uri="{FF2B5EF4-FFF2-40B4-BE49-F238E27FC236}">
                 <a16:creationId xmlns:a16="http://schemas.microsoft.com/office/drawing/2014/main" id="{687B835B-6225-4CE7-915C-4D39FF161C4B}"/>
@@ -5427,7 +5651,29 @@
                 <a:ea typeface="Calibri"/>
                 <a:cs typeface="Calibri"/>
               </a:rPr>
-              <a:t>Förutsättningar: Symmetrisk Δ-last, tre resistorer på 40 Ω och Uᴸ = 400 V RMS.</a:t>
+              <a:t>Förutsättningar: Symmetrisk Δ-last, tre resistorer på 40 Ω och U</a:t>
+            </a:r>
+            <a:r>
+              <a:rPr sz="2025" b="0" baseline="-25000">
+                <a:solidFill>
+                  <a:srgbClr val="111111"/>
+                </a:solidFill>
+                <a:latin typeface="Calibri"/>
+                <a:ea typeface="Calibri"/>
+                <a:cs typeface="Calibri"/>
+              </a:rPr>
+              <a:t>L</a:t>
+            </a:r>
+            <a:r>
+              <a:rPr sz="2025" b="0">
+                <a:solidFill>
+                  <a:srgbClr val="111111"/>
+                </a:solidFill>
+                <a:latin typeface="Calibri"/>
+                <a:ea typeface="Calibri"/>
+                <a:cs typeface="Calibri"/>
+              </a:rPr>
+              <a:t> = 400 V RMS.</a:t>
             </a:r>
           </a:p>
         </p:txBody>
@@ -5725,7 +5971,7 @@
         <p:spPr>
           <a:xfrm xmlns:a="http://schemas.openxmlformats.org/drawingml/2006/main">
             <a:off x="762000" y="2533650"/>
-            <a:ext cx="7620000" cy="2286000"/>
+            <a:ext cx="3886200" cy="2606040"/>
           </a:xfrm>
           <a:prstGeom xmlns:a="http://schemas.openxmlformats.org/drawingml/2006/main" prst="rect">
             <a:avLst/>
@@ -5761,7 +6007,7 @@
                 <a:ea typeface="Calibri"/>
                 <a:cs typeface="Calibri"/>
               </a:rPr>
-              <a:t>Tre resistorer på 40 Ω kopplas i Δ till 400 V. Bestäm grenström och linjeström.</a:t>
+              <a:t>Tre resistorer på 40 Ω kopplas i Δ till 400 V. Bestäm grenström och linjeström.</a:t>
             </a:r>
           </a:p>
         </p:txBody>
@@ -5882,6 +6128,30 @@
           </a:p>
         </p:txBody>
       </p:sp>
+      <p:pic xmlns:a="http://schemas.openxmlformats.org/drawingml/2006/main" xmlns:r="http://schemas.openxmlformats.org/officeDocument/2006/relationships">
+        <p:nvPicPr>
+          <p:cNvPr id="9" name="Figur: Δ-last med tre resistorer på 40 ohm vid " descr="Δ-last med tre resistorer på 40 ohm vid 400 V; linjeström och grenström okända"/>
+          <p:cNvPicPr>
+            <a:picLocks noChangeAspect="1"/>
+          </p:cNvPicPr>
+          <p:nvPr/>
+        </p:nvPicPr>
+        <p:blipFill>
+          <a:blip r:embed="rId3"/>
+          <a:stretch>
+            <a:fillRect/>
+          </a:stretch>
+        </p:blipFill>
+        <p:spPr>
+          <a:xfrm>
+            <a:off x="4846320" y="2331720"/>
+            <a:ext cx="3931920" cy="2740984"/>
+          </a:xfrm>
+          <a:prstGeom prst="rect">
+            <a:avLst/>
+          </a:prstGeom>
+        </p:spPr>
+      </p:pic>
     </p:spTree>
     <p:extLst>
       <p:ext uri="{BB962C8B-B14F-4D97-AF65-F5344CB8AC3E}">
@@ -5987,7 +6257,7 @@
       </p:sp>
       <p:sp>
         <p:nvSpPr>
-          <p:cNvPr id="10" name="P = √3 · Uᴸ · Iᴸ · cos φ">
+          <p:cNvPr id="10" name="P = √3 · UL · IL · cos φ">
             <a:extLst xmlns:a="http://schemas.openxmlformats.org/drawingml/2006/main">
               <a:ext uri="{FF2B5EF4-FFF2-40B4-BE49-F238E27FC236}">
                 <a16:creationId xmlns:a16="http://schemas.microsoft.com/office/drawing/2014/main" id="{7F7C0961-D3BB-490B-996A-02720A79EBC2}"/>
@@ -6037,14 +6307,58 @@
                 <a:ea typeface="Calibri"/>
                 <a:cs typeface="Calibri"/>
               </a:rPr>
-              <a:t>P = √3 · Uᴸ · Iᴸ · cos φ</a:t>
-            </a:r>
-          </a:p>
-        </p:txBody>
-      </p:sp>
-      <p:sp>
-        <p:nvSpPr>
-          <p:cNvPr id="11" name="P är total aktiv trefaseffekt. Uᴸ och Iᴸ är linjevärden i V och A">
+              <a:t>P = √3 · U</a:t>
+            </a:r>
+            <a:r>
+              <a:rPr sz="2400" b="1" baseline="-25000">
+                <a:solidFill>
+                  <a:srgbClr val="064F91"/>
+                </a:solidFill>
+                <a:latin typeface="Calibri"/>
+                <a:ea typeface="Calibri"/>
+                <a:cs typeface="Calibri"/>
+              </a:rPr>
+              <a:t>L</a:t>
+            </a:r>
+            <a:r>
+              <a:rPr sz="2400" b="1">
+                <a:solidFill>
+                  <a:srgbClr val="064F91"/>
+                </a:solidFill>
+                <a:latin typeface="Calibri"/>
+                <a:ea typeface="Calibri"/>
+                <a:cs typeface="Calibri"/>
+              </a:rPr>
+              <a:t> · I</a:t>
+            </a:r>
+            <a:r>
+              <a:rPr sz="2400" b="1" baseline="-25000">
+                <a:solidFill>
+                  <a:srgbClr val="064F91"/>
+                </a:solidFill>
+                <a:latin typeface="Calibri"/>
+                <a:ea typeface="Calibri"/>
+                <a:cs typeface="Calibri"/>
+              </a:rPr>
+              <a:t>L</a:t>
+            </a:r>
+            <a:r>
+              <a:rPr sz="2400" b="1">
+                <a:solidFill>
+                  <a:srgbClr val="064F91"/>
+                </a:solidFill>
+                <a:latin typeface="Calibri"/>
+                <a:ea typeface="Calibri"/>
+                <a:cs typeface="Calibri"/>
+              </a:rPr>
+              <a:t> · cos φ</a:t>
+            </a:r>
+          </a:p>
+        </p:txBody>
+      </p:sp>
+      <p:sp>
+        <p:nvSpPr>
+          <p:cNvPr id="11" name="P är total aktiv trefaseffekt. UL och IL är linjevärden i V och A">
             <a:extLst xmlns:a="http://schemas.openxmlformats.org/drawingml/2006/main">
               <a:ext uri="{FF2B5EF4-FFF2-40B4-BE49-F238E27FC236}">
                 <a16:creationId xmlns:a16="http://schemas.microsoft.com/office/drawing/2014/main" id="{6454951C-AE51-45D5-AF8E-9495435F1098}"/>
@@ -6094,14 +6408,58 @@
                 <a:ea typeface="Calibri"/>
                 <a:cs typeface="Calibri"/>
               </a:rPr>
-              <a:t>P är total aktiv trefaseffekt. Uᴸ och Iᴸ är linjevärden i V och A RMS.</a:t>
-            </a:r>
-          </a:p>
-        </p:txBody>
-      </p:sp>
-      <p:sp>
-        <p:nvSpPr>
-          <p:cNvPr id="12" name="Förutsättningar: Symmetrisk sinusformad last, Uᴸ = 400 V, Iᴸ = 10">
+              <a:t>P är total aktiv trefaseffekt. U</a:t>
+            </a:r>
+            <a:r>
+              <a:rPr sz="2100" b="0" baseline="-25000">
+                <a:solidFill>
+                  <a:srgbClr val="111111"/>
+                </a:solidFill>
+                <a:latin typeface="Calibri"/>
+                <a:ea typeface="Calibri"/>
+                <a:cs typeface="Calibri"/>
+              </a:rPr>
+              <a:t>L</a:t>
+            </a:r>
+            <a:r>
+              <a:rPr sz="2100" b="0">
+                <a:solidFill>
+                  <a:srgbClr val="111111"/>
+                </a:solidFill>
+                <a:latin typeface="Calibri"/>
+                <a:ea typeface="Calibri"/>
+                <a:cs typeface="Calibri"/>
+              </a:rPr>
+              <a:t> och I</a:t>
+            </a:r>
+            <a:r>
+              <a:rPr sz="2100" b="0" baseline="-25000">
+                <a:solidFill>
+                  <a:srgbClr val="111111"/>
+                </a:solidFill>
+                <a:latin typeface="Calibri"/>
+                <a:ea typeface="Calibri"/>
+                <a:cs typeface="Calibri"/>
+              </a:rPr>
+              <a:t>L</a:t>
+            </a:r>
+            <a:r>
+              <a:rPr sz="2100" b="0">
+                <a:solidFill>
+                  <a:srgbClr val="111111"/>
+                </a:solidFill>
+                <a:latin typeface="Calibri"/>
+                <a:ea typeface="Calibri"/>
+                <a:cs typeface="Calibri"/>
+              </a:rPr>
+              <a:t> är linjevärden i V och A RMS.</a:t>
+            </a:r>
+          </a:p>
+        </p:txBody>
+      </p:sp>
+      <p:sp>
+        <p:nvSpPr>
+          <p:cNvPr id="12" name="Förutsättningar: Symmetrisk sinusformad last, UL = 400 V, IL = 10">
             <a:extLst xmlns:a="http://schemas.openxmlformats.org/drawingml/2006/main">
               <a:ext uri="{FF2B5EF4-FFF2-40B4-BE49-F238E27FC236}">
                 <a16:creationId xmlns:a16="http://schemas.microsoft.com/office/drawing/2014/main" id="{C5A5D998-6A44-4401-AD7D-75FA42086E81}"/>
@@ -6151,7 +6509,51 @@
                 <a:ea typeface="Calibri"/>
                 <a:cs typeface="Calibri"/>
               </a:rPr>
-              <a:t>Förutsättningar: Symmetrisk sinusformad last, Uᴸ = 400 V, Iᴸ = 10 A, cos φ = 0,80.</a:t>
+              <a:t>Förutsättningar: Symmetrisk sinusformad last, U</a:t>
+            </a:r>
+            <a:r>
+              <a:rPr sz="2025" b="0" baseline="-25000">
+                <a:solidFill>
+                  <a:srgbClr val="111111"/>
+                </a:solidFill>
+                <a:latin typeface="Calibri"/>
+                <a:ea typeface="Calibri"/>
+                <a:cs typeface="Calibri"/>
+              </a:rPr>
+              <a:t>L</a:t>
+            </a:r>
+            <a:r>
+              <a:rPr sz="2025" b="0">
+                <a:solidFill>
+                  <a:srgbClr val="111111"/>
+                </a:solidFill>
+                <a:latin typeface="Calibri"/>
+                <a:ea typeface="Calibri"/>
+                <a:cs typeface="Calibri"/>
+              </a:rPr>
+              <a:t> = 400 V, I</a:t>
+            </a:r>
+            <a:r>
+              <a:rPr sz="2025" b="0" baseline="-25000">
+                <a:solidFill>
+                  <a:srgbClr val="111111"/>
+                </a:solidFill>
+                <a:latin typeface="Calibri"/>
+                <a:ea typeface="Calibri"/>
+                <a:cs typeface="Calibri"/>
+              </a:rPr>
+              <a:t>L</a:t>
+            </a:r>
+            <a:r>
+              <a:rPr sz="2025" b="0">
+                <a:solidFill>
+                  <a:srgbClr val="111111"/>
+                </a:solidFill>
+                <a:latin typeface="Calibri"/>
+                <a:ea typeface="Calibri"/>
+                <a:cs typeface="Calibri"/>
+              </a:rPr>
+              <a:t> = 10 A, cos φ = 0,80.</a:t>
             </a:r>
           </a:p>
         </p:txBody>
@@ -6434,7 +6836,7 @@
       </p:sp>
       <p:sp>
         <p:nvSpPr>
-          <p:cNvPr id="4" name="En symmetrisk trefaslast har Uᴸ = 400 V, Iᴸ = 10 A och cos φ = 0,">
+          <p:cNvPr id="4" name="En symmetrisk trefaslast har UL = 400 V, IL = 10 A och cos φ = 0,">
             <a:extLst xmlns:a="http://schemas.openxmlformats.org/drawingml/2006/main">
               <a:ext uri="{FF2B5EF4-FFF2-40B4-BE49-F238E27FC236}">
                 <a16:creationId xmlns:a16="http://schemas.microsoft.com/office/drawing/2014/main" id="{AFAF5394-C6DF-49C1-A4A5-B8BE5A56D062}"/>
@@ -6449,7 +6851,7 @@
         <p:spPr>
           <a:xfrm xmlns:a="http://schemas.openxmlformats.org/drawingml/2006/main">
             <a:off x="762000" y="2533650"/>
-            <a:ext cx="7620000" cy="2286000"/>
+            <a:ext cx="3886200" cy="2606040"/>
           </a:xfrm>
           <a:prstGeom xmlns:a="http://schemas.openxmlformats.org/drawingml/2006/main" prst="rect">
             <a:avLst/>
@@ -6485,7 +6887,51 @@
                 <a:ea typeface="Calibri"/>
                 <a:cs typeface="Calibri"/>
               </a:rPr>
-              <a:t>En symmetrisk trefaslast har Uᴸ = 400 V, Iᴸ = 10 A och cos φ = 0,80. Beräkna P.</a:t>
+              <a:t>En symmetrisk trefaslast har U</a:t>
+            </a:r>
+            <a:r>
+              <a:rPr sz="2400" b="0" baseline="-25000">
+                <a:solidFill>
+                  <a:srgbClr val="111111"/>
+                </a:solidFill>
+                <a:latin typeface="Calibri"/>
+                <a:ea typeface="Calibri"/>
+                <a:cs typeface="Calibri"/>
+              </a:rPr>
+              <a:t>L</a:t>
+            </a:r>
+            <a:r>
+              <a:rPr sz="2400" b="0">
+                <a:solidFill>
+                  <a:srgbClr val="111111"/>
+                </a:solidFill>
+                <a:latin typeface="Calibri"/>
+                <a:ea typeface="Calibri"/>
+                <a:cs typeface="Calibri"/>
+              </a:rPr>
+              <a:t> = 400 V, I</a:t>
+            </a:r>
+            <a:r>
+              <a:rPr sz="2400" b="0" baseline="-25000">
+                <a:solidFill>
+                  <a:srgbClr val="111111"/>
+                </a:solidFill>
+                <a:latin typeface="Calibri"/>
+                <a:ea typeface="Calibri"/>
+                <a:cs typeface="Calibri"/>
+              </a:rPr>
+              <a:t>L</a:t>
+            </a:r>
+            <a:r>
+              <a:rPr sz="2400" b="0">
+                <a:solidFill>
+                  <a:srgbClr val="111111"/>
+                </a:solidFill>
+                <a:latin typeface="Calibri"/>
+                <a:ea typeface="Calibri"/>
+                <a:cs typeface="Calibri"/>
+              </a:rPr>
+              <a:t> = 10 A och cos φ = 0,80. Beräkna P.</a:t>
             </a:r>
           </a:p>
         </p:txBody>
@@ -6606,6 +7052,30 @@
           </a:p>
         </p:txBody>
       </p:sp>
+      <p:pic xmlns:a="http://schemas.openxmlformats.org/drawingml/2006/main" xmlns:r="http://schemas.openxmlformats.org/officeDocument/2006/relationships">
+        <p:nvPicPr>
+          <p:cNvPr id="9" name="Figur: Trefasmotor matad med 400 V och 10 A lin" descr="Trefasmotor matad med 400 V och 10 A linjeström vid cos fi 0,80; aktiv effekt okänd"/>
+          <p:cNvPicPr>
+            <a:picLocks noChangeAspect="1"/>
+          </p:cNvPicPr>
+          <p:nvPr/>
+        </p:nvPicPr>
+        <p:blipFill>
+          <a:blip r:embed="rId3"/>
+          <a:stretch>
+            <a:fillRect/>
+          </a:stretch>
+        </p:blipFill>
+        <p:spPr>
+          <a:xfrm>
+            <a:off x="4846320" y="2331720"/>
+            <a:ext cx="3931920" cy="2740984"/>
+          </a:xfrm>
+          <a:prstGeom prst="rect">
+            <a:avLst/>
+          </a:prstGeom>
+        </p:spPr>
+      </p:pic>
     </p:spTree>
     <p:extLst>
       <p:ext uri="{BB962C8B-B14F-4D97-AF65-F5344CB8AC3E}">
@@ -6711,7 +7181,7 @@
       </p:sp>
       <p:sp>
         <p:nvSpPr>
-          <p:cNvPr id="10" name="S = √3 UᴸIᴸ     Q = S sin φ&#10;sin φ = √(1 − cos²φ)">
+          <p:cNvPr id="10" name="S = √3 ULIL     Q = S sin φ&#10;sin φ = √(1 − cos²φ)">
             <a:extLst xmlns:a="http://schemas.openxmlformats.org/drawingml/2006/main">
               <a:ext uri="{FF2B5EF4-FFF2-40B4-BE49-F238E27FC236}">
                 <a16:creationId xmlns:a16="http://schemas.microsoft.com/office/drawing/2014/main" id="{1215796E-5FF1-4A63-AA30-58300E58FD16}"/>
@@ -6761,7 +7231,51 @@
                 <a:ea typeface="Calibri"/>
                 <a:cs typeface="Calibri"/>
               </a:rPr>
-              <a:t>S = √3 UᴸIᴸ     Q = S sin φ</a:t>
+              <a:t>S = √3 U</a:t>
+            </a:r>
+            <a:r>
+              <a:rPr sz="2400" b="1" baseline="-25000">
+                <a:solidFill>
+                  <a:srgbClr val="064F91"/>
+                </a:solidFill>
+                <a:latin typeface="Calibri"/>
+                <a:ea typeface="Calibri"/>
+                <a:cs typeface="Calibri"/>
+              </a:rPr>
+              <a:t>L</a:t>
+            </a:r>
+            <a:r>
+              <a:rPr sz="2400" b="1">
+                <a:solidFill>
+                  <a:srgbClr val="064F91"/>
+                </a:solidFill>
+                <a:latin typeface="Calibri"/>
+                <a:ea typeface="Calibri"/>
+                <a:cs typeface="Calibri"/>
+              </a:rPr>
+              <a:t>I</a:t>
+            </a:r>
+            <a:r>
+              <a:rPr sz="2400" b="1" baseline="-25000">
+                <a:solidFill>
+                  <a:srgbClr val="064F91"/>
+                </a:solidFill>
+                <a:latin typeface="Calibri"/>
+                <a:ea typeface="Calibri"/>
+                <a:cs typeface="Calibri"/>
+              </a:rPr>
+              <a:t>L</a:t>
+            </a:r>
+            <a:r>
+              <a:rPr sz="2400" b="1">
+                <a:solidFill>
+                  <a:srgbClr val="064F91"/>
+                </a:solidFill>
+                <a:latin typeface="Calibri"/>
+                <a:ea typeface="Calibri"/>
+                <a:cs typeface="Calibri"/>
+              </a:rPr>
+              <a:t>     Q = S sin φ</a:t>
             </a:r>
           </a:p>
           <a:p xmlns:a="http://schemas.openxmlformats.org/drawingml/2006/main">
@@ -6848,7 +7362,7 @@
       </p:sp>
       <p:sp>
         <p:nvSpPr>
-          <p:cNvPr id="12" name="Förutsättningar: Uᴸ = 400 V, Iᴸ = 10 A, cos φ = 0,80. Symmetrisk ">
+          <p:cNvPr id="12" name="Förutsättningar: UL = 400 V, IL = 10 A, cos φ = 0,80. Symmetrisk ">
             <a:extLst xmlns:a="http://schemas.openxmlformats.org/drawingml/2006/main">
               <a:ext uri="{FF2B5EF4-FFF2-40B4-BE49-F238E27FC236}">
                 <a16:creationId xmlns:a16="http://schemas.microsoft.com/office/drawing/2014/main" id="{49FEF356-6177-41EB-B197-536A363A4F31}"/>
@@ -6898,7 +7412,51 @@
                 <a:ea typeface="Calibri"/>
                 <a:cs typeface="Calibri"/>
               </a:rPr>
-              <a:t>Förutsättningar: Uᴸ = 400 V, Iᴸ = 10 A, cos φ = 0,80. Symmetrisk last med rena sinussignaler.</a:t>
+              <a:t>Förutsättningar: U</a:t>
+            </a:r>
+            <a:r>
+              <a:rPr sz="2025" b="0" baseline="-25000">
+                <a:solidFill>
+                  <a:srgbClr val="111111"/>
+                </a:solidFill>
+                <a:latin typeface="Calibri"/>
+                <a:ea typeface="Calibri"/>
+                <a:cs typeface="Calibri"/>
+              </a:rPr>
+              <a:t>L</a:t>
+            </a:r>
+            <a:r>
+              <a:rPr sz="2025" b="0">
+                <a:solidFill>
+                  <a:srgbClr val="111111"/>
+                </a:solidFill>
+                <a:latin typeface="Calibri"/>
+                <a:ea typeface="Calibri"/>
+                <a:cs typeface="Calibri"/>
+              </a:rPr>
+              <a:t> = 400 V, I</a:t>
+            </a:r>
+            <a:r>
+              <a:rPr sz="2025" b="0" baseline="-25000">
+                <a:solidFill>
+                  <a:srgbClr val="111111"/>
+                </a:solidFill>
+                <a:latin typeface="Calibri"/>
+                <a:ea typeface="Calibri"/>
+                <a:cs typeface="Calibri"/>
+              </a:rPr>
+              <a:t>L</a:t>
+            </a:r>
+            <a:r>
+              <a:rPr sz="2025" b="0">
+                <a:solidFill>
+                  <a:srgbClr val="111111"/>
+                </a:solidFill>
+                <a:latin typeface="Calibri"/>
+                <a:ea typeface="Calibri"/>
+                <a:cs typeface="Calibri"/>
+              </a:rPr>
+              <a:t> = 10 A, cos φ = 0,80. Symmetrisk last med rena sinussignaler.</a:t>
             </a:r>
           </a:p>
         </p:txBody>
@@ -7196,7 +7754,7 @@
         <p:spPr>
           <a:xfrm xmlns:a="http://schemas.openxmlformats.org/drawingml/2006/main">
             <a:off x="762000" y="2533650"/>
-            <a:ext cx="7620000" cy="2286000"/>
+            <a:ext cx="3886200" cy="2606040"/>
           </a:xfrm>
           <a:prstGeom xmlns:a="http://schemas.openxmlformats.org/drawingml/2006/main" prst="rect">
             <a:avLst/>
@@ -7353,6 +7911,30 @@
           </a:p>
         </p:txBody>
       </p:sp>
+      <p:pic xmlns:a="http://schemas.openxmlformats.org/drawingml/2006/main" xmlns:r="http://schemas.openxmlformats.org/officeDocument/2006/relationships">
+        <p:nvPicPr>
+          <p:cNvPr id="9" name="Figur: Effekttriangel för induktiv last med cos" descr="Effekttriangel för induktiv last med cos fi 0,80; S och Q okända"/>
+          <p:cNvPicPr>
+            <a:picLocks noChangeAspect="1"/>
+          </p:cNvPicPr>
+          <p:nvPr/>
+        </p:nvPicPr>
+        <p:blipFill>
+          <a:blip r:embed="rId3"/>
+          <a:stretch>
+            <a:fillRect/>
+          </a:stretch>
+        </p:blipFill>
+        <p:spPr>
+          <a:xfrm>
+            <a:off x="4846320" y="2331720"/>
+            <a:ext cx="3931920" cy="2740984"/>
+          </a:xfrm>
+          <a:prstGeom prst="rect">
+            <a:avLst/>
+          </a:prstGeom>
+        </p:spPr>
+      </p:pic>
     </p:spTree>
     <p:extLst>
       <p:ext uri="{BB962C8B-B14F-4D97-AF65-F5344CB8AC3E}">
@@ -8218,7 +8800,7 @@
         <p:spPr>
           <a:xfrm xmlns:a="http://schemas.openxmlformats.org/drawingml/2006/main">
             <a:off x="762000" y="1619250"/>
-            <a:ext cx="7620000" cy="1466850"/>
+            <a:ext cx="3977639" cy="1466850"/>
           </a:xfrm>
           <a:prstGeom xmlns:a="http://schemas.openxmlformats.org/drawingml/2006/main" prst="rect">
             <a:avLst/>
@@ -8246,15 +8828,15 @@
               </a:defRPr>
             </a:pPr>
             <a:r>
-              <a:rPr sz="2400" b="0">
-                <a:solidFill>
-                  <a:srgbClr val="111111"/>
-                </a:solidFill>
-                <a:latin typeface="Calibri"/>
-                <a:ea typeface="Calibri"/>
-                <a:cs typeface="Calibri"/>
-              </a:rPr>
-              <a:t>Märkningen Δ/Y 230/400 V anger spänningen för varje koppling.</a:t>
+              <a:rPr sz="1800" b="0">
+                <a:solidFill>
+                  <a:srgbClr val="111111"/>
+                </a:solidFill>
+                <a:latin typeface="Calibri"/>
+                <a:ea typeface="Calibri"/>
+                <a:cs typeface="Calibri"/>
+              </a:rPr>
+              <a:t>Märkningen Δ/Y 230/400 V anger spänningen för varje koppling.</a:t>
             </a:r>
           </a:p>
           <a:p xmlns:a="http://schemas.openxmlformats.org/drawingml/2006/main">
@@ -8270,7 +8852,7 @@
               </a:defRPr>
             </a:pPr>
             <a:r>
-              <a:rPr sz="2400" b="0">
+              <a:rPr sz="1800" b="0">
                 <a:solidFill>
                   <a:srgbClr val="111111"/>
                 </a:solidFill>
@@ -8300,7 +8882,7 @@
         <p:spPr>
           <a:xfrm xmlns:a="http://schemas.openxmlformats.org/drawingml/2006/main">
             <a:off x="762000" y="3200400"/>
-            <a:ext cx="7620000" cy="838200"/>
+            <a:ext cx="3977639" cy="838200"/>
           </a:xfrm>
           <a:prstGeom xmlns:a="http://schemas.openxmlformats.org/drawingml/2006/main" prst="rect">
             <a:avLst/>
@@ -8328,7 +8910,7 @@
               </a:defRPr>
             </a:pPr>
             <a:r>
-              <a:rPr sz="2925" b="1">
+              <a:rPr sz="2650" b="1">
                 <a:solidFill>
                   <a:srgbClr val="064F91"/>
                 </a:solidFill>
@@ -8336,7 +8918,29 @@
                 <a:ea typeface="Calibri"/>
                 <a:cs typeface="Calibri"/>
               </a:rPr>
-              <a:t>Δ/Y 230/400 V vid 400 V: Y</a:t>
+              <a:t>Nätets U</a:t>
+            </a:r>
+            <a:r>
+              <a:rPr sz="2650" b="1" baseline="-25000">
+                <a:solidFill>
+                  <a:srgbClr val="064F91"/>
+                </a:solidFill>
+                <a:latin typeface="Calibri"/>
+                <a:ea typeface="Calibri"/>
+                <a:cs typeface="Calibri"/>
+              </a:rPr>
+              <a:t>L</a:t>
+            </a:r>
+            <a:r>
+              <a:rPr sz="2650" b="1">
+                <a:solidFill>
+                  <a:srgbClr val="064F91"/>
+                </a:solidFill>
+                <a:latin typeface="Calibri"/>
+                <a:ea typeface="Calibri"/>
+                <a:cs typeface="Calibri"/>
+              </a:rPr>
+              <a:t> = högre märkvärde: Y</a:t>
             </a:r>
           </a:p>
         </p:txBody>
@@ -8358,7 +8962,7 @@
         <p:spPr>
           <a:xfrm xmlns:a="http://schemas.openxmlformats.org/drawingml/2006/main">
             <a:off x="762000" y="4429125"/>
-            <a:ext cx="7620000" cy="1352550"/>
+            <a:ext cx="3977639" cy="1352550"/>
           </a:xfrm>
           <a:prstGeom xmlns:a="http://schemas.openxmlformats.org/drawingml/2006/main" prst="rect">
             <a:avLst/>
@@ -8386,15 +8990,37 @@
               </a:defRPr>
             </a:pPr>
             <a:r>
-              <a:rPr sz="2250" b="0">
-                <a:solidFill>
-                  <a:srgbClr val="111111"/>
-                </a:solidFill>
-                <a:latin typeface="Calibri"/>
-                <a:ea typeface="Calibri"/>
-                <a:cs typeface="Calibri"/>
-              </a:rPr>
-              <a:t>Δ/Y 400/690 V vid 400 V: Δ.</a:t>
+              <a:rPr sz="2000" b="0">
+                <a:solidFill>
+                  <a:srgbClr val="111111"/>
+                </a:solidFill>
+                <a:latin typeface="Calibri"/>
+                <a:ea typeface="Calibri"/>
+                <a:cs typeface="Calibri"/>
+              </a:rPr>
+              <a:t>Nätets U</a:t>
+            </a:r>
+            <a:r>
+              <a:rPr sz="2000" b="0" baseline="-25000">
+                <a:solidFill>
+                  <a:srgbClr val="111111"/>
+                </a:solidFill>
+                <a:latin typeface="Calibri"/>
+                <a:ea typeface="Calibri"/>
+                <a:cs typeface="Calibri"/>
+              </a:rPr>
+              <a:t>L</a:t>
+            </a:r>
+            <a:r>
+              <a:rPr sz="2000" b="0">
+                <a:solidFill>
+                  <a:srgbClr val="111111"/>
+                </a:solidFill>
+                <a:latin typeface="Calibri"/>
+                <a:ea typeface="Calibri"/>
+                <a:cs typeface="Calibri"/>
+              </a:rPr>
+              <a:t> = lägre märkvärde: Δ.</a:t>
             </a:r>
           </a:p>
           <a:p xmlns:a="http://schemas.openxmlformats.org/drawingml/2006/main">
@@ -8410,15 +9036,15 @@
               </a:defRPr>
             </a:pPr>
             <a:r>
-              <a:rPr sz="2250" b="0">
-                <a:solidFill>
-                  <a:srgbClr val="111111"/>
-                </a:solidFill>
-                <a:latin typeface="Calibri"/>
-                <a:ea typeface="Calibri"/>
-                <a:cs typeface="Calibri"/>
-              </a:rPr>
-              <a:t>En 230/400 V-motor kan inte köras i Δ på 400 V.</a:t>
+              <a:rPr sz="2000" b="0">
+                <a:solidFill>
+                  <a:srgbClr val="111111"/>
+                </a:solidFill>
+                <a:latin typeface="Calibri"/>
+                <a:ea typeface="Calibri"/>
+                <a:cs typeface="Calibri"/>
+              </a:rPr>
+              <a:t>Ombord: en motor Δ/Y 440/760 V på 440 V-nät kopplas i Δ.</a:t>
             </a:r>
           </a:p>
         </p:txBody>
@@ -8481,6 +9107,30 @@
           </a:p>
         </p:txBody>
       </p:sp>
+      <p:pic xmlns:a="http://schemas.openxmlformats.org/drawingml/2006/main" xmlns:r="http://schemas.openxmlformats.org/officeDocument/2006/relationships">
+        <p:nvPicPr>
+          <p:cNvPr id="9" name="Figur: Motorns kopplingsplint: Y med bygel över" descr="Motorns kopplingsplint: Y med bygel över W2, U2, V2 och Δ med byglar U1–W2, V1–U2, W1–V2"/>
+          <p:cNvPicPr>
+            <a:picLocks noChangeAspect="1"/>
+          </p:cNvPicPr>
+          <p:nvPr/>
+        </p:nvPicPr>
+        <p:blipFill>
+          <a:blip r:embed="rId3"/>
+          <a:stretch>
+            <a:fillRect/>
+          </a:stretch>
+        </p:blipFill>
+        <p:spPr>
+          <a:xfrm>
+            <a:off x="4892040" y="1645920"/>
+            <a:ext cx="3886200" cy="3071293"/>
+          </a:xfrm>
+          <a:prstGeom prst="rect">
+            <a:avLst/>
+          </a:prstGeom>
+        </p:spPr>
+      </p:pic>
     </p:spTree>
     <p:extLst>
       <p:ext uri="{BB962C8B-B14F-4D97-AF65-F5344CB8AC3E}">
@@ -8602,7 +9252,7 @@
         <p:spPr>
           <a:xfrm xmlns:a="http://schemas.openxmlformats.org/drawingml/2006/main">
             <a:off x="762000" y="1619250"/>
-            <a:ext cx="7620000" cy="1466850"/>
+            <a:ext cx="3977639" cy="1466850"/>
           </a:xfrm>
           <a:prstGeom xmlns:a="http://schemas.openxmlformats.org/drawingml/2006/main" prst="rect">
             <a:avLst/>
@@ -8630,7 +9280,7 @@
               </a:defRPr>
             </a:pPr>
             <a:r>
-              <a:rPr sz="2400" b="0">
+              <a:rPr sz="1900" b="0">
                 <a:solidFill>
                   <a:srgbClr val="111111"/>
                 </a:solidFill>
@@ -8654,7 +9304,7 @@
               </a:defRPr>
             </a:pPr>
             <a:r>
-              <a:rPr sz="2400" b="0">
+              <a:rPr sz="1900" b="0">
                 <a:solidFill>
                   <a:srgbClr val="111111"/>
                 </a:solidFill>
@@ -8684,7 +9334,7 @@
         <p:spPr>
           <a:xfrm xmlns:a="http://schemas.openxmlformats.org/drawingml/2006/main">
             <a:off x="762000" y="3200400"/>
-            <a:ext cx="7620000" cy="838200"/>
+            <a:ext cx="3977639" cy="838200"/>
           </a:xfrm>
           <a:prstGeom xmlns:a="http://schemas.openxmlformats.org/drawingml/2006/main" prst="rect">
             <a:avLst/>
@@ -8720,7 +9370,7 @@
                 <a:ea typeface="Calibri"/>
                 <a:cs typeface="Calibri"/>
               </a:rPr>
-              <a:t>Pᵢₙ = Paxel/η</a:t>
+              <a:t>Pᵢₙ = Paxel/η</a:t>
             </a:r>
           </a:p>
         </p:txBody>
@@ -8742,7 +9392,7 @@
         <p:spPr>
           <a:xfrm xmlns:a="http://schemas.openxmlformats.org/drawingml/2006/main">
             <a:off x="762000" y="4429125"/>
-            <a:ext cx="7620000" cy="1352550"/>
+            <a:ext cx="3977639" cy="1352550"/>
           </a:xfrm>
           <a:prstGeom xmlns:a="http://schemas.openxmlformats.org/drawingml/2006/main" prst="rect">
             <a:avLst/>
@@ -8770,15 +9420,15 @@
               </a:defRPr>
             </a:pPr>
             <a:r>
-              <a:rPr sz="2250" b="0">
-                <a:solidFill>
-                  <a:srgbClr val="111111"/>
-                </a:solidFill>
-                <a:latin typeface="Calibri"/>
-                <a:ea typeface="Calibri"/>
-                <a:cs typeface="Calibri"/>
-              </a:rPr>
-              <a:t>Paxel = 5,5 kW, η = 0,88 ger Pᵢₙ = 6,25 kW.</a:t>
+              <a:rPr sz="2100" b="0">
+                <a:solidFill>
+                  <a:srgbClr val="111111"/>
+                </a:solidFill>
+                <a:latin typeface="Calibri"/>
+                <a:ea typeface="Calibri"/>
+                <a:cs typeface="Calibri"/>
+              </a:rPr>
+              <a:t>Paxel = 11 kW, η = 0,90 ger Pᵢₙ ≈ 12,2 kW.</a:t>
             </a:r>
           </a:p>
           <a:p xmlns:a="http://schemas.openxmlformats.org/drawingml/2006/main">
@@ -8794,15 +9444,37 @@
               </a:defRPr>
             </a:pPr>
             <a:r>
-              <a:rPr sz="2250" b="0">
-                <a:solidFill>
-                  <a:srgbClr val="111111"/>
-                </a:solidFill>
-                <a:latin typeface="Calibri"/>
-                <a:ea typeface="Calibri"/>
-                <a:cs typeface="Calibri"/>
-              </a:rPr>
-              <a:t>Vid 400 V och PF = 0,80 blir Iᴸ ≈ 11,3 A.</a:t>
+              <a:rPr sz="2100" b="0">
+                <a:solidFill>
+                  <a:srgbClr val="111111"/>
+                </a:solidFill>
+                <a:latin typeface="Calibri"/>
+                <a:ea typeface="Calibri"/>
+                <a:cs typeface="Calibri"/>
+              </a:rPr>
+              <a:t>Vid 440 V och PF = 0,85 blir I</a:t>
+            </a:r>
+            <a:r>
+              <a:rPr sz="2100" b="0" baseline="-25000">
+                <a:solidFill>
+                  <a:srgbClr val="111111"/>
+                </a:solidFill>
+                <a:latin typeface="Calibri"/>
+                <a:ea typeface="Calibri"/>
+                <a:cs typeface="Calibri"/>
+              </a:rPr>
+              <a:t>L</a:t>
+            </a:r>
+            <a:r>
+              <a:rPr sz="2100" b="0">
+                <a:solidFill>
+                  <a:srgbClr val="111111"/>
+                </a:solidFill>
+                <a:latin typeface="Calibri"/>
+                <a:ea typeface="Calibri"/>
+                <a:cs typeface="Calibri"/>
+              </a:rPr>
+              <a:t> ≈ 18,9 A.</a:t>
             </a:r>
           </a:p>
         </p:txBody>
@@ -8865,6 +9537,30 @@
           </a:p>
         </p:txBody>
       </p:sp>
+      <p:pic xmlns:a="http://schemas.openxmlformats.org/drawingml/2006/main" xmlns:r="http://schemas.openxmlformats.org/officeDocument/2006/relationships">
+        <p:nvPicPr>
+          <p:cNvPr id="9" name="Figur: Effektflöde i motorn: elektrisk inmatnin" descr="Effektflöde i motorn: elektrisk inmatning blir axeleffekt och förluster"/>
+          <p:cNvPicPr>
+            <a:picLocks noChangeAspect="1"/>
+          </p:cNvPicPr>
+          <p:nvPr/>
+        </p:nvPicPr>
+        <p:blipFill>
+          <a:blip r:embed="rId3"/>
+          <a:stretch>
+            <a:fillRect/>
+          </a:stretch>
+        </p:blipFill>
+        <p:spPr>
+          <a:xfrm>
+            <a:off x="4892040" y="1645920"/>
+            <a:ext cx="3886200" cy="2709112"/>
+          </a:xfrm>
+          <a:prstGeom prst="rect">
+            <a:avLst/>
+          </a:prstGeom>
+        </p:spPr>
+      </p:pic>
     </p:spTree>
     <p:extLst>
       <p:ext uri="{BB962C8B-B14F-4D97-AF65-F5344CB8AC3E}">
@@ -9111,7 +9807,7 @@
       </p:sp>
       <p:sp>
         <p:nvSpPr>
-          <p:cNvPr id="5" name="I uppgifterna med angivna linjespänningar används S = √3 UᴸIᴸ.&#10;Y/">
+          <p:cNvPr id="5" name="I uppgifterna med angivna linjespänningar används S = √3 ULIL.&#10;Y/">
             <a:extLst xmlns:a="http://schemas.openxmlformats.org/drawingml/2006/main">
               <a:ext uri="{FF2B5EF4-FFF2-40B4-BE49-F238E27FC236}">
                 <a16:creationId xmlns:a16="http://schemas.microsoft.com/office/drawing/2014/main" id="{BA98B29B-5188-4946-94C2-CA2294734217}"/>
@@ -9162,7 +9858,51 @@
                 <a:ea typeface="Calibri"/>
                 <a:cs typeface="Calibri"/>
               </a:rPr>
-              <a:t>I uppgifterna med angivna linjespänningar används S = √3 UᴸIᴸ.</a:t>
+              <a:t>I uppgifterna med angivna linjespänningar används S = √3 U</a:t>
+            </a:r>
+            <a:r>
+              <a:rPr sz="2250" b="0" baseline="-25000">
+                <a:solidFill>
+                  <a:srgbClr val="111111"/>
+                </a:solidFill>
+                <a:latin typeface="Calibri"/>
+                <a:ea typeface="Calibri"/>
+                <a:cs typeface="Calibri"/>
+              </a:rPr>
+              <a:t>L</a:t>
+            </a:r>
+            <a:r>
+              <a:rPr sz="2250" b="0">
+                <a:solidFill>
+                  <a:srgbClr val="111111"/>
+                </a:solidFill>
+                <a:latin typeface="Calibri"/>
+                <a:ea typeface="Calibri"/>
+                <a:cs typeface="Calibri"/>
+              </a:rPr>
+              <a:t>I</a:t>
+            </a:r>
+            <a:r>
+              <a:rPr sz="2250" b="0" baseline="-25000">
+                <a:solidFill>
+                  <a:srgbClr val="111111"/>
+                </a:solidFill>
+                <a:latin typeface="Calibri"/>
+                <a:ea typeface="Calibri"/>
+                <a:cs typeface="Calibri"/>
+              </a:rPr>
+              <a:t>L</a:t>
+            </a:r>
+            <a:r>
+              <a:rPr sz="2250" b="0">
+                <a:solidFill>
+                  <a:srgbClr val="111111"/>
+                </a:solidFill>
+                <a:latin typeface="Calibri"/>
+                <a:ea typeface="Calibri"/>
+                <a:cs typeface="Calibri"/>
+              </a:rPr>
+              <a:t>.</a:t>
             </a:r>
           </a:p>
           <a:p xmlns:a="http://schemas.openxmlformats.org/drawingml/2006/main">
@@ -9354,7 +10094,7 @@
       </p:sp>
       <p:sp>
         <p:nvSpPr>
-          <p:cNvPr id="10" name="Motor: Paxel = 2,4 kW, η = 0,80, PF = 0,75 och Uᴸ = 400 V. Symmet">
+          <p:cNvPr id="10" name="Motor: Paxel = 2,4 kW, η = 0,80, PF = 0,75 och UL = 400 V. Symmet">
             <a:extLst xmlns:a="http://schemas.openxmlformats.org/drawingml/2006/main">
               <a:ext uri="{FF2B5EF4-FFF2-40B4-BE49-F238E27FC236}">
                 <a16:creationId xmlns:a16="http://schemas.microsoft.com/office/drawing/2014/main" id="{49A5AF4E-937C-47D1-806D-1921C3162225}"/>
@@ -9404,14 +10144,36 @@
                 <a:ea typeface="Calibri"/>
                 <a:cs typeface="Calibri"/>
               </a:rPr>
-              <a:t>Motor: Paxel = 2,4 kW, η = 0,80, PF = 0,75 och Uᴸ = 400 V. Symmetrisk trefas.</a:t>
-            </a:r>
-          </a:p>
-        </p:txBody>
-      </p:sp>
-      <p:sp>
-        <p:nvSpPr>
-          <p:cNvPr id="11" name="Pᵢₙ = Paxel/η     Iᴸ = Pᵢₙ/(√3 UᴸPF)">
+              <a:t>Motor: Paxel = 2,4 kW, η = 0,80, PF = 0,75 och U</a:t>
+            </a:r>
+            <a:r>
+              <a:rPr sz="2175" b="0" baseline="-25000">
+                <a:solidFill>
+                  <a:srgbClr val="111111"/>
+                </a:solidFill>
+                <a:latin typeface="Calibri"/>
+                <a:ea typeface="Calibri"/>
+                <a:cs typeface="Calibri"/>
+              </a:rPr>
+              <a:t>L</a:t>
+            </a:r>
+            <a:r>
+              <a:rPr sz="2175" b="0">
+                <a:solidFill>
+                  <a:srgbClr val="111111"/>
+                </a:solidFill>
+                <a:latin typeface="Calibri"/>
+                <a:ea typeface="Calibri"/>
+                <a:cs typeface="Calibri"/>
+              </a:rPr>
+              <a:t> = 400 V. Symmetrisk trefas.</a:t>
+            </a:r>
+          </a:p>
+        </p:txBody>
+      </p:sp>
+      <p:sp>
+        <p:nvSpPr>
+          <p:cNvPr id="11" name="Pᵢₙ = Paxel/η     IL = Pᵢₙ/(√3 ULPF)">
             <a:extLst xmlns:a="http://schemas.openxmlformats.org/drawingml/2006/main">
               <a:ext uri="{FF2B5EF4-FFF2-40B4-BE49-F238E27FC236}">
                 <a16:creationId xmlns:a16="http://schemas.microsoft.com/office/drawing/2014/main" id="{51F3D8B3-FCE3-4632-882B-1E539C326998}"/>
@@ -9461,14 +10223,58 @@
                 <a:ea typeface="Calibri"/>
                 <a:cs typeface="Calibri"/>
               </a:rPr>
-              <a:t>Pᵢₙ = Paxel/η     Iᴸ = Pᵢₙ/(√3 UᴸPF)</a:t>
-            </a:r>
-          </a:p>
-        </p:txBody>
-      </p:sp>
-      <p:sp>
-        <p:nvSpPr>
-          <p:cNvPr id="12" name="1. Pᵢₙ = 2,4/0,80 = 3,0 kW = 3 000 W.&#10;2. Iᴸ = 3 000/(√3 · 400 · 0">
+              <a:t>Pᵢₙ = Paxel/η     I</a:t>
+            </a:r>
+            <a:r>
+              <a:rPr sz="2325" b="1" baseline="-25000">
+                <a:solidFill>
+                  <a:srgbClr val="064F91"/>
+                </a:solidFill>
+                <a:latin typeface="Calibri"/>
+                <a:ea typeface="Calibri"/>
+                <a:cs typeface="Calibri"/>
+              </a:rPr>
+              <a:t>L</a:t>
+            </a:r>
+            <a:r>
+              <a:rPr sz="2325" b="1">
+                <a:solidFill>
+                  <a:srgbClr val="064F91"/>
+                </a:solidFill>
+                <a:latin typeface="Calibri"/>
+                <a:ea typeface="Calibri"/>
+                <a:cs typeface="Calibri"/>
+              </a:rPr>
+              <a:t> = Pᵢₙ/(√3 U</a:t>
+            </a:r>
+            <a:r>
+              <a:rPr sz="2325" b="1" baseline="-25000">
+                <a:solidFill>
+                  <a:srgbClr val="064F91"/>
+                </a:solidFill>
+                <a:latin typeface="Calibri"/>
+                <a:ea typeface="Calibri"/>
+                <a:cs typeface="Calibri"/>
+              </a:rPr>
+              <a:t>L</a:t>
+            </a:r>
+            <a:r>
+              <a:rPr sz="2325" b="1">
+                <a:solidFill>
+                  <a:srgbClr val="064F91"/>
+                </a:solidFill>
+                <a:latin typeface="Calibri"/>
+                <a:ea typeface="Calibri"/>
+                <a:cs typeface="Calibri"/>
+              </a:rPr>
+              <a:t>PF)</a:t>
+            </a:r>
+          </a:p>
+        </p:txBody>
+      </p:sp>
+      <p:sp>
+        <p:nvSpPr>
+          <p:cNvPr id="12" name="1. Pᵢₙ = 2,4/0,80 = 3,0 kW = 3 000 W.&#10;2. IL = 3 000/(√3 · 400 · 0">
             <a:extLst xmlns:a="http://schemas.openxmlformats.org/drawingml/2006/main">
               <a:ext uri="{FF2B5EF4-FFF2-40B4-BE49-F238E27FC236}">
                 <a16:creationId xmlns:a16="http://schemas.microsoft.com/office/drawing/2014/main" id="{5415F706-B61C-4734-8B06-29F36CAACFB3}"/>
@@ -9541,7 +10347,29 @@
                 <a:ea typeface="Calibri"/>
                 <a:cs typeface="Calibri"/>
               </a:rPr>
-              <a:t>2. Iᴸ = 3 000/(√3 · 400 · 0,75) ≈ 5,77 A.</a:t>
+              <a:t>2. I</a:t>
+            </a:r>
+            <a:r>
+              <a:rPr sz="2063" b="0" baseline="-25000">
+                <a:solidFill>
+                  <a:srgbClr val="111111"/>
+                </a:solidFill>
+                <a:latin typeface="Calibri"/>
+                <a:ea typeface="Calibri"/>
+                <a:cs typeface="Calibri"/>
+              </a:rPr>
+              <a:t>L</a:t>
+            </a:r>
+            <a:r>
+              <a:rPr sz="2063" b="0">
+                <a:solidFill>
+                  <a:srgbClr val="111111"/>
+                </a:solidFill>
+                <a:latin typeface="Calibri"/>
+                <a:ea typeface="Calibri"/>
+                <a:cs typeface="Calibri"/>
+              </a:rPr>
+              <a:t> = 3 000/(√3 · 400 · 0,75) ≈ 5,77 A.</a:t>
             </a:r>
           </a:p>
           <a:p xmlns:a="http://schemas.openxmlformats.org/drawingml/2006/main">
@@ -9788,7 +10616,7 @@
       </p:sp>
       <p:sp>
         <p:nvSpPr>
-          <p:cNvPr id="10" name="Y: Ugren = Uᴸ/√3     Δ: Ugren = Uᴸ">
+          <p:cNvPr id="10" name="Y: Ugren = UL/√3     Δ: Ugren = UL">
             <a:extLst xmlns:a="http://schemas.openxmlformats.org/drawingml/2006/main">
               <a:ext uri="{FF2B5EF4-FFF2-40B4-BE49-F238E27FC236}">
                 <a16:creationId xmlns:a16="http://schemas.microsoft.com/office/drawing/2014/main" id="{8257EFE1-9F0B-4636-9F3E-C20F60C59D78}"/>
@@ -9838,7 +10666,40 @@
                 <a:ea typeface="Calibri"/>
                 <a:cs typeface="Calibri"/>
               </a:rPr>
-              <a:t>Y: Ugren = Uᴸ/√3     Δ: Ugren = Uᴸ</a:t>
+              <a:t>Y: Ugren = U</a:t>
+            </a:r>
+            <a:r>
+              <a:rPr sz="2400" b="1" baseline="-25000">
+                <a:solidFill>
+                  <a:srgbClr val="064F91"/>
+                </a:solidFill>
+                <a:latin typeface="Calibri"/>
+                <a:ea typeface="Calibri"/>
+                <a:cs typeface="Calibri"/>
+              </a:rPr>
+              <a:t>L</a:t>
+            </a:r>
+            <a:r>
+              <a:rPr sz="2400" b="1">
+                <a:solidFill>
+                  <a:srgbClr val="064F91"/>
+                </a:solidFill>
+                <a:latin typeface="Calibri"/>
+                <a:ea typeface="Calibri"/>
+                <a:cs typeface="Calibri"/>
+              </a:rPr>
+              <a:t>/√3     Δ: Ugren = U</a:t>
+            </a:r>
+            <a:r>
+              <a:rPr sz="2400" b="1" baseline="-25000">
+                <a:solidFill>
+                  <a:srgbClr val="064F91"/>
+                </a:solidFill>
+                <a:latin typeface="Calibri"/>
+                <a:ea typeface="Calibri"/>
+                <a:cs typeface="Calibri"/>
+              </a:rPr>
+              <a:t>L</a:t>
             </a:r>
           </a:p>
         </p:txBody>
@@ -10250,7 +11111,7 @@
         <p:spPr>
           <a:xfrm xmlns:a="http://schemas.openxmlformats.org/drawingml/2006/main">
             <a:off x="762000" y="2533650"/>
-            <a:ext cx="7620000" cy="2286000"/>
+            <a:ext cx="3886200" cy="2606040"/>
           </a:xfrm>
           <a:prstGeom xmlns:a="http://schemas.openxmlformats.org/drawingml/2006/main" prst="rect">
             <a:avLst/>
@@ -10286,7 +11147,7 @@
                 <a:ea typeface="Calibri"/>
                 <a:cs typeface="Calibri"/>
               </a:rPr>
-              <a:t>Motorn är märkt Δ/Y 230/400 V. Matningen är 400 V mellan faserna. Vilken koppling ger rätt märkspänning över lindningarna?</a:t>
+              <a:t>Motorn är märkt Δ/Y 230/400 V. Matningen är 400 V mellan faserna. Vilken koppling ger rätt märkspänning över lindningarna?</a:t>
             </a:r>
           </a:p>
         </p:txBody>
@@ -10407,6 +11268,30 @@
           </a:p>
         </p:txBody>
       </p:sp>
+      <p:pic xmlns:a="http://schemas.openxmlformats.org/drawingml/2006/main" xmlns:r="http://schemas.openxmlformats.org/officeDocument/2006/relationships">
+        <p:nvPicPr>
+          <p:cNvPr id="9" name="Figur: Motor märkt Δ/Y 230/400 V på 400 V-nät; " descr="Motor märkt Δ/Y 230/400 V på 400 V-nät; Y- och Δ-koppling att välja mellan"/>
+          <p:cNvPicPr>
+            <a:picLocks noChangeAspect="1"/>
+          </p:cNvPicPr>
+          <p:nvPr/>
+        </p:nvPicPr>
+        <p:blipFill>
+          <a:blip r:embed="rId3"/>
+          <a:stretch>
+            <a:fillRect/>
+          </a:stretch>
+        </p:blipFill>
+        <p:spPr>
+          <a:xfrm>
+            <a:off x="4846320" y="2331720"/>
+            <a:ext cx="3931920" cy="2740984"/>
+          </a:xfrm>
+          <a:prstGeom prst="rect">
+            <a:avLst/>
+          </a:prstGeom>
+        </p:spPr>
+      </p:pic>
     </p:spTree>
     <p:extLst>
       <p:ext uri="{BB962C8B-B14F-4D97-AF65-F5344CB8AC3E}">
@@ -10512,7 +11397,7 @@
       </p:sp>
       <p:sp>
         <p:nvSpPr>
-          <p:cNvPr id="10" name="Märkningens Δ-värde jämförs med Uᴸ">
+          <p:cNvPr id="10" name="Märkningens Δ-värde jämförs med UL">
             <a:extLst xmlns:a="http://schemas.openxmlformats.org/drawingml/2006/main">
               <a:ext uri="{FF2B5EF4-FFF2-40B4-BE49-F238E27FC236}">
                 <a16:creationId xmlns:a16="http://schemas.microsoft.com/office/drawing/2014/main" id="{A96613F4-9628-42C6-AC75-55CCD83F6243}"/>
@@ -10562,7 +11447,18 @@
                 <a:ea typeface="Calibri"/>
                 <a:cs typeface="Calibri"/>
               </a:rPr>
-              <a:t>Märkningens Δ-värde jämförs med Uᴸ</a:t>
+              <a:t>Märkningens Δ-värde jämförs med U</a:t>
+            </a:r>
+            <a:r>
+              <a:rPr sz="2400" b="1" baseline="-25000">
+                <a:solidFill>
+                  <a:srgbClr val="064F91"/>
+                </a:solidFill>
+                <a:latin typeface="Calibri"/>
+                <a:ea typeface="Calibri"/>
+                <a:cs typeface="Calibri"/>
+              </a:rPr>
+              <a:t>L</a:t>
             </a:r>
           </a:p>
         </p:txBody>
@@ -10974,7 +11870,7 @@
         <p:spPr>
           <a:xfrm xmlns:a="http://schemas.openxmlformats.org/drawingml/2006/main">
             <a:off x="762000" y="2533650"/>
-            <a:ext cx="7620000" cy="2286000"/>
+            <a:ext cx="3886200" cy="2606040"/>
           </a:xfrm>
           <a:prstGeom xmlns:a="http://schemas.openxmlformats.org/drawingml/2006/main" prst="rect">
             <a:avLst/>
@@ -11010,7 +11906,7 @@
                 <a:ea typeface="Calibri"/>
                 <a:cs typeface="Calibri"/>
               </a:rPr>
-              <a:t>En motor är märkt Δ/Y 400/690 V. Nätet ger 400 V mellan faserna. Vilken driftkoppling stämmer?</a:t>
+              <a:t>En motor är märkt Δ/Y 400/690 V. Nätet ger 400 V mellan faserna. Vilken driftkoppling stämmer?</a:t>
             </a:r>
           </a:p>
         </p:txBody>
@@ -11131,6 +12027,30 @@
           </a:p>
         </p:txBody>
       </p:sp>
+      <p:pic xmlns:a="http://schemas.openxmlformats.org/drawingml/2006/main" xmlns:r="http://schemas.openxmlformats.org/officeDocument/2006/relationships">
+        <p:nvPicPr>
+          <p:cNvPr id="9" name="Figur: Motor märkt Δ/Y 400/690 V på 400 V-nät; " descr="Motor märkt Δ/Y 400/690 V på 400 V-nät; Y- och Δ-koppling att välja mellan"/>
+          <p:cNvPicPr>
+            <a:picLocks noChangeAspect="1"/>
+          </p:cNvPicPr>
+          <p:nvPr/>
+        </p:nvPicPr>
+        <p:blipFill>
+          <a:blip r:embed="rId3"/>
+          <a:stretch>
+            <a:fillRect/>
+          </a:stretch>
+        </p:blipFill>
+        <p:spPr>
+          <a:xfrm>
+            <a:off x="4846320" y="2331720"/>
+            <a:ext cx="3931920" cy="2740984"/>
+          </a:xfrm>
+          <a:prstGeom prst="rect">
+            <a:avLst/>
+          </a:prstGeom>
+        </p:spPr>
+      </p:pic>
     </p:spTree>
     <p:extLst>
       <p:ext uri="{BB962C8B-B14F-4D97-AF65-F5344CB8AC3E}">
@@ -11236,7 +12156,7 @@
       </p:sp>
       <p:sp>
         <p:nvSpPr>
-          <p:cNvPr id="10" name="Pᵢₙ = Paxel/η&#10;Iᴸ = Pᵢₙ/(√3 · Uᴸ · PF)">
+          <p:cNvPr id="10" name="Pᵢₙ = Paxel/η&#10;IL = Pᵢₙ/(√3 · UL · PF)">
             <a:extLst xmlns:a="http://schemas.openxmlformats.org/drawingml/2006/main">
               <a:ext uri="{FF2B5EF4-FFF2-40B4-BE49-F238E27FC236}">
                 <a16:creationId xmlns:a16="http://schemas.microsoft.com/office/drawing/2014/main" id="{291B08E5-6A31-4949-BED9-F706F78B89B5}"/>
@@ -11309,7 +12229,51 @@
                 <a:ea typeface="Calibri"/>
                 <a:cs typeface="Calibri"/>
               </a:rPr>
-              <a:t>Iᴸ = Pᵢₙ/(√3 · Uᴸ · PF)</a:t>
+              <a:t>I</a:t>
+            </a:r>
+            <a:r>
+              <a:rPr sz="2400" b="1" baseline="-25000">
+                <a:solidFill>
+                  <a:srgbClr val="064F91"/>
+                </a:solidFill>
+                <a:latin typeface="Calibri"/>
+                <a:ea typeface="Calibri"/>
+                <a:cs typeface="Calibri"/>
+              </a:rPr>
+              <a:t>L</a:t>
+            </a:r>
+            <a:r>
+              <a:rPr sz="2400" b="1">
+                <a:solidFill>
+                  <a:srgbClr val="064F91"/>
+                </a:solidFill>
+                <a:latin typeface="Calibri"/>
+                <a:ea typeface="Calibri"/>
+                <a:cs typeface="Calibri"/>
+              </a:rPr>
+              <a:t> = Pᵢₙ/(√3 · U</a:t>
+            </a:r>
+            <a:r>
+              <a:rPr sz="2400" b="1" baseline="-25000">
+                <a:solidFill>
+                  <a:srgbClr val="064F91"/>
+                </a:solidFill>
+                <a:latin typeface="Calibri"/>
+                <a:ea typeface="Calibri"/>
+                <a:cs typeface="Calibri"/>
+              </a:rPr>
+              <a:t>L</a:t>
+            </a:r>
+            <a:r>
+              <a:rPr sz="2400" b="1">
+                <a:solidFill>
+                  <a:srgbClr val="064F91"/>
+                </a:solidFill>
+                <a:latin typeface="Calibri"/>
+                <a:ea typeface="Calibri"/>
+                <a:cs typeface="Calibri"/>
+              </a:rPr>
+              <a:t> · PF)</a:t>
             </a:r>
           </a:p>
         </p:txBody>
@@ -11373,7 +12337,7 @@
       </p:sp>
       <p:sp>
         <p:nvSpPr>
-          <p:cNvPr id="12" name="Förutsättningar: Paxel = 5,5 kW, η = 0,88, PF = 0,80 och Uᴸ = 400">
+          <p:cNvPr id="12" name="Förutsättningar: Paxel = 5,5 kW, η = 0,88, PF = 0,80 och UL = 400">
             <a:extLst xmlns:a="http://schemas.openxmlformats.org/drawingml/2006/main">
               <a:ext uri="{FF2B5EF4-FFF2-40B4-BE49-F238E27FC236}">
                 <a16:creationId xmlns:a16="http://schemas.microsoft.com/office/drawing/2014/main" id="{45BA0188-45CA-4EC3-84E0-5614E876A3EE}"/>
@@ -11423,7 +12387,29 @@
                 <a:ea typeface="Calibri"/>
                 <a:cs typeface="Calibri"/>
               </a:rPr>
-              <a:t>Förutsättningar: Paxel = 5,5 kW, η = 0,88, PF = 0,80 och Uᴸ = 400 V. Symmetrisk trefas.</a:t>
+              <a:t>Förutsättningar: Paxel = 5,5 kW, η = 0,88, PF = 0,80 och U</a:t>
+            </a:r>
+            <a:r>
+              <a:rPr sz="2025" b="0" baseline="-25000">
+                <a:solidFill>
+                  <a:srgbClr val="111111"/>
+                </a:solidFill>
+                <a:latin typeface="Calibri"/>
+                <a:ea typeface="Calibri"/>
+                <a:cs typeface="Calibri"/>
+              </a:rPr>
+              <a:t>L</a:t>
+            </a:r>
+            <a:r>
+              <a:rPr sz="2025" b="0">
+                <a:solidFill>
+                  <a:srgbClr val="111111"/>
+                </a:solidFill>
+                <a:latin typeface="Calibri"/>
+                <a:ea typeface="Calibri"/>
+                <a:cs typeface="Calibri"/>
+              </a:rPr>
+              <a:t> = 400 V. Symmetrisk trefas.</a:t>
             </a:r>
           </a:p>
         </p:txBody>
@@ -12220,7 +13206,7 @@
       </p:sp>
       <p:sp>
         <p:nvSpPr>
-          <p:cNvPr id="4" name="Paxel = 5,5 kW, η = 0,88, PF = 0,80 och Uᴸ = 400 V. Bestäm elektr">
+          <p:cNvPr id="4" name="Paxel = 5,5 kW, η = 0,88, PF = 0,80 och UL = 400 V. Bestäm elektr">
             <a:extLst xmlns:a="http://schemas.openxmlformats.org/drawingml/2006/main">
               <a:ext uri="{FF2B5EF4-FFF2-40B4-BE49-F238E27FC236}">
                 <a16:creationId xmlns:a16="http://schemas.microsoft.com/office/drawing/2014/main" id="{9581BB4A-9C80-4D74-B164-2795CAED8166}"/>
@@ -12235,7 +13221,7 @@
         <p:spPr>
           <a:xfrm xmlns:a="http://schemas.openxmlformats.org/drawingml/2006/main">
             <a:off x="762000" y="2533650"/>
-            <a:ext cx="7620000" cy="2286000"/>
+            <a:ext cx="3886200" cy="2606040"/>
           </a:xfrm>
           <a:prstGeom xmlns:a="http://schemas.openxmlformats.org/drawingml/2006/main" prst="rect">
             <a:avLst/>
@@ -12271,7 +13257,29 @@
                 <a:ea typeface="Calibri"/>
                 <a:cs typeface="Calibri"/>
               </a:rPr>
-              <a:t>Paxel = 5,5 kW, η = 0,88, PF = 0,80 och Uᴸ = 400 V. Bestäm elektrisk inmatning och linjeström.</a:t>
+              <a:t>Paxel = 5,5 kW, η = 0,88, PF = 0,80 och U</a:t>
+            </a:r>
+            <a:r>
+              <a:rPr sz="2400" b="0" baseline="-25000">
+                <a:solidFill>
+                  <a:srgbClr val="111111"/>
+                </a:solidFill>
+                <a:latin typeface="Calibri"/>
+                <a:ea typeface="Calibri"/>
+                <a:cs typeface="Calibri"/>
+              </a:rPr>
+              <a:t>L</a:t>
+            </a:r>
+            <a:r>
+              <a:rPr sz="2400" b="0">
+                <a:solidFill>
+                  <a:srgbClr val="111111"/>
+                </a:solidFill>
+                <a:latin typeface="Calibri"/>
+                <a:ea typeface="Calibri"/>
+                <a:cs typeface="Calibri"/>
+              </a:rPr>
+              <a:t> = 400 V. Bestäm elektrisk inmatning och linjeström.</a:t>
             </a:r>
           </a:p>
         </p:txBody>
@@ -12392,6 +13400,30 @@
           </a:p>
         </p:txBody>
       </p:sp>
+      <p:pic xmlns:a="http://schemas.openxmlformats.org/drawingml/2006/main" xmlns:r="http://schemas.openxmlformats.org/officeDocument/2006/relationships">
+        <p:nvPicPr>
+          <p:cNvPr id="9" name="Figur: Trefasmotor med axeleffekt 5,5 kW, verkn" descr="Trefasmotor med axeleffekt 5,5 kW, verkningsgrad 0,88 och PF 0,80 vid 400 V"/>
+          <p:cNvPicPr>
+            <a:picLocks noChangeAspect="1"/>
+          </p:cNvPicPr>
+          <p:nvPr/>
+        </p:nvPicPr>
+        <p:blipFill>
+          <a:blip r:embed="rId3"/>
+          <a:stretch>
+            <a:fillRect/>
+          </a:stretch>
+        </p:blipFill>
+        <p:spPr>
+          <a:xfrm>
+            <a:off x="4846320" y="2331720"/>
+            <a:ext cx="3931920" cy="2740984"/>
+          </a:xfrm>
+          <a:prstGeom prst="rect">
+            <a:avLst/>
+          </a:prstGeom>
+        </p:spPr>
+      </p:pic>
     </p:spTree>
     <p:extLst>
       <p:ext uri="{BB962C8B-B14F-4D97-AF65-F5344CB8AC3E}">
@@ -12959,7 +13991,7 @@
         <p:spPr>
           <a:xfrm xmlns:a="http://schemas.openxmlformats.org/drawingml/2006/main">
             <a:off x="762000" y="2533650"/>
-            <a:ext cx="7620000" cy="2286000"/>
+            <a:ext cx="3886200" cy="2606040"/>
           </a:xfrm>
           <a:prstGeom xmlns:a="http://schemas.openxmlformats.org/drawingml/2006/main" prst="rect">
             <a:avLst/>
@@ -12995,7 +14027,7 @@
                 <a:ea typeface="Calibri"/>
                 <a:cs typeface="Calibri"/>
               </a:rPr>
-              <a:t>En ideal trefastransformator är märkt 100 kVA, 10 kV/400 V linjespänning. Bestäm sekundär linjeström vid märklast.</a:t>
+              <a:t>En ideal trefastransformator är märkt 100 kVA, 10 kV/400 V linjespänning. Bestäm sekundär linjeström vid märklast.</a:t>
             </a:r>
           </a:p>
         </p:txBody>
@@ -13116,6 +14148,30 @@
           </a:p>
         </p:txBody>
       </p:sp>
+      <p:pic xmlns:a="http://schemas.openxmlformats.org/drawingml/2006/main" xmlns:r="http://schemas.openxmlformats.org/officeDocument/2006/relationships">
+        <p:nvPicPr>
+          <p:cNvPr id="9" name="Figur: Transformator 100 kVA, 10 kV till 400 V;" descr="Transformator 100 kVA, 10 kV till 400 V; sekundär linjeström okänd"/>
+          <p:cNvPicPr>
+            <a:picLocks noChangeAspect="1"/>
+          </p:cNvPicPr>
+          <p:nvPr/>
+        </p:nvPicPr>
+        <p:blipFill>
+          <a:blip r:embed="rId3"/>
+          <a:stretch>
+            <a:fillRect/>
+          </a:stretch>
+        </p:blipFill>
+        <p:spPr>
+          <a:xfrm>
+            <a:off x="4846320" y="2331720"/>
+            <a:ext cx="3931920" cy="2740984"/>
+          </a:xfrm>
+          <a:prstGeom prst="rect">
+            <a:avLst/>
+          </a:prstGeom>
+        </p:spPr>
+      </p:pic>
     </p:spTree>
     <p:extLst>
       <p:ext uri="{BB962C8B-B14F-4D97-AF65-F5344CB8AC3E}">
@@ -13442,7 +14498,29 @@
                 <a:ea typeface="Calibri"/>
                 <a:cs typeface="Calibri"/>
               </a:rPr>
-              <a:t>Arbetsgång: Summera faseffekterna. Förklara vilken symmetri som saknas för att använda en godtycklig Iᴸ i √3-formeln.</a:t>
+              <a:t>Arbetsgång: Summera faseffekterna. Förklara vilken symmetri som saknas för att använda en godtycklig I</a:t>
+            </a:r>
+            <a:r>
+              <a:rPr sz="2025" b="0" baseline="-25000">
+                <a:solidFill>
+                  <a:srgbClr val="111111"/>
+                </a:solidFill>
+                <a:latin typeface="Calibri"/>
+                <a:ea typeface="Calibri"/>
+                <a:cs typeface="Calibri"/>
+              </a:rPr>
+              <a:t>L</a:t>
+            </a:r>
+            <a:r>
+              <a:rPr sz="2025" b="0">
+                <a:solidFill>
+                  <a:srgbClr val="111111"/>
+                </a:solidFill>
+                <a:latin typeface="Calibri"/>
+                <a:ea typeface="Calibri"/>
+                <a:cs typeface="Calibri"/>
+              </a:rPr>
+              <a:t> i √3-formeln.</a:t>
             </a:r>
           </a:p>
         </p:txBody>
@@ -13683,7 +14761,7 @@
         <p:spPr>
           <a:xfrm xmlns:a="http://schemas.openxmlformats.org/drawingml/2006/main">
             <a:off x="762000" y="2533650"/>
-            <a:ext cx="7620000" cy="2286000"/>
+            <a:ext cx="3886200" cy="2606040"/>
           </a:xfrm>
           <a:prstGeom xmlns:a="http://schemas.openxmlformats.org/drawingml/2006/main" prst="rect">
             <a:avLst/>
@@ -13719,7 +14797,7 @@
                 <a:ea typeface="Calibri"/>
                 <a:cs typeface="Calibri"/>
               </a:rPr>
-              <a:t>En last har tre uppmätta aktiva faseffekter: 1,2, 1,5 och 0,9 kW. Bestäm total aktiv effekt. Varför bör en godtycklig fasström inte sättas i symmetriformeln?</a:t>
+              <a:t>En last har tre uppmätta aktiva faseffekter: 1,2, 1,5 och 0,9 kW. Bestäm total aktiv effekt. Varför bör en godtycklig fasström inte sättas i symmetriformeln?</a:t>
             </a:r>
           </a:p>
         </p:txBody>
@@ -13840,6 +14918,30 @@
           </a:p>
         </p:txBody>
       </p:sp>
+      <p:pic xmlns:a="http://schemas.openxmlformats.org/drawingml/2006/main" xmlns:r="http://schemas.openxmlformats.org/officeDocument/2006/relationships">
+        <p:nvPicPr>
+          <p:cNvPr id="9" name="Figur: Stapeldiagram med faseffekterna 1,2, 1,5" descr="Stapeldiagram med faseffekterna 1,2, 1,5 och 0,9 kW; total effekt okänd"/>
+          <p:cNvPicPr>
+            <a:picLocks noChangeAspect="1"/>
+          </p:cNvPicPr>
+          <p:nvPr/>
+        </p:nvPicPr>
+        <p:blipFill>
+          <a:blip r:embed="rId3"/>
+          <a:stretch>
+            <a:fillRect/>
+          </a:stretch>
+        </p:blipFill>
+        <p:spPr>
+          <a:xfrm>
+            <a:off x="4846320" y="2331720"/>
+            <a:ext cx="3931920" cy="2740984"/>
+          </a:xfrm>
+          <a:prstGeom prst="rect">
+            <a:avLst/>
+          </a:prstGeom>
+        </p:spPr>
+      </p:pic>
     </p:spTree>
     <p:extLst>
       <p:ext uri="{BB962C8B-B14F-4D97-AF65-F5344CB8AC3E}">
@@ -14483,64 +15585,6 @@
       </p:sp>
       <p:sp>
         <p:nvSpPr>
-          <p:cNvPr id="7" name="Källor och lärarstöd finns även i bildanteckningarna.">
-            <a:extLst xmlns:a="http://schemas.openxmlformats.org/drawingml/2006/main">
-              <a:ext uri="{FF2B5EF4-FFF2-40B4-BE49-F238E27FC236}">
-                <a16:creationId xmlns:a16="http://schemas.microsoft.com/office/drawing/2014/main" id="{FE81FDEE-B225-409D-81CF-4F01E53E9790}"/>
-              </a:ext>
-            </a:extLst>
-          </p:cNvPr>
-          <p:cNvSpPr>
-            <a:spLocks xmlns:a="http://schemas.openxmlformats.org/drawingml/2006/main" noGrp="1"/>
-          </p:cNvSpPr>
-          <p:nvPr/>
-        </p:nvSpPr>
-        <p:spPr>
-          <a:xfrm xmlns:a="http://schemas.openxmlformats.org/drawingml/2006/main">
-            <a:off x="762000" y="5676900"/>
-            <a:ext cx="7620000" cy="352425"/>
-          </a:xfrm>
-          <a:prstGeom xmlns:a="http://schemas.openxmlformats.org/drawingml/2006/main" prst="rect">
-            <a:avLst/>
-          </a:prstGeom>
-          <a:noFill xmlns:a="http://schemas.openxmlformats.org/drawingml/2006/main"/>
-          <a:ln xmlns:a="http://schemas.openxmlformats.org/drawingml/2006/main" w="0">
-            <a:noFill/>
-          </a:ln>
-        </p:spPr>
-        <p:txBody>
-          <a:bodyPr xmlns:a="http://schemas.openxmlformats.org/drawingml/2006/main" wrap="square" lIns="0" tIns="0" rIns="0" bIns="0" anchor="t">
-            <a:noAutofit/>
-          </a:bodyPr>
-          <a:lstStyle xmlns:a="http://schemas.openxmlformats.org/drawingml/2006/main"/>
-          <a:p xmlns:a="http://schemas.openxmlformats.org/drawingml/2006/main">
-            <a:pPr algn="l">
-              <a:buNone/>
-              <a:defRPr sz="1800" b="0">
-                <a:solidFill>
-                  <a:srgbClr val="111111"/>
-                </a:solidFill>
-                <a:latin typeface="Calibri"/>
-                <a:ea typeface="Calibri"/>
-                <a:cs typeface="Calibri"/>
-              </a:defRPr>
-            </a:pPr>
-            <a:r>
-              <a:rPr sz="1800" b="0">
-                <a:solidFill>
-                  <a:srgbClr val="111111"/>
-                </a:solidFill>
-                <a:latin typeface="Calibri"/>
-                <a:ea typeface="Calibri"/>
-                <a:cs typeface="Calibri"/>
-              </a:rPr>
-              <a:t>Källor och lärarstöd finns även i bildanteckningarna.</a:t>
-            </a:r>
-          </a:p>
-        </p:txBody>
-      </p:sp>
-      <p:sp>
-        <p:nvSpPr>
           <p:cNvPr id="8" name="22">
             <a:extLst xmlns:a="http://schemas.openxmlformats.org/drawingml/2006/main">
               <a:ext uri="{FF2B5EF4-FFF2-40B4-BE49-F238E27FC236}">
@@ -16624,7 +17668,7 @@
       </p:sp>
       <p:sp>
         <p:nvSpPr>
-          <p:cNvPr id="26" name="Y: Ugren = Uᴸ/√3     Δ: Ugren = Uᴸ">
+          <p:cNvPr id="26" name="Y: Ugren = UL/√3     Δ: Ugren = UL">
             <a:extLst xmlns:a="http://schemas.openxmlformats.org/drawingml/2006/main">
               <a:ext uri="{FF2B5EF4-FFF2-40B4-BE49-F238E27FC236}">
                 <a16:creationId xmlns:a16="http://schemas.microsoft.com/office/drawing/2014/main" id="{904FABC7-EBE6-469E-B1A9-7D61AF4A7D78}"/>
@@ -16675,7 +17719,40 @@
                 <a:ea typeface="Calibri"/>
                 <a:cs typeface="Calibri"/>
               </a:rPr>
-              <a:t>Y: Ugren = Uᴸ/√3     Δ: Ugren = Uᴸ</a:t>
+              <a:t>Y: Ugren = U</a:t>
+            </a:r>
+            <a:r>
+              <a:rPr sz="2400" b="1" baseline="-25000">
+                <a:solidFill>
+                  <a:srgbClr val="064F91"/>
+                </a:solidFill>
+                <a:latin typeface="Calibri"/>
+                <a:ea typeface="Calibri"/>
+                <a:cs typeface="Calibri"/>
+              </a:rPr>
+              <a:t>L</a:t>
+            </a:r>
+            <a:r>
+              <a:rPr sz="2400" b="1">
+                <a:solidFill>
+                  <a:srgbClr val="064F91"/>
+                </a:solidFill>
+                <a:latin typeface="Calibri"/>
+                <a:ea typeface="Calibri"/>
+                <a:cs typeface="Calibri"/>
+              </a:rPr>
+              <a:t>/√3     Δ: Ugren = U</a:t>
+            </a:r>
+            <a:r>
+              <a:rPr sz="2400" b="1" baseline="-25000">
+                <a:solidFill>
+                  <a:srgbClr val="064F91"/>
+                </a:solidFill>
+                <a:latin typeface="Calibri"/>
+                <a:ea typeface="Calibri"/>
+                <a:cs typeface="Calibri"/>
+              </a:rPr>
+              <a:t>L</a:t>
             </a:r>
           </a:p>
         </p:txBody>
@@ -16941,7 +18018,7 @@
         <p:spPr>
           <a:xfrm xmlns:a="http://schemas.openxmlformats.org/drawingml/2006/main">
             <a:off x="762000" y="1619250"/>
-            <a:ext cx="7620000" cy="1466850"/>
+            <a:ext cx="3977639" cy="1466850"/>
           </a:xfrm>
           <a:prstGeom xmlns:a="http://schemas.openxmlformats.org/drawingml/2006/main" prst="rect">
             <a:avLst/>
@@ -16969,7 +18046,7 @@
               </a:defRPr>
             </a:pPr>
             <a:r>
-              <a:rPr sz="2400" b="0">
+              <a:rPr sz="1900" b="0">
                 <a:solidFill>
                   <a:srgbClr val="111111"/>
                 </a:solidFill>
@@ -16993,7 +18070,7 @@
               </a:defRPr>
             </a:pPr>
             <a:r>
-              <a:rPr sz="2400" b="0">
+              <a:rPr sz="1900" b="0">
                 <a:solidFill>
                   <a:srgbClr val="111111"/>
                 </a:solidFill>
@@ -17008,7 +18085,7 @@
       </p:sp>
       <p:sp>
         <p:nvSpPr>
-          <p:cNvPr id="4" name="Y: Iᴸ = Igren     Δ: Iᴸ = √3 · Igren">
+          <p:cNvPr id="4" name="Y: IL = Igren     Δ: IL = √3 · Igren">
             <a:extLst xmlns:a="http://schemas.openxmlformats.org/drawingml/2006/main">
               <a:ext uri="{FF2B5EF4-FFF2-40B4-BE49-F238E27FC236}">
                 <a16:creationId xmlns:a16="http://schemas.microsoft.com/office/drawing/2014/main" id="{1274D93B-3B17-497F-B0B7-E23BE728C1F5}"/>
@@ -17023,7 +18100,7 @@
         <p:spPr>
           <a:xfrm xmlns:a="http://schemas.openxmlformats.org/drawingml/2006/main">
             <a:off x="762000" y="3200400"/>
-            <a:ext cx="7620000" cy="838200"/>
+            <a:ext cx="3977639" cy="838200"/>
           </a:xfrm>
           <a:prstGeom xmlns:a="http://schemas.openxmlformats.org/drawingml/2006/main" prst="rect">
             <a:avLst/>
@@ -17051,7 +18128,7 @@
               </a:defRPr>
             </a:pPr>
             <a:r>
-              <a:rPr sz="2925" b="1">
+              <a:rPr sz="2650" b="1">
                 <a:solidFill>
                   <a:srgbClr val="064F91"/>
                 </a:solidFill>
@@ -17059,14 +18136,58 @@
                 <a:ea typeface="Calibri"/>
                 <a:cs typeface="Calibri"/>
               </a:rPr>
-              <a:t>Y: Iᴸ = Igren     Δ: Iᴸ = √3 · Igren</a:t>
-            </a:r>
-          </a:p>
-        </p:txBody>
-      </p:sp>
-      <p:sp>
-        <p:nvSpPr>
-          <p:cNvPr id="5" name="400 V över tre grenar på 40 Ω i Δ:&#10;Igren = 10 A och Iᴸ ≈ 17,3 A.">
+              <a:t>Y: I</a:t>
+            </a:r>
+            <a:r>
+              <a:rPr sz="2650" b="1" baseline="-25000">
+                <a:solidFill>
+                  <a:srgbClr val="064F91"/>
+                </a:solidFill>
+                <a:latin typeface="Calibri"/>
+                <a:ea typeface="Calibri"/>
+                <a:cs typeface="Calibri"/>
+              </a:rPr>
+              <a:t>L</a:t>
+            </a:r>
+            <a:r>
+              <a:rPr sz="2650" b="1">
+                <a:solidFill>
+                  <a:srgbClr val="064F91"/>
+                </a:solidFill>
+                <a:latin typeface="Calibri"/>
+                <a:ea typeface="Calibri"/>
+                <a:cs typeface="Calibri"/>
+              </a:rPr>
+              <a:t> = Igren     Δ: I</a:t>
+            </a:r>
+            <a:r>
+              <a:rPr sz="2650" b="1" baseline="-25000">
+                <a:solidFill>
+                  <a:srgbClr val="064F91"/>
+                </a:solidFill>
+                <a:latin typeface="Calibri"/>
+                <a:ea typeface="Calibri"/>
+                <a:cs typeface="Calibri"/>
+              </a:rPr>
+              <a:t>L</a:t>
+            </a:r>
+            <a:r>
+              <a:rPr sz="2650" b="1">
+                <a:solidFill>
+                  <a:srgbClr val="064F91"/>
+                </a:solidFill>
+                <a:latin typeface="Calibri"/>
+                <a:ea typeface="Calibri"/>
+                <a:cs typeface="Calibri"/>
+              </a:rPr>
+              <a:t> = √3 · Igren</a:t>
+            </a:r>
+          </a:p>
+        </p:txBody>
+      </p:sp>
+      <p:sp>
+        <p:nvSpPr>
+          <p:cNvPr id="5" name="400 V över tre grenar på 40 Ω i Δ:&#10;Igren = 10 A och IL ≈ 17,3 A.">
             <a:extLst xmlns:a="http://schemas.openxmlformats.org/drawingml/2006/main">
               <a:ext uri="{FF2B5EF4-FFF2-40B4-BE49-F238E27FC236}">
                 <a16:creationId xmlns:a16="http://schemas.microsoft.com/office/drawing/2014/main" id="{84B8B199-278D-4AF7-9E16-47ADBEB00B08}"/>
@@ -17081,7 +18202,7 @@
         <p:spPr>
           <a:xfrm xmlns:a="http://schemas.openxmlformats.org/drawingml/2006/main">
             <a:off x="762000" y="4429125"/>
-            <a:ext cx="7620000" cy="1352550"/>
+            <a:ext cx="3977639" cy="1352550"/>
           </a:xfrm>
           <a:prstGeom xmlns:a="http://schemas.openxmlformats.org/drawingml/2006/main" prst="rect">
             <a:avLst/>
@@ -17109,15 +18230,15 @@
               </a:defRPr>
             </a:pPr>
             <a:r>
-              <a:rPr sz="2250" b="0">
-                <a:solidFill>
-                  <a:srgbClr val="111111"/>
-                </a:solidFill>
-                <a:latin typeface="Calibri"/>
-                <a:ea typeface="Calibri"/>
-                <a:cs typeface="Calibri"/>
-              </a:rPr>
-              <a:t>400 V över tre grenar på 40 Ω i Δ:</a:t>
+              <a:rPr sz="2100" b="0">
+                <a:solidFill>
+                  <a:srgbClr val="111111"/>
+                </a:solidFill>
+                <a:latin typeface="Calibri"/>
+                <a:ea typeface="Calibri"/>
+                <a:cs typeface="Calibri"/>
+              </a:rPr>
+              <a:t>440 V över tre grenar på 44 Ω i Δ:</a:t>
             </a:r>
           </a:p>
           <a:p xmlns:a="http://schemas.openxmlformats.org/drawingml/2006/main">
@@ -17133,15 +18254,37 @@
               </a:defRPr>
             </a:pPr>
             <a:r>
-              <a:rPr sz="2250" b="0">
-                <a:solidFill>
-                  <a:srgbClr val="111111"/>
-                </a:solidFill>
-                <a:latin typeface="Calibri"/>
-                <a:ea typeface="Calibri"/>
-                <a:cs typeface="Calibri"/>
-              </a:rPr>
-              <a:t>Igren = 10 A och Iᴸ ≈ 17,3 A.</a:t>
+              <a:rPr sz="2100" b="0">
+                <a:solidFill>
+                  <a:srgbClr val="111111"/>
+                </a:solidFill>
+                <a:latin typeface="Calibri"/>
+                <a:ea typeface="Calibri"/>
+                <a:cs typeface="Calibri"/>
+              </a:rPr>
+              <a:t>Igren = 10 A och I</a:t>
+            </a:r>
+            <a:r>
+              <a:rPr sz="2100" b="0" baseline="-25000">
+                <a:solidFill>
+                  <a:srgbClr val="111111"/>
+                </a:solidFill>
+                <a:latin typeface="Calibri"/>
+                <a:ea typeface="Calibri"/>
+                <a:cs typeface="Calibri"/>
+              </a:rPr>
+              <a:t>L</a:t>
+            </a:r>
+            <a:r>
+              <a:rPr sz="2100" b="0">
+                <a:solidFill>
+                  <a:srgbClr val="111111"/>
+                </a:solidFill>
+                <a:latin typeface="Calibri"/>
+                <a:ea typeface="Calibri"/>
+                <a:cs typeface="Calibri"/>
+              </a:rPr>
+              <a:t> ≈ 17,3 A.</a:t>
             </a:r>
           </a:p>
         </p:txBody>
@@ -17204,6 +18347,30 @@
           </a:p>
         </p:txBody>
       </p:sp>
+      <p:pic xmlns:a="http://schemas.openxmlformats.org/drawingml/2006/main" xmlns:r="http://schemas.openxmlformats.org/officeDocument/2006/relationships">
+        <p:nvPicPr>
+          <p:cNvPr id="9" name="Figur: Δ-last där linjeströmmen i L1 delar sig " descr="Δ-last där linjeströmmen i L1 delar sig i två grenströmmar"/>
+          <p:cNvPicPr>
+            <a:picLocks noChangeAspect="1"/>
+          </p:cNvPicPr>
+          <p:nvPr/>
+        </p:nvPicPr>
+        <p:blipFill>
+          <a:blip r:embed="rId3"/>
+          <a:stretch>
+            <a:fillRect/>
+          </a:stretch>
+        </p:blipFill>
+        <p:spPr>
+          <a:xfrm>
+            <a:off x="4892040" y="1645920"/>
+            <a:ext cx="3886200" cy="3252383"/>
+          </a:xfrm>
+          <a:prstGeom prst="rect">
+            <a:avLst/>
+          </a:prstGeom>
+        </p:spPr>
+      </p:pic>
     </p:spTree>
     <p:extLst>
       <p:ext uri="{BB962C8B-B14F-4D97-AF65-F5344CB8AC3E}">
@@ -17392,7 +18559,7 @@
       </p:sp>
       <p:sp>
         <p:nvSpPr>
-          <p:cNvPr id="4" name="S = √3 UᴸIᴸ     P = √3 UᴸIᴸ cos φ">
+          <p:cNvPr id="4" name="S = √3 ULIL     P = √3 ULIL cos φ">
             <a:extLst xmlns:a="http://schemas.openxmlformats.org/drawingml/2006/main">
               <a:ext uri="{FF2B5EF4-FFF2-40B4-BE49-F238E27FC236}">
                 <a16:creationId xmlns:a16="http://schemas.microsoft.com/office/drawing/2014/main" id="{34758714-B854-4413-AB22-A5296F9B2453}"/>
@@ -17443,7 +18610,95 @@
                 <a:ea typeface="Calibri"/>
                 <a:cs typeface="Calibri"/>
               </a:rPr>
-              <a:t>S = √3 UᴸIᴸ     P = √3 UᴸIᴸ cos φ</a:t>
+              <a:t>S = √3 U</a:t>
+            </a:r>
+            <a:r>
+              <a:rPr sz="2925" b="1" baseline="-25000">
+                <a:solidFill>
+                  <a:srgbClr val="064F91"/>
+                </a:solidFill>
+                <a:latin typeface="Calibri"/>
+                <a:ea typeface="Calibri"/>
+                <a:cs typeface="Calibri"/>
+              </a:rPr>
+              <a:t>L</a:t>
+            </a:r>
+            <a:r>
+              <a:rPr sz="2925" b="1">
+                <a:solidFill>
+                  <a:srgbClr val="064F91"/>
+                </a:solidFill>
+                <a:latin typeface="Calibri"/>
+                <a:ea typeface="Calibri"/>
+                <a:cs typeface="Calibri"/>
+              </a:rPr>
+              <a:t>I</a:t>
+            </a:r>
+            <a:r>
+              <a:rPr sz="2925" b="1" baseline="-25000">
+                <a:solidFill>
+                  <a:srgbClr val="064F91"/>
+                </a:solidFill>
+                <a:latin typeface="Calibri"/>
+                <a:ea typeface="Calibri"/>
+                <a:cs typeface="Calibri"/>
+              </a:rPr>
+              <a:t>L</a:t>
+            </a:r>
+            <a:r>
+              <a:rPr sz="2925" b="1">
+                <a:solidFill>
+                  <a:srgbClr val="064F91"/>
+                </a:solidFill>
+                <a:latin typeface="Calibri"/>
+                <a:ea typeface="Calibri"/>
+                <a:cs typeface="Calibri"/>
+              </a:rPr>
+              <a:t>     P = √3 U</a:t>
+            </a:r>
+            <a:r>
+              <a:rPr sz="2925" b="1" baseline="-25000">
+                <a:solidFill>
+                  <a:srgbClr val="064F91"/>
+                </a:solidFill>
+                <a:latin typeface="Calibri"/>
+                <a:ea typeface="Calibri"/>
+                <a:cs typeface="Calibri"/>
+              </a:rPr>
+              <a:t>L</a:t>
+            </a:r>
+            <a:r>
+              <a:rPr sz="2925" b="1">
+                <a:solidFill>
+                  <a:srgbClr val="064F91"/>
+                </a:solidFill>
+                <a:latin typeface="Calibri"/>
+                <a:ea typeface="Calibri"/>
+                <a:cs typeface="Calibri"/>
+              </a:rPr>
+              <a:t>I</a:t>
+            </a:r>
+            <a:r>
+              <a:rPr sz="2925" b="1" baseline="-25000">
+                <a:solidFill>
+                  <a:srgbClr val="064F91"/>
+                </a:solidFill>
+                <a:latin typeface="Calibri"/>
+                <a:ea typeface="Calibri"/>
+                <a:cs typeface="Calibri"/>
+              </a:rPr>
+              <a:t>L</a:t>
+            </a:r>
+            <a:r>
+              <a:rPr sz="2925" b="1">
+                <a:solidFill>
+                  <a:srgbClr val="064F91"/>
+                </a:solidFill>
+                <a:latin typeface="Calibri"/>
+                <a:ea typeface="Calibri"/>
+                <a:cs typeface="Calibri"/>
+              </a:rPr>
+              <a:t> cos φ</a:t>
             </a:r>
           </a:p>
         </p:txBody>
@@ -17501,7 +18756,7 @@
                 <a:ea typeface="Calibri"/>
                 <a:cs typeface="Calibri"/>
               </a:rPr>
-              <a:t>400 V, 10 A och cos φ = 0,80 ger</a:t>
+              <a:t>440 V, 20 A och cos φ = 0,85 ger</a:t>
             </a:r>
           </a:p>
           <a:p xmlns:a="http://schemas.openxmlformats.org/drawingml/2006/main">
@@ -17525,7 +18780,7 @@
                 <a:ea typeface="Calibri"/>
                 <a:cs typeface="Calibri"/>
               </a:rPr>
-              <a:t>S ≈ 6,93 kVA och P ≈ 5,54 kW.</a:t>
+              <a:t>S ≈ 15,2 kVA och P ≈ 13,0 kW.</a:t>
             </a:r>
           </a:p>
         </p:txBody>
@@ -17750,7 +19005,7 @@
       </p:sp>
       <p:sp>
         <p:nvSpPr>
-          <p:cNvPr id="11" name="Y: Iᴸ = (Uᴸ/√3)/R&#10;Δ: Iᴸ = √3 · (Uᴸ/R)">
+          <p:cNvPr id="11" name="Y: IL = (UL/√3)/R&#10;Δ: IL = √3 · (UL/R)">
             <a:extLst xmlns:a="http://schemas.openxmlformats.org/drawingml/2006/main">
               <a:ext uri="{FF2B5EF4-FFF2-40B4-BE49-F238E27FC236}">
                 <a16:creationId xmlns:a16="http://schemas.microsoft.com/office/drawing/2014/main" id="{7737F422-A18E-4BFA-8AF4-30F7FE1A5B40}"/>
@@ -17800,7 +19055,51 @@
                 <a:ea typeface="Calibri"/>
                 <a:cs typeface="Calibri"/>
               </a:rPr>
-              <a:t>Y: Iᴸ = (Uᴸ/√3)/R</a:t>
+              <a:t>Y: I</a:t>
+            </a:r>
+            <a:r>
+              <a:rPr sz="2325" b="1" baseline="-25000">
+                <a:solidFill>
+                  <a:srgbClr val="064F91"/>
+                </a:solidFill>
+                <a:latin typeface="Calibri"/>
+                <a:ea typeface="Calibri"/>
+                <a:cs typeface="Calibri"/>
+              </a:rPr>
+              <a:t>L</a:t>
+            </a:r>
+            <a:r>
+              <a:rPr sz="2325" b="1">
+                <a:solidFill>
+                  <a:srgbClr val="064F91"/>
+                </a:solidFill>
+                <a:latin typeface="Calibri"/>
+                <a:ea typeface="Calibri"/>
+                <a:cs typeface="Calibri"/>
+              </a:rPr>
+              <a:t> = (U</a:t>
+            </a:r>
+            <a:r>
+              <a:rPr sz="2325" b="1" baseline="-25000">
+                <a:solidFill>
+                  <a:srgbClr val="064F91"/>
+                </a:solidFill>
+                <a:latin typeface="Calibri"/>
+                <a:ea typeface="Calibri"/>
+                <a:cs typeface="Calibri"/>
+              </a:rPr>
+              <a:t>L</a:t>
+            </a:r>
+            <a:r>
+              <a:rPr sz="2325" b="1">
+                <a:solidFill>
+                  <a:srgbClr val="064F91"/>
+                </a:solidFill>
+                <a:latin typeface="Calibri"/>
+                <a:ea typeface="Calibri"/>
+                <a:cs typeface="Calibri"/>
+              </a:rPr>
+              <a:t>/√3)/R</a:t>
             </a:r>
           </a:p>
           <a:p xmlns:a="http://schemas.openxmlformats.org/drawingml/2006/main">
@@ -17823,14 +19122,58 @@
                 <a:ea typeface="Calibri"/>
                 <a:cs typeface="Calibri"/>
               </a:rPr>
-              <a:t>Δ: Iᴸ = √3 · (Uᴸ/R)</a:t>
-            </a:r>
-          </a:p>
-        </p:txBody>
-      </p:sp>
-      <p:sp>
-        <p:nvSpPr>
-          <p:cNvPr id="12" name="1. Y: Ugren = 200/√3 ≈ 115,5 V. Iᴸ ≈ 115,5/20 = 5,77 A.&#10;2. Δ: Ugr">
+              <a:t>Δ: I</a:t>
+            </a:r>
+            <a:r>
+              <a:rPr sz="2325" b="1" baseline="-25000">
+                <a:solidFill>
+                  <a:srgbClr val="064F91"/>
+                </a:solidFill>
+                <a:latin typeface="Calibri"/>
+                <a:ea typeface="Calibri"/>
+                <a:cs typeface="Calibri"/>
+              </a:rPr>
+              <a:t>L</a:t>
+            </a:r>
+            <a:r>
+              <a:rPr sz="2325" b="1">
+                <a:solidFill>
+                  <a:srgbClr val="064F91"/>
+                </a:solidFill>
+                <a:latin typeface="Calibri"/>
+                <a:ea typeface="Calibri"/>
+                <a:cs typeface="Calibri"/>
+              </a:rPr>
+              <a:t> = √3 · (U</a:t>
+            </a:r>
+            <a:r>
+              <a:rPr sz="2325" b="1" baseline="-25000">
+                <a:solidFill>
+                  <a:srgbClr val="064F91"/>
+                </a:solidFill>
+                <a:latin typeface="Calibri"/>
+                <a:ea typeface="Calibri"/>
+                <a:cs typeface="Calibri"/>
+              </a:rPr>
+              <a:t>L</a:t>
+            </a:r>
+            <a:r>
+              <a:rPr sz="2325" b="1">
+                <a:solidFill>
+                  <a:srgbClr val="064F91"/>
+                </a:solidFill>
+                <a:latin typeface="Calibri"/>
+                <a:ea typeface="Calibri"/>
+                <a:cs typeface="Calibri"/>
+              </a:rPr>
+              <a:t>/R)</a:t>
+            </a:r>
+          </a:p>
+        </p:txBody>
+      </p:sp>
+      <p:sp>
+        <p:nvSpPr>
+          <p:cNvPr id="12" name="1. Y: Ugren = 200/√3 ≈ 115,5 V. IL ≈ 115,5/20 = 5,77 A.&#10;2. Δ: Ugr">
             <a:extLst xmlns:a="http://schemas.openxmlformats.org/drawingml/2006/main">
               <a:ext uri="{FF2B5EF4-FFF2-40B4-BE49-F238E27FC236}">
                 <a16:creationId xmlns:a16="http://schemas.microsoft.com/office/drawing/2014/main" id="{61E1F30D-4695-4100-83D2-31B9F5FC9D67}"/>
@@ -17880,7 +19223,29 @@
                 <a:ea typeface="Calibri"/>
                 <a:cs typeface="Calibri"/>
               </a:rPr>
-              <a:t>1. Y: Ugren = 200/√3 ≈ 115,5 V. Iᴸ ≈ 115,5/20 = 5,77 A.</a:t>
+              <a:t>1. Y: Ugren = 200/√3 ≈ 115,5 V. I</a:t>
+            </a:r>
+            <a:r>
+              <a:rPr sz="2063" b="0" baseline="-25000">
+                <a:solidFill>
+                  <a:srgbClr val="111111"/>
+                </a:solidFill>
+                <a:latin typeface="Calibri"/>
+                <a:ea typeface="Calibri"/>
+                <a:cs typeface="Calibri"/>
+              </a:rPr>
+              <a:t>L</a:t>
+            </a:r>
+            <a:r>
+              <a:rPr sz="2063" b="0">
+                <a:solidFill>
+                  <a:srgbClr val="111111"/>
+                </a:solidFill>
+                <a:latin typeface="Calibri"/>
+                <a:ea typeface="Calibri"/>
+                <a:cs typeface="Calibri"/>
+              </a:rPr>
+              <a:t> ≈ 115,5/20 = 5,77 A.</a:t>
             </a:r>
           </a:p>
           <a:p xmlns:a="http://schemas.openxmlformats.org/drawingml/2006/main">
@@ -17926,7 +19291,29 @@
                 <a:ea typeface="Calibri"/>
                 <a:cs typeface="Calibri"/>
               </a:rPr>
-              <a:t>3. Δ: Iᴸ = √3 · 10 ≈ 17,32 A.</a:t>
+              <a:t>3. Δ: I</a:t>
+            </a:r>
+            <a:r>
+              <a:rPr sz="2063" b="0" baseline="-25000">
+                <a:solidFill>
+                  <a:srgbClr val="111111"/>
+                </a:solidFill>
+                <a:latin typeface="Calibri"/>
+                <a:ea typeface="Calibri"/>
+                <a:cs typeface="Calibri"/>
+              </a:rPr>
+              <a:t>L</a:t>
+            </a:r>
+            <a:r>
+              <a:rPr sz="2063" b="0">
+                <a:solidFill>
+                  <a:srgbClr val="111111"/>
+                </a:solidFill>
+                <a:latin typeface="Calibri"/>
+                <a:ea typeface="Calibri"/>
+                <a:cs typeface="Calibri"/>
+              </a:rPr>
+              <a:t> = √3 · 10 ≈ 17,32 A.</a:t>
             </a:r>
           </a:p>
         </p:txBody>

--- a/sjoskolan/vecka-41/aktuell/v41_02_Y_och_trefaseffekt_elev.pptx
+++ b/sjoskolan/vecka-41/aktuell/v41_02_Y_och_trefaseffekt_elev.pptx
@@ -3512,6 +3512,10 @@
             <a:noFill/>
           </a:ln>
         </p:spPr>
+        <p:txBody xmlns:a="http://schemas.openxmlformats.org/drawingml/2006/main">
+          <a:bodyPr/>
+          <a:p/>
+        </p:txBody>
       </p:sp>
       <p:sp>
         <p:nvSpPr>
@@ -11447,7 +11451,7 @@
                 <a:ea typeface="Calibri"/>
                 <a:cs typeface="Calibri"/>
               </a:rPr>
-              <a:t>Märkningens Δ-värde jämförs med U</a:t>
+              <a:t>Jämför nätets U</a:t>
             </a:r>
             <a:r>
               <a:rPr sz="2400" b="1" baseline="-25000">
@@ -11459,6 +11463,17 @@
                 <a:cs typeface="Calibri"/>
               </a:rPr>
               <a:t>L</a:t>
+            </a:r>
+            <a:r>
+              <a:rPr sz="2400" b="1">
+                <a:solidFill>
+                  <a:srgbClr val="064F91"/>
+                </a:solidFill>
+                <a:latin typeface="Calibri"/>
+                <a:ea typeface="Calibri"/>
+                <a:cs typeface="Calibri"/>
+              </a:rPr>
+              <a:t> med båda märkvärdena</a:t>
             </a:r>
           </a:p>
         </p:txBody>
@@ -11515,7 +11530,7 @@
                 <a:ea typeface="Calibri"/>
                 <a:cs typeface="Calibri"/>
               </a:rPr>
-              <a:t>Δ/Y 400/690 V betyder att lindningen är avsedd för ungefär 400 V vid märkdrift.</a:t>
+              <a:t>Δ/Y-märkningen anger vilken linjespänning som gäller för respektive koppling.</a:t>
             </a:r>
           </a:p>
         </p:txBody>
@@ -16769,6 +16784,10 @@
             </a:solidFill>
           </a:ln>
         </p:spPr>
+        <p:txBody xmlns:a="http://schemas.openxmlformats.org/drawingml/2006/main">
+          <a:bodyPr/>
+          <a:p/>
+        </p:txBody>
       </p:sp>
       <p:sp>
         <p:nvSpPr>
@@ -16801,6 +16820,10 @@
             </a:solidFill>
           </a:ln>
         </p:spPr>
+        <p:txBody xmlns:a="http://schemas.openxmlformats.org/drawingml/2006/main">
+          <a:bodyPr/>
+          <a:p/>
+        </p:txBody>
       </p:sp>
       <p:sp>
         <p:nvSpPr>
@@ -16889,6 +16912,10 @@
             </a:solidFill>
           </a:ln>
         </p:spPr>
+        <p:txBody xmlns:a="http://schemas.openxmlformats.org/drawingml/2006/main">
+          <a:bodyPr/>
+          <a:p/>
+        </p:txBody>
       </p:sp>
       <p:sp>
         <p:nvSpPr>
@@ -16921,6 +16948,10 @@
             </a:solidFill>
           </a:ln>
         </p:spPr>
+        <p:txBody xmlns:a="http://schemas.openxmlformats.org/drawingml/2006/main">
+          <a:bodyPr/>
+          <a:p/>
+        </p:txBody>
       </p:sp>
       <p:sp>
         <p:nvSpPr>
@@ -17009,6 +17040,10 @@
             </a:solidFill>
           </a:ln>
         </p:spPr>
+        <p:txBody xmlns:a="http://schemas.openxmlformats.org/drawingml/2006/main">
+          <a:bodyPr/>
+          <a:p/>
+        </p:txBody>
       </p:sp>
       <p:sp>
         <p:nvSpPr>
@@ -17041,6 +17076,10 @@
             </a:solidFill>
           </a:ln>
         </p:spPr>
+        <p:txBody xmlns:a="http://schemas.openxmlformats.org/drawingml/2006/main">
+          <a:bodyPr/>
+          <a:p/>
+        </p:txBody>
       </p:sp>
       <p:sp>
         <p:nvSpPr>
@@ -17131,6 +17170,10 @@
             </a:solidFill>
           </a:ln>
         </p:spPr>
+        <p:txBody xmlns:a="http://schemas.openxmlformats.org/drawingml/2006/main">
+          <a:bodyPr/>
+          <a:p/>
+        </p:txBody>
       </p:sp>
       <p:sp>
         <p:nvSpPr>
@@ -17219,6 +17262,10 @@
             </a:solidFill>
           </a:ln>
         </p:spPr>
+        <p:txBody xmlns:a="http://schemas.openxmlformats.org/drawingml/2006/main">
+          <a:bodyPr/>
+          <a:p/>
+        </p:txBody>
       </p:sp>
       <p:sp>
         <p:nvSpPr>
@@ -17249,6 +17296,10 @@
             </a:solidFill>
           </a:ln>
         </p:spPr>
+        <p:txBody xmlns:a="http://schemas.openxmlformats.org/drawingml/2006/main">
+          <a:bodyPr/>
+          <a:p/>
+        </p:txBody>
       </p:sp>
       <p:sp>
         <p:nvSpPr>
@@ -17279,6 +17330,10 @@
             </a:solidFill>
           </a:ln>
         </p:spPr>
+        <p:txBody xmlns:a="http://schemas.openxmlformats.org/drawingml/2006/main">
+          <a:bodyPr/>
+          <a:p/>
+        </p:txBody>
       </p:sp>
       <p:sp>
         <p:nvSpPr>
@@ -17311,6 +17366,10 @@
             </a:solidFill>
           </a:ln>
         </p:spPr>
+        <p:txBody xmlns:a="http://schemas.openxmlformats.org/drawingml/2006/main">
+          <a:bodyPr/>
+          <a:p/>
+        </p:txBody>
       </p:sp>
       <p:sp>
         <p:nvSpPr>
@@ -17401,6 +17460,10 @@
             </a:solidFill>
           </a:ln>
         </p:spPr>
+        <p:txBody xmlns:a="http://schemas.openxmlformats.org/drawingml/2006/main">
+          <a:bodyPr/>
+          <a:p/>
+        </p:txBody>
       </p:sp>
       <p:sp>
         <p:nvSpPr>
@@ -17491,6 +17554,10 @@
             </a:solidFill>
           </a:ln>
         </p:spPr>
+        <p:txBody xmlns:a="http://schemas.openxmlformats.org/drawingml/2006/main">
+          <a:bodyPr/>
+          <a:p/>
+        </p:txBody>
       </p:sp>
       <p:sp>
         <p:nvSpPr>
@@ -18238,7 +18305,7 @@
                 <a:ea typeface="Calibri"/>
                 <a:cs typeface="Calibri"/>
               </a:rPr>
-              <a:t>440 V över tre grenar på 44 Ω i Δ:</a:t>
+              <a:t>440 V över tre grenar på 55 Ω i Δ:</a:t>
             </a:r>
           </a:p>
           <a:p xmlns:a="http://schemas.openxmlformats.org/drawingml/2006/main">
@@ -18262,7 +18329,7 @@
                 <a:ea typeface="Calibri"/>
                 <a:cs typeface="Calibri"/>
               </a:rPr>
-              <a:t>Igren = 10 A och I</a:t>
+              <a:t>Igren = 8,0 A och I</a:t>
             </a:r>
             <a:r>
               <a:rPr sz="2100" b="0" baseline="-25000">
@@ -18284,7 +18351,7 @@
                 <a:ea typeface="Calibri"/>
                 <a:cs typeface="Calibri"/>
               </a:rPr>
-              <a:t> ≈ 17,3 A.</a:t>
+              <a:t> ≈ 13,9 A.</a:t>
             </a:r>
           </a:p>
         </p:txBody>
@@ -18998,7 +19065,7 @@
                 <a:ea typeface="Calibri"/>
                 <a:cs typeface="Calibri"/>
               </a:rPr>
-              <a:t>Tre resistorer på 20 Ω ansluts till symmetriska 200 V mellan faserna.</a:t>
+              <a:t>Tre resistorer på 16 Ω ansluts till symmetriska 200 V mellan faserna.</a:t>
             </a:r>
           </a:p>
         </p:txBody>
@@ -19245,7 +19312,7 @@
                 <a:ea typeface="Calibri"/>
                 <a:cs typeface="Calibri"/>
               </a:rPr>
-              <a:t> ≈ 115,5/20 = 5,77 A.</a:t>
+              <a:t> ≈ 115,5/16 ≈ 7,22 A.</a:t>
             </a:r>
           </a:p>
           <a:p xmlns:a="http://schemas.openxmlformats.org/drawingml/2006/main">
@@ -19268,7 +19335,7 @@
                 <a:ea typeface="Calibri"/>
                 <a:cs typeface="Calibri"/>
               </a:rPr>
-              <a:t>2. Δ: Ugren = 200 V. Igren = 200/20 = 10 A.</a:t>
+              <a:t>2. Δ: Ugren = 200 V. Igren = 200/16 = 12,5 A.</a:t>
             </a:r>
           </a:p>
           <a:p xmlns:a="http://schemas.openxmlformats.org/drawingml/2006/main">
@@ -19313,7 +19380,7 @@
                 <a:ea typeface="Calibri"/>
                 <a:cs typeface="Calibri"/>
               </a:rPr>
-              <a:t> = √3 · 10 ≈ 17,32 A.</a:t>
+              <a:t> = √3 · 12,5 ≈ 21,65 A.</a:t>
             </a:r>
           </a:p>
         </p:txBody>

--- a/sjoskolan/vecka-41/aktuell/v41_02_Y_och_trefaseffekt_elev.pptx
+++ b/sjoskolan/vecka-41/aktuell/v41_02_Y_och_trefaseffekt_elev.pptx
@@ -3846,7 +3846,29 @@
                 <a:ea typeface="Calibri"/>
                 <a:cs typeface="Calibri"/>
               </a:rPr>
-              <a:t>Y: Ugren = U</a:t>
+              <a:t>Y: U</a:t>
+            </a:r>
+            <a:r>
+              <a:rPr sz="2400" b="1" baseline="-25000">
+                <a:solidFill>
+                  <a:srgbClr val="064F91"/>
+                </a:solidFill>
+                <a:latin typeface="Calibri"/>
+                <a:ea typeface="Calibri"/>
+                <a:cs typeface="Calibri"/>
+              </a:rPr>
+              <a:t>gren</a:t>
+            </a:r>
+            <a:r>
+              <a:rPr sz="2400" b="1">
+                <a:solidFill>
+                  <a:srgbClr val="064F91"/>
+                </a:solidFill>
+                <a:latin typeface="Calibri"/>
+                <a:ea typeface="Calibri"/>
+                <a:cs typeface="Calibri"/>
+              </a:rPr>
+              <a:t> = U</a:t>
             </a:r>
             <a:r>
               <a:rPr sz="2400" b="1" baseline="-25000">
@@ -3947,7 +3969,29 @@
                 <a:ea typeface="Calibri"/>
                 <a:cs typeface="Calibri"/>
               </a:rPr>
-              <a:t> är linjespänning. Ugren är spänningen över en enskild resistor i Y-lasten.</a:t>
+              <a:t> är linjespänningen och U</a:t>
+            </a:r>
+            <a:r>
+              <a:rPr sz="2100" b="0" baseline="-25000">
+                <a:solidFill>
+                  <a:srgbClr val="111111"/>
+                </a:solidFill>
+                <a:latin typeface="Calibri"/>
+                <a:ea typeface="Calibri"/>
+                <a:cs typeface="Calibri"/>
+              </a:rPr>
+              <a:t>gren</a:t>
+            </a:r>
+            <a:r>
+              <a:rPr sz="2100" b="0">
+                <a:solidFill>
+                  <a:srgbClr val="111111"/>
+                </a:solidFill>
+                <a:latin typeface="Calibri"/>
+                <a:ea typeface="Calibri"/>
+                <a:cs typeface="Calibri"/>
+              </a:rPr>
+              <a:t> spänningen över en av resistorerna i Y-lasten.</a:t>
             </a:r>
           </a:p>
         </p:txBody>
@@ -4004,7 +4048,7 @@
                 <a:ea typeface="Calibri"/>
                 <a:cs typeface="Calibri"/>
               </a:rPr>
-              <a:t>Förutsättningar: Symmetrisk källa och tre lika ohmska grenar på 40 Ω. U</a:t>
+              <a:t>Förutsättningar: Symmetrisk källa och tre lika resistorer på 40 Ω. U</a:t>
             </a:r>
             <a:r>
               <a:rPr sz="2025" b="0" baseline="-25000">
@@ -4083,7 +4127,7 @@
                 <a:ea typeface="Calibri"/>
                 <a:cs typeface="Calibri"/>
               </a:rPr>
-              <a:t>Arbetsgång: Beräkna grenspänningen ur linjespänningen. Resistansen behövs i nästa beräkningssteg.</a:t>
+              <a:t>Arbetsgång: Räkna ut grenspänningen från linjespänningen. Resistansen behövs först i nästa uppgift.</a:t>
             </a:r>
           </a:p>
         </p:txBody>
@@ -4660,7 +4704,7 @@
                 <a:ea typeface="Calibri"/>
                 <a:cs typeface="Calibri"/>
               </a:rPr>
-              <a:t>Igren = Ugren/R     Y: I</a:t>
+              <a:t>I</a:t>
             </a:r>
             <a:r>
               <a:rPr sz="2400" b="1" baseline="-25000">
@@ -4671,6 +4715,50 @@
                 <a:ea typeface="Calibri"/>
                 <a:cs typeface="Calibri"/>
               </a:rPr>
+              <a:t>gren</a:t>
+            </a:r>
+            <a:r>
+              <a:rPr sz="2400" b="1">
+                <a:solidFill>
+                  <a:srgbClr val="064F91"/>
+                </a:solidFill>
+                <a:latin typeface="Calibri"/>
+                <a:ea typeface="Calibri"/>
+                <a:cs typeface="Calibri"/>
+              </a:rPr>
+              <a:t> = U</a:t>
+            </a:r>
+            <a:r>
+              <a:rPr sz="2400" b="1" baseline="-25000">
+                <a:solidFill>
+                  <a:srgbClr val="064F91"/>
+                </a:solidFill>
+                <a:latin typeface="Calibri"/>
+                <a:ea typeface="Calibri"/>
+                <a:cs typeface="Calibri"/>
+              </a:rPr>
+              <a:t>gren</a:t>
+            </a:r>
+            <a:r>
+              <a:rPr sz="2400" b="1">
+                <a:solidFill>
+                  <a:srgbClr val="064F91"/>
+                </a:solidFill>
+                <a:latin typeface="Calibri"/>
+                <a:ea typeface="Calibri"/>
+                <a:cs typeface="Calibri"/>
+              </a:rPr>
+              <a:t>/R; Y: I</a:t>
+            </a:r>
+            <a:r>
+              <a:rPr sz="2400" b="1" baseline="-25000">
+                <a:solidFill>
+                  <a:srgbClr val="064F91"/>
+                </a:solidFill>
+                <a:latin typeface="Calibri"/>
+                <a:ea typeface="Calibri"/>
+                <a:cs typeface="Calibri"/>
+              </a:rPr>
               <a:t>L</a:t>
             </a:r>
             <a:r>
@@ -4682,7 +4770,18 @@
                 <a:ea typeface="Calibri"/>
                 <a:cs typeface="Calibri"/>
               </a:rPr>
-              <a:t> = Igren</a:t>
+              <a:t> = I</a:t>
+            </a:r>
+            <a:r>
+              <a:rPr sz="2400" b="1" baseline="-25000">
+                <a:solidFill>
+                  <a:srgbClr val="064F91"/>
+                </a:solidFill>
+                <a:latin typeface="Calibri"/>
+                <a:ea typeface="Calibri"/>
+                <a:cs typeface="Calibri"/>
+              </a:rPr>
+              <a:t>gren</a:t>
             </a:r>
           </a:p>
         </p:txBody>
@@ -4739,7 +4838,7 @@
                 <a:ea typeface="Calibri"/>
                 <a:cs typeface="Calibri"/>
               </a:rPr>
-              <a:t>Linjeström I</a:t>
+              <a:t>I Y är linjeströmmen I</a:t>
             </a:r>
             <a:r>
               <a:rPr sz="2100" b="0" baseline="-25000">
@@ -4761,7 +4860,29 @@
                 <a:ea typeface="Calibri"/>
                 <a:cs typeface="Calibri"/>
               </a:rPr>
-              <a:t> och grenström Igren är lika i Y eftersom samma strömväg passerar grenen.</a:t>
+              <a:t> och grenströmmen I</a:t>
+            </a:r>
+            <a:r>
+              <a:rPr sz="2100" b="0" baseline="-25000">
+                <a:solidFill>
+                  <a:srgbClr val="111111"/>
+                </a:solidFill>
+                <a:latin typeface="Calibri"/>
+                <a:ea typeface="Calibri"/>
+                <a:cs typeface="Calibri"/>
+              </a:rPr>
+              <a:t>gren</a:t>
+            </a:r>
+            <a:r>
+              <a:rPr sz="2100" b="0">
+                <a:solidFill>
+                  <a:srgbClr val="111111"/>
+                </a:solidFill>
+                <a:latin typeface="Calibri"/>
+                <a:ea typeface="Calibri"/>
+                <a:cs typeface="Calibri"/>
+              </a:rPr>
+              <a:t> lika, eftersom linjeströmmen går rakt genom grenen.</a:t>
             </a:r>
           </a:p>
         </p:txBody>
@@ -4840,7 +4961,29 @@
                 <a:ea typeface="Calibri"/>
                 <a:cs typeface="Calibri"/>
               </a:rPr>
-              <a:t> = 400 V. Ugren = 400/√3 V.</a:t>
+              <a:t> = 400 V. U</a:t>
+            </a:r>
+            <a:r>
+              <a:rPr sz="2025" b="0" baseline="-25000">
+                <a:solidFill>
+                  <a:srgbClr val="111111"/>
+                </a:solidFill>
+                <a:latin typeface="Calibri"/>
+                <a:ea typeface="Calibri"/>
+                <a:cs typeface="Calibri"/>
+              </a:rPr>
+              <a:t>gren</a:t>
+            </a:r>
+            <a:r>
+              <a:rPr sz="2025" b="0">
+                <a:solidFill>
+                  <a:srgbClr val="111111"/>
+                </a:solidFill>
+                <a:latin typeface="Calibri"/>
+                <a:ea typeface="Calibri"/>
+                <a:cs typeface="Calibri"/>
+              </a:rPr>
+              <a:t> = 400/√3 V.</a:t>
             </a:r>
           </a:p>
         </p:txBody>
@@ -4897,7 +5040,7 @@
                 <a:ea typeface="Calibri"/>
                 <a:cs typeface="Calibri"/>
               </a:rPr>
-              <a:t>Arbetsgång: Räkna grenströmmen med Ohms lag. Använd sedan Y-sambandet för linjeströmmen.</a:t>
+              <a:t>Arbetsgång: Räkna grenströmmen med Ohms lag.</a:t>
             </a:r>
           </a:p>
         </p:txBody>
@@ -5174,7 +5317,7 @@
                 <a:ea typeface="Calibri"/>
                 <a:cs typeface="Calibri"/>
               </a:rPr>
-              <a:t>Använd Y-lasten i uppgift 1. Bestäm grenström och linjeström.</a:t>
+              <a:t>Använd Y-lasten i uppgift 1. Bestäm grenströmmen och linjeströmmen.</a:t>
             </a:r>
           </a:p>
         </p:txBody>
@@ -5474,7 +5617,7 @@
                 <a:ea typeface="Calibri"/>
                 <a:cs typeface="Calibri"/>
               </a:rPr>
-              <a:t>Δ: Ugren = U</a:t>
+              <a:t>Δ: U</a:t>
             </a:r>
             <a:r>
               <a:rPr sz="2400" b="1" baseline="-25000">
@@ -5485,6 +5628,28 @@
                 <a:ea typeface="Calibri"/>
                 <a:cs typeface="Calibri"/>
               </a:rPr>
+              <a:t>gren</a:t>
+            </a:r>
+            <a:r>
+              <a:rPr sz="2400" b="1">
+                <a:solidFill>
+                  <a:srgbClr val="064F91"/>
+                </a:solidFill>
+                <a:latin typeface="Calibri"/>
+                <a:ea typeface="Calibri"/>
+                <a:cs typeface="Calibri"/>
+              </a:rPr>
+              <a:t> = U</a:t>
+            </a:r>
+            <a:r>
+              <a:rPr sz="2400" b="1" baseline="-25000">
+                <a:solidFill>
+                  <a:srgbClr val="064F91"/>
+                </a:solidFill>
+                <a:latin typeface="Calibri"/>
+                <a:ea typeface="Calibri"/>
+                <a:cs typeface="Calibri"/>
+              </a:rPr>
               <a:t>L</a:t>
             </a:r>
             <a:r>
@@ -5496,7 +5661,51 @@
                 <a:ea typeface="Calibri"/>
                 <a:cs typeface="Calibri"/>
               </a:rPr>
-              <a:t>     Igren = Ugren/R</a:t>
+              <a:t>; I</a:t>
+            </a:r>
+            <a:r>
+              <a:rPr sz="2400" b="1" baseline="-25000">
+                <a:solidFill>
+                  <a:srgbClr val="064F91"/>
+                </a:solidFill>
+                <a:latin typeface="Calibri"/>
+                <a:ea typeface="Calibri"/>
+                <a:cs typeface="Calibri"/>
+              </a:rPr>
+              <a:t>gren</a:t>
+            </a:r>
+            <a:r>
+              <a:rPr sz="2400" b="1">
+                <a:solidFill>
+                  <a:srgbClr val="064F91"/>
+                </a:solidFill>
+                <a:latin typeface="Calibri"/>
+                <a:ea typeface="Calibri"/>
+                <a:cs typeface="Calibri"/>
+              </a:rPr>
+              <a:t> = U</a:t>
+            </a:r>
+            <a:r>
+              <a:rPr sz="2400" b="1" baseline="-25000">
+                <a:solidFill>
+                  <a:srgbClr val="064F91"/>
+                </a:solidFill>
+                <a:latin typeface="Calibri"/>
+                <a:ea typeface="Calibri"/>
+                <a:cs typeface="Calibri"/>
+              </a:rPr>
+              <a:t>gren</a:t>
+            </a:r>
+            <a:r>
+              <a:rPr sz="2400" b="1">
+                <a:solidFill>
+                  <a:srgbClr val="064F91"/>
+                </a:solidFill>
+                <a:latin typeface="Calibri"/>
+                <a:ea typeface="Calibri"/>
+                <a:cs typeface="Calibri"/>
+              </a:rPr>
+              <a:t>/R</a:t>
             </a:r>
           </a:p>
           <a:p xmlns:a="http://schemas.openxmlformats.org/drawingml/2006/main">
@@ -5541,7 +5750,18 @@
                 <a:ea typeface="Calibri"/>
                 <a:cs typeface="Calibri"/>
               </a:rPr>
-              <a:t> = √3 · Igren</a:t>
+              <a:t> = √3 · I</a:t>
+            </a:r>
+            <a:r>
+              <a:rPr sz="2400" b="1" baseline="-25000">
+                <a:solidFill>
+                  <a:srgbClr val="064F91"/>
+                </a:solidFill>
+                <a:latin typeface="Calibri"/>
+                <a:ea typeface="Calibri"/>
+                <a:cs typeface="Calibri"/>
+              </a:rPr>
+              <a:t>gren</a:t>
             </a:r>
           </a:p>
         </p:txBody>
@@ -5598,7 +5818,7 @@
                 <a:ea typeface="Calibri"/>
                 <a:cs typeface="Calibri"/>
               </a:rPr>
-              <a:t>I Δ är linjeströmmen en visarskillnad mellan två grenströmmar.</a:t>
+              <a:t>I Δ är linjeströmmen skillnaden mellan två grenströmmar, räknad som visare.</a:t>
             </a:r>
           </a:p>
         </p:txBody>
@@ -5734,7 +5954,7 @@
                 <a:ea typeface="Calibri"/>
                 <a:cs typeface="Calibri"/>
               </a:rPr>
-              <a:t>Arbetsgång: Beräkna grenströmmen. Multiplicera därefter med √3 för linjeströmmen.</a:t>
+              <a:t>Arbetsgång: Räkna ut grenströmmen och multiplicera sedan med √3 för att få linjeströmmen.</a:t>
             </a:r>
           </a:p>
         </p:txBody>
@@ -6011,7 +6231,7 @@
                 <a:ea typeface="Calibri"/>
                 <a:cs typeface="Calibri"/>
               </a:rPr>
-              <a:t>Tre resistorer på 40 Ω kopplas i Δ till 400 V. Bestäm grenström och linjeström.</a:t>
+              <a:t>Tre resistorer på 40 Ω kopplas i Δ till 400 V. Bestäm grenströmmen och linjeströmmen.</a:t>
             </a:r>
           </a:p>
         </p:txBody>
@@ -6412,7 +6632,7 @@
                 <a:ea typeface="Calibri"/>
                 <a:cs typeface="Calibri"/>
               </a:rPr>
-              <a:t>P är total aktiv trefaseffekt. U</a:t>
+              <a:t>P är den totala aktiva effekten i alla tre faserna. U</a:t>
             </a:r>
             <a:r>
               <a:rPr sz="2100" b="0" baseline="-25000">
@@ -6456,7 +6676,7 @@
                 <a:ea typeface="Calibri"/>
                 <a:cs typeface="Calibri"/>
               </a:rPr>
-              <a:t> är linjevärden i V och A RMS.</a:t>
+              <a:t> är linjevärden (effektivvärden).</a:t>
             </a:r>
           </a:p>
         </p:txBody>
@@ -6614,7 +6834,7 @@
                 <a:ea typeface="Calibri"/>
                 <a:cs typeface="Calibri"/>
               </a:rPr>
-              <a:t>Arbetsgång: Multiplicera de fyra faktorerna. Resultatet blir W, som kan divideras med 1 000 till kW.</a:t>
+              <a:t>Arbetsgång: Multiplicera de fyra faktorerna. Svaret blir i W – dela med 1 000 för kW.</a:t>
             </a:r>
           </a:p>
         </p:txBody>
@@ -7359,7 +7579,7 @@
                 <a:ea typeface="Calibri"/>
                 <a:cs typeface="Calibri"/>
               </a:rPr>
-              <a:t>S är total skenbar effekt i VA. Q är reaktiv effekt i var, positiv för induktiv last.</a:t>
+              <a:t>S är den totala skenbara effekten i VA och Q den reaktiva effekten i var, positiv för induktiv last.</a:t>
             </a:r>
           </a:p>
         </p:txBody>
@@ -7517,7 +7737,7 @@
                 <a:ea typeface="Calibri"/>
                 <a:cs typeface="Calibri"/>
               </a:rPr>
-              <a:t>Arbetsgång: Beräkna S och sin φ separat. Multiplicera sedan och omvandla till kVA respektive kvar.</a:t>
+              <a:t>Arbetsgång: Räkna ut S och sin φ var för sig, multiplicera och gör om till kVA och kvar.</a:t>
             </a:r>
           </a:p>
         </p:txBody>
@@ -10670,7 +10890,7 @@
                 <a:ea typeface="Calibri"/>
                 <a:cs typeface="Calibri"/>
               </a:rPr>
-              <a:t>Y: Ugren = U</a:t>
+              <a:t>Y: U</a:t>
             </a:r>
             <a:r>
               <a:rPr sz="2400" b="1" baseline="-25000">
@@ -10681,6 +10901,28 @@
                 <a:ea typeface="Calibri"/>
                 <a:cs typeface="Calibri"/>
               </a:rPr>
+              <a:t>gren</a:t>
+            </a:r>
+            <a:r>
+              <a:rPr sz="2400" b="1">
+                <a:solidFill>
+                  <a:srgbClr val="064F91"/>
+                </a:solidFill>
+                <a:latin typeface="Calibri"/>
+                <a:ea typeface="Calibri"/>
+                <a:cs typeface="Calibri"/>
+              </a:rPr>
+              <a:t> = U</a:t>
+            </a:r>
+            <a:r>
+              <a:rPr sz="2400" b="1" baseline="-25000">
+                <a:solidFill>
+                  <a:srgbClr val="064F91"/>
+                </a:solidFill>
+                <a:latin typeface="Calibri"/>
+                <a:ea typeface="Calibri"/>
+                <a:cs typeface="Calibri"/>
+              </a:rPr>
               <a:t>L</a:t>
             </a:r>
             <a:r>
@@ -10692,7 +10934,29 @@
                 <a:ea typeface="Calibri"/>
                 <a:cs typeface="Calibri"/>
               </a:rPr>
-              <a:t>/√3     Δ: Ugren = U</a:t>
+              <a:t>/√3; Δ: U</a:t>
+            </a:r>
+            <a:r>
+              <a:rPr sz="2400" b="1" baseline="-25000">
+                <a:solidFill>
+                  <a:srgbClr val="064F91"/>
+                </a:solidFill>
+                <a:latin typeface="Calibri"/>
+                <a:ea typeface="Calibri"/>
+                <a:cs typeface="Calibri"/>
+              </a:rPr>
+              <a:t>gren</a:t>
+            </a:r>
+            <a:r>
+              <a:rPr sz="2400" b="1">
+                <a:solidFill>
+                  <a:srgbClr val="064F91"/>
+                </a:solidFill>
+                <a:latin typeface="Calibri"/>
+                <a:ea typeface="Calibri"/>
+                <a:cs typeface="Calibri"/>
+              </a:rPr>
+              <a:t> = U</a:t>
             </a:r>
             <a:r>
               <a:rPr sz="2400" b="1" baseline="-25000">
@@ -10760,7 +11024,7 @@
                 <a:ea typeface="Calibri"/>
                 <a:cs typeface="Calibri"/>
               </a:rPr>
-              <a:t>Märkningen Δ/Y 230/400 V anger tillåten linjespänning för respektive driftkoppling.</a:t>
+              <a:t>Märkningen Δ/Y 230/400 V anger vilken nätspänning som gäller för varje koppling.</a:t>
             </a:r>
           </a:p>
         </p:txBody>
@@ -10874,7 +11138,7 @@
                 <a:ea typeface="Calibri"/>
                 <a:cs typeface="Calibri"/>
               </a:rPr>
-              <a:t>Arbetsgång: Jämför lindningsspänningen vid Y och Δ med motorns märkning. Motivera valet med ett värde.</a:t>
+              <a:t>Arbetsgång: Räkna ut spänningen över en lindning i Y och i Δ och jämför med märkningen. Motivera valet med ett värde.</a:t>
             </a:r>
           </a:p>
         </p:txBody>
@@ -11587,7 +11851,7 @@
                 <a:ea typeface="Calibri"/>
                 <a:cs typeface="Calibri"/>
               </a:rPr>
-              <a:t>Förutsättningar: Matningen ger 400 V linjespänning. Endast driftkoppling enligt angiven märkning efterfrågas.</a:t>
+              <a:t>Förutsättningar: Nätet ger 400 V mellan faserna. Frågan gäller bara vilken koppling motorn ska ha i drift.</a:t>
             </a:r>
           </a:p>
         </p:txBody>
@@ -12345,7 +12609,29 @@
                 <a:ea typeface="Calibri"/>
                 <a:cs typeface="Calibri"/>
               </a:rPr>
-              <a:t>Paxel är mekanisk uteffekt. Pᵢₙ är elektrisk aktiv inmatning. η och PF är dimensionslösa.</a:t>
+              <a:t>Paxel är effekten på axeln och P</a:t>
+            </a:r>
+            <a:r>
+              <a:rPr sz="2100" b="0" baseline="-25000">
+                <a:solidFill>
+                  <a:srgbClr val="111111"/>
+                </a:solidFill>
+                <a:latin typeface="Calibri"/>
+                <a:ea typeface="Calibri"/>
+                <a:cs typeface="Calibri"/>
+              </a:rPr>
+              <a:t>in</a:t>
+            </a:r>
+            <a:r>
+              <a:rPr sz="2100" b="0">
+                <a:solidFill>
+                  <a:srgbClr val="111111"/>
+                </a:solidFill>
+                <a:latin typeface="Calibri"/>
+                <a:ea typeface="Calibri"/>
+                <a:cs typeface="Calibri"/>
+              </a:rPr>
+              <a:t> den tillförda elektriska effekten. η och PF saknar enhet.</a:t>
             </a:r>
           </a:p>
         </p:txBody>
@@ -12481,7 +12767,29 @@
                 <a:ea typeface="Calibri"/>
                 <a:cs typeface="Calibri"/>
               </a:rPr>
-              <a:t>Arbetsgång: Räkna inmatningen först. Omvandla kW till W innan du beräknar linjeströmmen.</a:t>
+              <a:t>Arbetsgång: Räkna först P</a:t>
+            </a:r>
+            <a:r>
+              <a:rPr sz="2025" b="0" baseline="-25000">
+                <a:solidFill>
+                  <a:srgbClr val="111111"/>
+                </a:solidFill>
+                <a:latin typeface="Calibri"/>
+                <a:ea typeface="Calibri"/>
+                <a:cs typeface="Calibri"/>
+              </a:rPr>
+              <a:t>in</a:t>
+            </a:r>
+            <a:r>
+              <a:rPr sz="2025" b="0">
+                <a:solidFill>
+                  <a:srgbClr val="111111"/>
+                </a:solidFill>
+                <a:latin typeface="Calibri"/>
+                <a:ea typeface="Calibri"/>
+                <a:cs typeface="Calibri"/>
+              </a:rPr>
+              <a:t> och gör om kW till W innan du räknar linjeströmmen.</a:t>
             </a:r>
           </a:p>
         </p:txBody>
@@ -13272,7 +13580,7 @@
                 <a:ea typeface="Calibri"/>
                 <a:cs typeface="Calibri"/>
               </a:rPr>
-              <a:t>Paxel = 5,5 kW, η = 0,88, PF = 0,80 och U</a:t>
+              <a:t>En motor ger Paxel = 5,5 kW med η = 0,88 och PF = 0,80 vid U</a:t>
             </a:r>
             <a:r>
               <a:rPr sz="2400" b="0" baseline="-25000">
@@ -13294,7 +13602,7 @@
                 <a:ea typeface="Calibri"/>
                 <a:cs typeface="Calibri"/>
               </a:rPr>
-              <a:t> = 400 V. Bestäm elektrisk inmatning och linjeström.</a:t>
+              <a:t> = 400 V. Bestäm den tillförda elektriska effekten och linjeströmmen.</a:t>
             </a:r>
           </a:p>
         </p:txBody>
@@ -13651,7 +13959,51 @@
                 <a:ea typeface="Calibri"/>
                 <a:cs typeface="Calibri"/>
               </a:rPr>
-              <a:t>S är total trefas-märkeffekt i VA. U₂ är sekundär linjespänning i V och I₂ sekundär linjeström.</a:t>
+              <a:t>S är transformatorns märkeffekt i VA. U</a:t>
+            </a:r>
+            <a:r>
+              <a:rPr sz="2100" b="0" baseline="-25000">
+                <a:solidFill>
+                  <a:srgbClr val="111111"/>
+                </a:solidFill>
+                <a:latin typeface="Calibri"/>
+                <a:ea typeface="Calibri"/>
+                <a:cs typeface="Calibri"/>
+              </a:rPr>
+              <a:t>2</a:t>
+            </a:r>
+            <a:r>
+              <a:rPr sz="2100" b="0">
+                <a:solidFill>
+                  <a:srgbClr val="111111"/>
+                </a:solidFill>
+                <a:latin typeface="Calibri"/>
+                <a:ea typeface="Calibri"/>
+                <a:cs typeface="Calibri"/>
+              </a:rPr>
+              <a:t> och I</a:t>
+            </a:r>
+            <a:r>
+              <a:rPr sz="2100" b="0" baseline="-25000">
+                <a:solidFill>
+                  <a:srgbClr val="111111"/>
+                </a:solidFill>
+                <a:latin typeface="Calibri"/>
+                <a:ea typeface="Calibri"/>
+                <a:cs typeface="Calibri"/>
+              </a:rPr>
+              <a:t>2</a:t>
+            </a:r>
+            <a:r>
+              <a:rPr sz="2100" b="0">
+                <a:solidFill>
+                  <a:srgbClr val="111111"/>
+                </a:solidFill>
+                <a:latin typeface="Calibri"/>
+                <a:ea typeface="Calibri"/>
+                <a:cs typeface="Calibri"/>
+              </a:rPr>
+              <a:t> är linjespänning och linjeström på sekundärsidan.</a:t>
             </a:r>
           </a:p>
         </p:txBody>
@@ -13765,7 +14117,7 @@
                 <a:ea typeface="Calibri"/>
                 <a:cs typeface="Calibri"/>
               </a:rPr>
-              <a:t>Arbetsgång: Använd 100 000 VA och sekundärsidans 400 V. Primärspänningen ska inte stå i denna nämnare.</a:t>
+              <a:t>Arbetsgång: Använd 100 000 VA och sekundärsidans 400 V – primärspänningen ska inte vara med här.</a:t>
             </a:r>
           </a:p>
         </p:txBody>
@@ -14042,7 +14394,7 @@
                 <a:ea typeface="Calibri"/>
                 <a:cs typeface="Calibri"/>
               </a:rPr>
-              <a:t>En ideal trefastransformator är märkt 100 kVA, 10 kV/400 V linjespänning. Bestäm sekundär linjeström vid märklast.</a:t>
+              <a:t>En ideal trefastransformator är märkt 100 kVA och 10 kV/400 V (linjespänningar). Bestäm linjeströmmen på sekundärsidan vid full last.</a:t>
             </a:r>
           </a:p>
         </p:txBody>
@@ -14456,7 +14808,7 @@
                 <a:ea typeface="Calibri"/>
                 <a:cs typeface="Calibri"/>
               </a:rPr>
-              <a:t>Förutsättningar: Uppmätta faseffekter 1,2, 1,5 och 0,9 kW. Ingen symmetri antas.</a:t>
+              <a:t>Förutsättningar: Uppmätt effekt per fas: 1,2, 1,5 och 0,9 kW. Lasten är inte symmetrisk.</a:t>
             </a:r>
           </a:p>
         </p:txBody>
@@ -14812,7 +15164,7 @@
                 <a:ea typeface="Calibri"/>
                 <a:cs typeface="Calibri"/>
               </a:rPr>
-              <a:t>En last har tre uppmätta aktiva faseffekter: 1,2, 1,5 och 0,9 kW. Bestäm total aktiv effekt. Varför bör en godtycklig fasström inte sättas i symmetriformeln?</a:t>
+              <a:t>Den aktiva effekten i de tre faserna har mätts till 1,2, 1,5 och 0,9 kW. Bestäm den totala aktiva effekten. Varför kan du inte bara ta en av fasströmmarna och sätta in i formeln för symmetrisk last?</a:t>
             </a:r>
           </a:p>
         </p:txBody>

--- a/sjoskolan/vecka-41/aktuell/v41_02_Y_och_trefaseffekt_elev.pptx
+++ b/sjoskolan/vecka-41/aktuell/v41_02_Y_och_trefaseffekt_elev.pptx
@@ -18138,7 +18138,7 @@
                 <a:ea typeface="Calibri"/>
                 <a:cs typeface="Calibri"/>
               </a:rPr>
-              <a:t>Y: Ugren = U</a:t>
+              <a:t>Y: U</a:t>
             </a:r>
             <a:r>
               <a:rPr sz="2400" b="1" baseline="-25000">
@@ -18149,6 +18149,28 @@
                 <a:ea typeface="Calibri"/>
                 <a:cs typeface="Calibri"/>
               </a:rPr>
+              <a:t>gren</a:t>
+            </a:r>
+            <a:r>
+              <a:rPr sz="2400" b="1">
+                <a:solidFill>
+                  <a:srgbClr val="064F91"/>
+                </a:solidFill>
+                <a:latin typeface="Calibri"/>
+                <a:ea typeface="Calibri"/>
+                <a:cs typeface="Calibri"/>
+              </a:rPr>
+              <a:t> = U</a:t>
+            </a:r>
+            <a:r>
+              <a:rPr sz="2400" b="1" baseline="-25000">
+                <a:solidFill>
+                  <a:srgbClr val="064F91"/>
+                </a:solidFill>
+                <a:latin typeface="Calibri"/>
+                <a:ea typeface="Calibri"/>
+                <a:cs typeface="Calibri"/>
+              </a:rPr>
               <a:t>L</a:t>
             </a:r>
             <a:r>
@@ -18160,7 +18182,29 @@
                 <a:ea typeface="Calibri"/>
                 <a:cs typeface="Calibri"/>
               </a:rPr>
-              <a:t>/√3     Δ: Ugren = U</a:t>
+              <a:t>/√3     Δ: U</a:t>
+            </a:r>
+            <a:r>
+              <a:rPr sz="2400" b="1" baseline="-25000">
+                <a:solidFill>
+                  <a:srgbClr val="064F91"/>
+                </a:solidFill>
+                <a:latin typeface="Calibri"/>
+                <a:ea typeface="Calibri"/>
+                <a:cs typeface="Calibri"/>
+              </a:rPr>
+              <a:t>gren</a:t>
+            </a:r>
+            <a:r>
+              <a:rPr sz="2400" b="1">
+                <a:solidFill>
+                  <a:srgbClr val="064F91"/>
+                </a:solidFill>
+                <a:latin typeface="Calibri"/>
+                <a:ea typeface="Calibri"/>
+                <a:cs typeface="Calibri"/>
+              </a:rPr>
+              <a:t> = U</a:t>
             </a:r>
             <a:r>
               <a:rPr sz="2400" b="1" baseline="-25000">
@@ -18577,7 +18621,7 @@
                 <a:ea typeface="Calibri"/>
                 <a:cs typeface="Calibri"/>
               </a:rPr>
-              <a:t> = Igren     Δ: I</a:t>
+              <a:t> = I</a:t>
             </a:r>
             <a:r>
               <a:rPr sz="2650" b="1" baseline="-25000">
@@ -18588,6 +18632,28 @@
                 <a:ea typeface="Calibri"/>
                 <a:cs typeface="Calibri"/>
               </a:rPr>
+              <a:t>gren</a:t>
+            </a:r>
+            <a:r>
+              <a:rPr sz="2650" b="1">
+                <a:solidFill>
+                  <a:srgbClr val="064F91"/>
+                </a:solidFill>
+                <a:latin typeface="Calibri"/>
+                <a:ea typeface="Calibri"/>
+                <a:cs typeface="Calibri"/>
+              </a:rPr>
+              <a:t>     Δ: I</a:t>
+            </a:r>
+            <a:r>
+              <a:rPr sz="2650" b="1" baseline="-25000">
+                <a:solidFill>
+                  <a:srgbClr val="064F91"/>
+                </a:solidFill>
+                <a:latin typeface="Calibri"/>
+                <a:ea typeface="Calibri"/>
+                <a:cs typeface="Calibri"/>
+              </a:rPr>
               <a:t>L</a:t>
             </a:r>
             <a:r>
@@ -18599,7 +18665,18 @@
                 <a:ea typeface="Calibri"/>
                 <a:cs typeface="Calibri"/>
               </a:rPr>
-              <a:t> = √3 · Igren</a:t>
+              <a:t> = √3 · I</a:t>
+            </a:r>
+            <a:r>
+              <a:rPr sz="2650" b="1" baseline="-25000">
+                <a:solidFill>
+                  <a:srgbClr val="064F91"/>
+                </a:solidFill>
+                <a:latin typeface="Calibri"/>
+                <a:ea typeface="Calibri"/>
+                <a:cs typeface="Calibri"/>
+              </a:rPr>
+              <a:t>gren</a:t>
             </a:r>
           </a:p>
         </p:txBody>
@@ -18681,7 +18758,29 @@
                 <a:ea typeface="Calibri"/>
                 <a:cs typeface="Calibri"/>
               </a:rPr>
-              <a:t>Igren = 8,0 A och I</a:t>
+              <a:t>I</a:t>
+            </a:r>
+            <a:r>
+              <a:rPr sz="2100" b="0" baseline="-25000">
+                <a:solidFill>
+                  <a:srgbClr val="111111"/>
+                </a:solidFill>
+                <a:latin typeface="Calibri"/>
+                <a:ea typeface="Calibri"/>
+                <a:cs typeface="Calibri"/>
+              </a:rPr>
+              <a:t>gren</a:t>
+            </a:r>
+            <a:r>
+              <a:rPr sz="2100" b="0">
+                <a:solidFill>
+                  <a:srgbClr val="111111"/>
+                </a:solidFill>
+                <a:latin typeface="Calibri"/>
+                <a:ea typeface="Calibri"/>
+                <a:cs typeface="Calibri"/>
+              </a:rPr>
+              <a:t> = 8,0 A och I</a:t>
             </a:r>
             <a:r>
               <a:rPr sz="2100" b="0" baseline="-25000">
@@ -19642,7 +19741,29 @@
                 <a:ea typeface="Calibri"/>
                 <a:cs typeface="Calibri"/>
               </a:rPr>
-              <a:t>1. Y: Ugren = 200/√3 ≈ 115,5 V. I</a:t>
+              <a:t>1. Y: U</a:t>
+            </a:r>
+            <a:r>
+              <a:rPr sz="2063" b="0" baseline="-25000">
+                <a:solidFill>
+                  <a:srgbClr val="111111"/>
+                </a:solidFill>
+                <a:latin typeface="Calibri"/>
+                <a:ea typeface="Calibri"/>
+                <a:cs typeface="Calibri"/>
+              </a:rPr>
+              <a:t>gren</a:t>
+            </a:r>
+            <a:r>
+              <a:rPr sz="2063" b="0">
+                <a:solidFill>
+                  <a:srgbClr val="111111"/>
+                </a:solidFill>
+                <a:latin typeface="Calibri"/>
+                <a:ea typeface="Calibri"/>
+                <a:cs typeface="Calibri"/>
+              </a:rPr>
+              <a:t> = 200/√3 ≈ 115,5 V. I</a:t>
             </a:r>
             <a:r>
               <a:rPr sz="2063" b="0" baseline="-25000">
@@ -19687,7 +19808,51 @@
                 <a:ea typeface="Calibri"/>
                 <a:cs typeface="Calibri"/>
               </a:rPr>
-              <a:t>2. Δ: Ugren = 200 V. Igren = 200/16 = 12,5 A.</a:t>
+              <a:t>2. Δ: U</a:t>
+            </a:r>
+            <a:r>
+              <a:rPr sz="2063" b="0" baseline="-25000">
+                <a:solidFill>
+                  <a:srgbClr val="111111"/>
+                </a:solidFill>
+                <a:latin typeface="Calibri"/>
+                <a:ea typeface="Calibri"/>
+                <a:cs typeface="Calibri"/>
+              </a:rPr>
+              <a:t>gren</a:t>
+            </a:r>
+            <a:r>
+              <a:rPr sz="2063" b="0">
+                <a:solidFill>
+                  <a:srgbClr val="111111"/>
+                </a:solidFill>
+                <a:latin typeface="Calibri"/>
+                <a:ea typeface="Calibri"/>
+                <a:cs typeface="Calibri"/>
+              </a:rPr>
+              <a:t> = 200 V. I</a:t>
+            </a:r>
+            <a:r>
+              <a:rPr sz="2063" b="0" baseline="-25000">
+                <a:solidFill>
+                  <a:srgbClr val="111111"/>
+                </a:solidFill>
+                <a:latin typeface="Calibri"/>
+                <a:ea typeface="Calibri"/>
+                <a:cs typeface="Calibri"/>
+              </a:rPr>
+              <a:t>gren</a:t>
+            </a:r>
+            <a:r>
+              <a:rPr sz="2063" b="0">
+                <a:solidFill>
+                  <a:srgbClr val="111111"/>
+                </a:solidFill>
+                <a:latin typeface="Calibri"/>
+                <a:ea typeface="Calibri"/>
+                <a:cs typeface="Calibri"/>
+              </a:rPr>
+              <a:t> = 200/16 = 12,5 A.</a:t>
             </a:r>
           </a:p>
           <a:p xmlns:a="http://schemas.openxmlformats.org/drawingml/2006/main">

--- a/sjoskolan/vecka-41/aktuell/v41_02_Y_och_trefaseffekt_elev.pptx
+++ b/sjoskolan/vecka-41/aktuell/v41_02_Y_och_trefaseffekt_elev.pptx
@@ -19516,7 +19516,7 @@
                 <a:ea typeface="Calibri"/>
                 <a:cs typeface="Calibri"/>
               </a:rPr>
-              <a:t>Tre resistorer på 16 Ω ansluts till symmetriska 200 V mellan faserna.</a:t>
+              <a:t>Tre resistorer på 20 Ω ansluts till fartygets symmetriska 440 V mellan faserna.</a:t>
             </a:r>
           </a:p>
         </p:txBody>
@@ -19763,7 +19763,7 @@
                 <a:ea typeface="Calibri"/>
                 <a:cs typeface="Calibri"/>
               </a:rPr>
-              <a:t> = 200/√3 ≈ 115,5 V. I</a:t>
+              <a:t> = 440/√3 ≈ 254 V. I</a:t>
             </a:r>
             <a:r>
               <a:rPr sz="2063" b="0" baseline="-25000">
@@ -19785,7 +19785,7 @@
                 <a:ea typeface="Calibri"/>
                 <a:cs typeface="Calibri"/>
               </a:rPr>
-              <a:t> ≈ 115,5/16 ≈ 7,22 A.</a:t>
+              <a:t> ≈ 254/20 = 12,7 A.</a:t>
             </a:r>
           </a:p>
           <a:p xmlns:a="http://schemas.openxmlformats.org/drawingml/2006/main">
@@ -19830,7 +19830,7 @@
                 <a:ea typeface="Calibri"/>
                 <a:cs typeface="Calibri"/>
               </a:rPr>
-              <a:t> = 200 V. I</a:t>
+              <a:t> = 440 V. I</a:t>
             </a:r>
             <a:r>
               <a:rPr sz="2063" b="0" baseline="-25000">
@@ -19852,7 +19852,7 @@
                 <a:ea typeface="Calibri"/>
                 <a:cs typeface="Calibri"/>
               </a:rPr>
-              <a:t> = 200/16 = 12,5 A.</a:t>
+              <a:t> = 440/20 = 22 A.</a:t>
             </a:r>
           </a:p>
           <a:p xmlns:a="http://schemas.openxmlformats.org/drawingml/2006/main">
@@ -19897,7 +19897,7 @@
                 <a:ea typeface="Calibri"/>
                 <a:cs typeface="Calibri"/>
               </a:rPr>
-              <a:t> = √3 · 12,5 ≈ 21,65 A.</a:t>
+              <a:t> = √3 · 22 ≈ 38,1 A.</a:t>
             </a:r>
           </a:p>
         </p:txBody>

--- a/sjoskolan/vecka-41/aktuell/v41_02_Y_och_trefaseffekt_elev.pptx
+++ b/sjoskolan/vecka-41/aktuell/v41_02_Y_och_trefaseffekt_elev.pptx
@@ -8014,7 +8014,7 @@
                 <a:ea typeface="Calibri"/>
                 <a:cs typeface="Calibri"/>
               </a:rPr>
-              <a:t>Samma last som i uppgift 4 är induktiv och sinusformad. Beräkna S och Q.</a:t>
+              <a:t>Samma last som i föregående övning är induktiv och sinusformad. Beräkna S och Q.</a:t>
             </a:r>
           </a:p>
         </p:txBody>

--- a/sjoskolan/vecka-41/aktuell/v41_02_Y_och_trefaseffekt_elev.pptx
+++ b/sjoskolan/vecka-41/aktuell/v41_02_Y_och_trefaseffekt_elev.pptx
@@ -3789,7 +3789,7 @@
                 <a:ea typeface="Calibri"/>
                 <a:cs typeface="Calibri"/>
               </a:rPr>
-              <a:t>Stöd till övning 1</a:t>
+              <a:t>Stöd till övning 2.1</a:t>
             </a:r>
           </a:p>
         </p:txBody>
@@ -4288,7 +4288,7 @@
                 <a:ea typeface="Calibri"/>
                 <a:cs typeface="Calibri"/>
               </a:rPr>
-              <a:t>Övning 1</a:t>
+              <a:t>Övning 2.1</a:t>
             </a:r>
           </a:p>
         </p:txBody>
@@ -4647,7 +4647,7 @@
                 <a:ea typeface="Calibri"/>
                 <a:cs typeface="Calibri"/>
               </a:rPr>
-              <a:t>Stöd till övning 2</a:t>
+              <a:t>Stöd till övning 2.2</a:t>
             </a:r>
           </a:p>
         </p:txBody>
@@ -5201,7 +5201,7 @@
                 <a:ea typeface="Calibri"/>
                 <a:cs typeface="Calibri"/>
               </a:rPr>
-              <a:t>Övning 2</a:t>
+              <a:t>Övning 2.2</a:t>
             </a:r>
           </a:p>
         </p:txBody>
@@ -5560,7 +5560,7 @@
                 <a:ea typeface="Calibri"/>
                 <a:cs typeface="Calibri"/>
               </a:rPr>
-              <a:t>Stöd till övning 3</a:t>
+              <a:t>Stöd till övning 2.3</a:t>
             </a:r>
           </a:p>
         </p:txBody>
@@ -6115,7 +6115,7 @@
                 <a:ea typeface="Calibri"/>
                 <a:cs typeface="Calibri"/>
               </a:rPr>
-              <a:t>Övning 3</a:t>
+              <a:t>Övning 2.3</a:t>
             </a:r>
           </a:p>
         </p:txBody>
@@ -6474,7 +6474,7 @@
                 <a:ea typeface="Calibri"/>
                 <a:cs typeface="Calibri"/>
               </a:rPr>
-              <a:t>Stöd till övning 4</a:t>
+              <a:t>Stöd till övning 2.4</a:t>
             </a:r>
           </a:p>
         </p:txBody>
@@ -6995,7 +6995,7 @@
                 <a:ea typeface="Calibri"/>
                 <a:cs typeface="Calibri"/>
               </a:rPr>
-              <a:t>Övning 4</a:t>
+              <a:t>Övning 2.4</a:t>
             </a:r>
           </a:p>
         </p:txBody>
@@ -7398,7 +7398,7 @@
                 <a:ea typeface="Calibri"/>
                 <a:cs typeface="Calibri"/>
               </a:rPr>
-              <a:t>Stöd till övning 5</a:t>
+              <a:t>Stöd till övning 2.5</a:t>
             </a:r>
           </a:p>
         </p:txBody>
@@ -7898,7 +7898,7 @@
                 <a:ea typeface="Calibri"/>
                 <a:cs typeface="Calibri"/>
               </a:rPr>
-              <a:t>Övning 5</a:t>
+              <a:t>Övning 2.5</a:t>
             </a:r>
           </a:p>
         </p:txBody>
@@ -10833,7 +10833,7 @@
                 <a:ea typeface="Calibri"/>
                 <a:cs typeface="Calibri"/>
               </a:rPr>
-              <a:t>Stöd till övning 6</a:t>
+              <a:t>Stöd till övning 2.6</a:t>
             </a:r>
           </a:p>
         </p:txBody>
@@ -11299,7 +11299,7 @@
                 <a:ea typeface="Calibri"/>
                 <a:cs typeface="Calibri"/>
               </a:rPr>
-              <a:t>Övning 6</a:t>
+              <a:t>Övning 2.6</a:t>
             </a:r>
           </a:p>
         </p:txBody>
@@ -11658,7 +11658,7 @@
                 <a:ea typeface="Calibri"/>
                 <a:cs typeface="Calibri"/>
               </a:rPr>
-              <a:t>Stöd till övning 7</a:t>
+              <a:t>Stöd till övning 2.7</a:t>
             </a:r>
           </a:p>
         </p:txBody>
@@ -12069,7 +12069,7 @@
                 <a:ea typeface="Calibri"/>
                 <a:cs typeface="Calibri"/>
               </a:rPr>
-              <a:t>Övning 7</a:t>
+              <a:t>Övning 2.7</a:t>
             </a:r>
           </a:p>
         </p:txBody>
@@ -12428,7 +12428,7 @@
                 <a:ea typeface="Calibri"/>
                 <a:cs typeface="Calibri"/>
               </a:rPr>
-              <a:t>Stöd till övning 8</a:t>
+              <a:t>Stöd till övning 2.8</a:t>
             </a:r>
           </a:p>
         </p:txBody>
@@ -13464,7 +13464,7 @@
                 <a:ea typeface="Calibri"/>
                 <a:cs typeface="Calibri"/>
               </a:rPr>
-              <a:t>Övning 8</a:t>
+              <a:t>Övning 2.8</a:t>
             </a:r>
           </a:p>
         </p:txBody>
@@ -13845,7 +13845,7 @@
                 <a:ea typeface="Calibri"/>
                 <a:cs typeface="Calibri"/>
               </a:rPr>
-              <a:t>Stöd till övning 9</a:t>
+              <a:t>Stöd till övning 2.9</a:t>
             </a:r>
           </a:p>
         </p:txBody>
@@ -14278,7 +14278,7 @@
                 <a:ea typeface="Calibri"/>
                 <a:cs typeface="Calibri"/>
               </a:rPr>
-              <a:t>Övning 9</a:t>
+              <a:t>Övning 2.9</a:t>
             </a:r>
           </a:p>
         </p:txBody>
@@ -14637,7 +14637,7 @@
                 <a:ea typeface="Calibri"/>
                 <a:cs typeface="Calibri"/>
               </a:rPr>
-              <a:t>Stöd till övning 10</a:t>
+              <a:t>Stöd till övning 2.10</a:t>
             </a:r>
           </a:p>
         </p:txBody>
@@ -15048,7 +15048,7 @@
                 <a:ea typeface="Calibri"/>
                 <a:cs typeface="Calibri"/>
               </a:rPr>
-              <a:t>Övning 10</a:t>
+              <a:t>Övning 2.10</a:t>
             </a:r>
           </a:p>
         </p:txBody>

--- a/sjoskolan/vecka-41/aktuell/v41_02_Y_och_trefaseffekt_elev.pptx
+++ b/sjoskolan/vecka-41/aktuell/v41_02_Y_och_trefaseffekt_elev.pptx
@@ -8816,7 +8816,7 @@
                 <a:ea typeface="Calibri"/>
                 <a:cs typeface="Calibri"/>
               </a:rPr>
-              <a:t>Teori och exempel följs av övning 6–10.</a:t>
+              <a:t>Teori och exempel följs av övning 2.6–2.10.</a:t>
             </a:r>
           </a:p>
           <a:p xmlns:a="http://schemas.openxmlformats.org/drawingml/2006/main">
@@ -13086,7 +13086,7 @@
                 <a:ea typeface="Calibri"/>
                 <a:cs typeface="Calibri"/>
               </a:rPr>
-              <a:t>15 min övning 1, 2, 4, 5 min återkoppling</a:t>
+              <a:t>15 min övning 2.1, 2.2 och 2.4, 5 min återkoppling</a:t>
             </a:r>
           </a:p>
         </p:txBody>
@@ -13200,7 +13200,7 @@
                 <a:ea typeface="Calibri"/>
                 <a:cs typeface="Calibri"/>
               </a:rPr>
-              <a:t>20 min teori och exempel, 15 min övning 6, 7, 8</a:t>
+              <a:t>20 min teori och exempel, 15 min övning 2.6, 2.7 och 2.8</a:t>
             </a:r>
           </a:p>
           <a:p xmlns:a="http://schemas.openxmlformats.org/drawingml/2006/main">
@@ -17109,984 +17109,6 @@
       </p:sp>
       <p:sp>
         <p:nvSpPr>
-          <p:cNvPr id="4" name="">
-            <a:extLst xmlns:a="http://schemas.openxmlformats.org/drawingml/2006/main">
-              <a:ext uri="{FF2B5EF4-FFF2-40B4-BE49-F238E27FC236}">
-                <a16:creationId xmlns:a16="http://schemas.microsoft.com/office/drawing/2014/main" id="{BDA2D3FC-C562-4BEC-A75C-C9B3DA43017B}"/>
-              </a:ext>
-            </a:extLst>
-          </p:cNvPr>
-          <p:cNvSpPr>
-            <a:spLocks xmlns:a="http://schemas.openxmlformats.org/drawingml/2006/main" noGrp="1"/>
-          </p:cNvSpPr>
-          <p:nvPr/>
-        </p:nvSpPr>
-        <p:spPr>
-          <a:xfrm xmlns:a="http://schemas.openxmlformats.org/drawingml/2006/main" flipH="0" flipV="0">
-            <a:off x="2753320" y="2866628"/>
-            <a:ext cx="774105" cy="606227"/>
-          </a:xfrm>
-          <a:prstGeom xmlns:a="http://schemas.openxmlformats.org/drawingml/2006/main" prst="line">
-            <a:avLst/>
-          </a:prstGeom>
-          <a:noFill xmlns:a="http://schemas.openxmlformats.org/drawingml/2006/main"/>
-          <a:ln xmlns:a="http://schemas.openxmlformats.org/drawingml/2006/main" w="20955">
-            <a:solidFill>
-              <a:srgbClr val="111111"/>
-            </a:solidFill>
-          </a:ln>
-        </p:spPr>
-        <p:txBody xmlns:a="http://schemas.openxmlformats.org/drawingml/2006/main">
-          <a:bodyPr/>
-          <a:p/>
-        </p:txBody>
-      </p:sp>
-      <p:sp>
-        <p:nvSpPr>
-          <p:cNvPr id="5" name="">
-            <a:extLst xmlns:a="http://schemas.openxmlformats.org/drawingml/2006/main">
-              <a:ext uri="{FF2B5EF4-FFF2-40B4-BE49-F238E27FC236}">
-                <a16:creationId xmlns:a16="http://schemas.microsoft.com/office/drawing/2014/main" id="{D4DCF442-36AC-46A2-85CE-7418A36FD260}"/>
-              </a:ext>
-            </a:extLst>
-          </p:cNvPr>
-          <p:cNvSpPr>
-            <a:spLocks xmlns:a="http://schemas.openxmlformats.org/drawingml/2006/main" noGrp="1"/>
-          </p:cNvSpPr>
-          <p:nvPr/>
-        </p:nvSpPr>
-        <p:spPr>
-          <a:xfrm xmlns:a="http://schemas.openxmlformats.org/drawingml/2006/main">
-            <a:off x="2716014" y="2829322"/>
-            <a:ext cx="74613" cy="74613"/>
-          </a:xfrm>
-          <a:prstGeom xmlns:a="http://schemas.openxmlformats.org/drawingml/2006/main" prst="ellipse">
-            <a:avLst/>
-          </a:prstGeom>
-          <a:solidFill xmlns:a="http://schemas.openxmlformats.org/drawingml/2006/main">
-            <a:srgbClr val="111111"/>
-          </a:solidFill>
-          <a:ln xmlns:a="http://schemas.openxmlformats.org/drawingml/2006/main" w="0">
-            <a:solidFill>
-              <a:srgbClr val="111111"/>
-            </a:solidFill>
-          </a:ln>
-        </p:spPr>
-        <p:txBody xmlns:a="http://schemas.openxmlformats.org/drawingml/2006/main">
-          <a:bodyPr/>
-          <a:p/>
-        </p:txBody>
-      </p:sp>
-      <p:sp>
-        <p:nvSpPr>
-          <p:cNvPr id="6" name="L1">
-            <a:extLst xmlns:a="http://schemas.openxmlformats.org/drawingml/2006/main">
-              <a:ext uri="{FF2B5EF4-FFF2-40B4-BE49-F238E27FC236}">
-                <a16:creationId xmlns:a16="http://schemas.microsoft.com/office/drawing/2014/main" id="{21A155B0-0CAA-47D6-81CA-29E48264A33D}"/>
-              </a:ext>
-            </a:extLst>
-          </p:cNvPr>
-          <p:cNvSpPr>
-            <a:spLocks xmlns:a="http://schemas.openxmlformats.org/drawingml/2006/main" noGrp="1"/>
-          </p:cNvSpPr>
-          <p:nvPr/>
-        </p:nvSpPr>
-        <p:spPr>
-          <a:xfrm xmlns:a="http://schemas.openxmlformats.org/drawingml/2006/main">
-            <a:off x="2520156" y="2549525"/>
-            <a:ext cx="466328" cy="335756"/>
-          </a:xfrm>
-          <a:prstGeom xmlns:a="http://schemas.openxmlformats.org/drawingml/2006/main" prst="rect">
-            <a:avLst/>
-          </a:prstGeom>
-          <a:noFill xmlns:a="http://schemas.openxmlformats.org/drawingml/2006/main"/>
-          <a:ln xmlns:a="http://schemas.openxmlformats.org/drawingml/2006/main" w="0">
-            <a:noFill/>
-          </a:ln>
-        </p:spPr>
-        <p:txBody>
-          <a:bodyPr xmlns:a="http://schemas.openxmlformats.org/drawingml/2006/main" wrap="square" lIns="0" tIns="0" rIns="0" bIns="0" anchor="t">
-            <a:noAutofit/>
-          </a:bodyPr>
-          <a:lstStyle xmlns:a="http://schemas.openxmlformats.org/drawingml/2006/main"/>
-          <a:p xmlns:a="http://schemas.openxmlformats.org/drawingml/2006/main">
-            <a:pPr algn="ctr">
-              <a:buNone/>
-              <a:defRPr sz="1542" b="0">
-                <a:solidFill>
-                  <a:srgbClr val="111111"/>
-                </a:solidFill>
-                <a:latin typeface="Calibri"/>
-                <a:ea typeface="Calibri"/>
-                <a:cs typeface="Calibri"/>
-              </a:defRPr>
-            </a:pPr>
-            <a:r>
-              <a:rPr sz="1542" b="0">
-                <a:solidFill>
-                  <a:srgbClr val="111111"/>
-                </a:solidFill>
-                <a:latin typeface="Calibri"/>
-                <a:ea typeface="Calibri"/>
-                <a:cs typeface="Calibri"/>
-              </a:rPr>
-              <a:t>L1</a:t>
-            </a:r>
-          </a:p>
-        </p:txBody>
-      </p:sp>
-      <p:sp>
-        <p:nvSpPr>
-          <p:cNvPr id="7" name="">
-            <a:extLst xmlns:a="http://schemas.openxmlformats.org/drawingml/2006/main">
-              <a:ext uri="{FF2B5EF4-FFF2-40B4-BE49-F238E27FC236}">
-                <a16:creationId xmlns:a16="http://schemas.microsoft.com/office/drawing/2014/main" id="{22D46265-190F-4CE3-B5F2-9B046E99FE1B}"/>
-              </a:ext>
-            </a:extLst>
-          </p:cNvPr>
-          <p:cNvSpPr>
-            <a:spLocks xmlns:a="http://schemas.openxmlformats.org/drawingml/2006/main" noGrp="1"/>
-          </p:cNvSpPr>
-          <p:nvPr/>
-        </p:nvSpPr>
-        <p:spPr>
-          <a:xfrm xmlns:a="http://schemas.openxmlformats.org/drawingml/2006/main" flipH="1" flipV="0">
-            <a:off x="3527425" y="2866628"/>
-            <a:ext cx="764778" cy="606227"/>
-          </a:xfrm>
-          <a:prstGeom xmlns:a="http://schemas.openxmlformats.org/drawingml/2006/main" prst="line">
-            <a:avLst/>
-          </a:prstGeom>
-          <a:noFill xmlns:a="http://schemas.openxmlformats.org/drawingml/2006/main"/>
-          <a:ln xmlns:a="http://schemas.openxmlformats.org/drawingml/2006/main" w="20955">
-            <a:solidFill>
-              <a:srgbClr val="111111"/>
-            </a:solidFill>
-          </a:ln>
-        </p:spPr>
-        <p:txBody xmlns:a="http://schemas.openxmlformats.org/drawingml/2006/main">
-          <a:bodyPr/>
-          <a:p/>
-        </p:txBody>
-      </p:sp>
-      <p:sp>
-        <p:nvSpPr>
-          <p:cNvPr id="8" name="">
-            <a:extLst xmlns:a="http://schemas.openxmlformats.org/drawingml/2006/main">
-              <a:ext uri="{FF2B5EF4-FFF2-40B4-BE49-F238E27FC236}">
-                <a16:creationId xmlns:a16="http://schemas.microsoft.com/office/drawing/2014/main" id="{D1B2C0E3-4B32-4516-9C3A-C5EEDBD5F0BA}"/>
-              </a:ext>
-            </a:extLst>
-          </p:cNvPr>
-          <p:cNvSpPr>
-            <a:spLocks xmlns:a="http://schemas.openxmlformats.org/drawingml/2006/main" noGrp="1"/>
-          </p:cNvSpPr>
-          <p:nvPr/>
-        </p:nvSpPr>
-        <p:spPr>
-          <a:xfrm xmlns:a="http://schemas.openxmlformats.org/drawingml/2006/main">
-            <a:off x="4254897" y="2829322"/>
-            <a:ext cx="74613" cy="74613"/>
-          </a:xfrm>
-          <a:prstGeom xmlns:a="http://schemas.openxmlformats.org/drawingml/2006/main" prst="ellipse">
-            <a:avLst/>
-          </a:prstGeom>
-          <a:solidFill xmlns:a="http://schemas.openxmlformats.org/drawingml/2006/main">
-            <a:srgbClr val="111111"/>
-          </a:solidFill>
-          <a:ln xmlns:a="http://schemas.openxmlformats.org/drawingml/2006/main" w="0">
-            <a:solidFill>
-              <a:srgbClr val="111111"/>
-            </a:solidFill>
-          </a:ln>
-        </p:spPr>
-        <p:txBody xmlns:a="http://schemas.openxmlformats.org/drawingml/2006/main">
-          <a:bodyPr/>
-          <a:p/>
-        </p:txBody>
-      </p:sp>
-      <p:sp>
-        <p:nvSpPr>
-          <p:cNvPr id="9" name="L2">
-            <a:extLst xmlns:a="http://schemas.openxmlformats.org/drawingml/2006/main">
-              <a:ext uri="{FF2B5EF4-FFF2-40B4-BE49-F238E27FC236}">
-                <a16:creationId xmlns:a16="http://schemas.microsoft.com/office/drawing/2014/main" id="{2B27D635-9198-41BF-91EE-0EB3CCC0DDA5}"/>
-              </a:ext>
-            </a:extLst>
-          </p:cNvPr>
-          <p:cNvSpPr>
-            <a:spLocks xmlns:a="http://schemas.openxmlformats.org/drawingml/2006/main" noGrp="1"/>
-          </p:cNvSpPr>
-          <p:nvPr/>
-        </p:nvSpPr>
-        <p:spPr>
-          <a:xfrm xmlns:a="http://schemas.openxmlformats.org/drawingml/2006/main">
-            <a:off x="4059039" y="2549525"/>
-            <a:ext cx="466328" cy="335756"/>
-          </a:xfrm>
-          <a:prstGeom xmlns:a="http://schemas.openxmlformats.org/drawingml/2006/main" prst="rect">
-            <a:avLst/>
-          </a:prstGeom>
-          <a:noFill xmlns:a="http://schemas.openxmlformats.org/drawingml/2006/main"/>
-          <a:ln xmlns:a="http://schemas.openxmlformats.org/drawingml/2006/main" w="0">
-            <a:noFill/>
-          </a:ln>
-        </p:spPr>
-        <p:txBody>
-          <a:bodyPr xmlns:a="http://schemas.openxmlformats.org/drawingml/2006/main" wrap="square" lIns="0" tIns="0" rIns="0" bIns="0" anchor="t">
-            <a:noAutofit/>
-          </a:bodyPr>
-          <a:lstStyle xmlns:a="http://schemas.openxmlformats.org/drawingml/2006/main"/>
-          <a:p xmlns:a="http://schemas.openxmlformats.org/drawingml/2006/main">
-            <a:pPr algn="ctr">
-              <a:buNone/>
-              <a:defRPr sz="1542" b="0">
-                <a:solidFill>
-                  <a:srgbClr val="111111"/>
-                </a:solidFill>
-                <a:latin typeface="Calibri"/>
-                <a:ea typeface="Calibri"/>
-                <a:cs typeface="Calibri"/>
-              </a:defRPr>
-            </a:pPr>
-            <a:r>
-              <a:rPr sz="1542" b="0">
-                <a:solidFill>
-                  <a:srgbClr val="111111"/>
-                </a:solidFill>
-                <a:latin typeface="Calibri"/>
-                <a:ea typeface="Calibri"/>
-                <a:cs typeface="Calibri"/>
-              </a:rPr>
-              <a:t>L2</a:t>
-            </a:r>
-          </a:p>
-        </p:txBody>
-      </p:sp>
-      <p:sp>
-        <p:nvSpPr>
-          <p:cNvPr id="10" name="">
-            <a:extLst xmlns:a="http://schemas.openxmlformats.org/drawingml/2006/main">
-              <a:ext uri="{FF2B5EF4-FFF2-40B4-BE49-F238E27FC236}">
-                <a16:creationId xmlns:a16="http://schemas.microsoft.com/office/drawing/2014/main" id="{82E43E64-E1E4-4288-9F76-F17AF9C4B963}"/>
-              </a:ext>
-            </a:extLst>
-          </p:cNvPr>
-          <p:cNvSpPr>
-            <a:spLocks xmlns:a="http://schemas.openxmlformats.org/drawingml/2006/main" noGrp="1"/>
-          </p:cNvSpPr>
-          <p:nvPr/>
-        </p:nvSpPr>
-        <p:spPr>
-          <a:xfrm xmlns:a="http://schemas.openxmlformats.org/drawingml/2006/main" flipH="0" flipV="1">
-            <a:off x="3527425" y="3472855"/>
-            <a:ext cx="0" cy="839391"/>
-          </a:xfrm>
-          <a:prstGeom xmlns:a="http://schemas.openxmlformats.org/drawingml/2006/main" prst="line">
-            <a:avLst/>
-          </a:prstGeom>
-          <a:noFill xmlns:a="http://schemas.openxmlformats.org/drawingml/2006/main"/>
-          <a:ln xmlns:a="http://schemas.openxmlformats.org/drawingml/2006/main" w="20955">
-            <a:solidFill>
-              <a:srgbClr val="111111"/>
-            </a:solidFill>
-          </a:ln>
-        </p:spPr>
-        <p:txBody xmlns:a="http://schemas.openxmlformats.org/drawingml/2006/main">
-          <a:bodyPr/>
-          <a:p/>
-        </p:txBody>
-      </p:sp>
-      <p:sp>
-        <p:nvSpPr>
-          <p:cNvPr id="11" name="">
-            <a:extLst xmlns:a="http://schemas.openxmlformats.org/drawingml/2006/main">
-              <a:ext uri="{FF2B5EF4-FFF2-40B4-BE49-F238E27FC236}">
-                <a16:creationId xmlns:a16="http://schemas.microsoft.com/office/drawing/2014/main" id="{EC7056E3-9989-427C-BAA4-FE68A721BA35}"/>
-              </a:ext>
-            </a:extLst>
-          </p:cNvPr>
-          <p:cNvSpPr>
-            <a:spLocks xmlns:a="http://schemas.openxmlformats.org/drawingml/2006/main" noGrp="1"/>
-          </p:cNvSpPr>
-          <p:nvPr/>
-        </p:nvSpPr>
-        <p:spPr>
-          <a:xfrm xmlns:a="http://schemas.openxmlformats.org/drawingml/2006/main">
-            <a:off x="3490119" y="4274939"/>
-            <a:ext cx="74613" cy="74613"/>
-          </a:xfrm>
-          <a:prstGeom xmlns:a="http://schemas.openxmlformats.org/drawingml/2006/main" prst="ellipse">
-            <a:avLst/>
-          </a:prstGeom>
-          <a:solidFill xmlns:a="http://schemas.openxmlformats.org/drawingml/2006/main">
-            <a:srgbClr val="111111"/>
-          </a:solidFill>
-          <a:ln xmlns:a="http://schemas.openxmlformats.org/drawingml/2006/main" w="0">
-            <a:solidFill>
-              <a:srgbClr val="111111"/>
-            </a:solidFill>
-          </a:ln>
-        </p:spPr>
-        <p:txBody xmlns:a="http://schemas.openxmlformats.org/drawingml/2006/main">
-          <a:bodyPr/>
-          <a:p/>
-        </p:txBody>
-      </p:sp>
-      <p:sp>
-        <p:nvSpPr>
-          <p:cNvPr id="12" name="L3">
-            <a:extLst xmlns:a="http://schemas.openxmlformats.org/drawingml/2006/main">
-              <a:ext uri="{FF2B5EF4-FFF2-40B4-BE49-F238E27FC236}">
-                <a16:creationId xmlns:a16="http://schemas.microsoft.com/office/drawing/2014/main" id="{2E6E774B-425E-4FC6-8B2E-0B41DC69DCE5}"/>
-              </a:ext>
-            </a:extLst>
-          </p:cNvPr>
-          <p:cNvSpPr>
-            <a:spLocks xmlns:a="http://schemas.openxmlformats.org/drawingml/2006/main" noGrp="1"/>
-          </p:cNvSpPr>
-          <p:nvPr/>
-        </p:nvSpPr>
-        <p:spPr>
-          <a:xfrm xmlns:a="http://schemas.openxmlformats.org/drawingml/2006/main">
-            <a:off x="3732609" y="4163020"/>
-            <a:ext cx="466328" cy="335756"/>
-          </a:xfrm>
-          <a:prstGeom xmlns:a="http://schemas.openxmlformats.org/drawingml/2006/main" prst="rect">
-            <a:avLst/>
-          </a:prstGeom>
-          <a:noFill xmlns:a="http://schemas.openxmlformats.org/drawingml/2006/main"/>
-          <a:ln xmlns:a="http://schemas.openxmlformats.org/drawingml/2006/main" w="0">
-            <a:noFill/>
-          </a:ln>
-        </p:spPr>
-        <p:txBody>
-          <a:bodyPr xmlns:a="http://schemas.openxmlformats.org/drawingml/2006/main" wrap="square" lIns="0" tIns="0" rIns="0" bIns="0" anchor="t">
-            <a:noAutofit/>
-          </a:bodyPr>
-          <a:lstStyle xmlns:a="http://schemas.openxmlformats.org/drawingml/2006/main"/>
-          <a:p xmlns:a="http://schemas.openxmlformats.org/drawingml/2006/main">
-            <a:pPr algn="ctr">
-              <a:buNone/>
-              <a:defRPr sz="1542" b="0">
-                <a:solidFill>
-                  <a:srgbClr val="111111"/>
-                </a:solidFill>
-                <a:latin typeface="Calibri"/>
-                <a:ea typeface="Calibri"/>
-                <a:cs typeface="Calibri"/>
-              </a:defRPr>
-            </a:pPr>
-            <a:r>
-              <a:rPr sz="1542" b="0">
-                <a:solidFill>
-                  <a:srgbClr val="111111"/>
-                </a:solidFill>
-                <a:latin typeface="Calibri"/>
-                <a:ea typeface="Calibri"/>
-                <a:cs typeface="Calibri"/>
-              </a:rPr>
-              <a:t>L3</a:t>
-            </a:r>
-          </a:p>
-        </p:txBody>
-      </p:sp>
-      <p:sp>
-        <p:nvSpPr>
-          <p:cNvPr id="13" name="">
-            <a:extLst xmlns:a="http://schemas.openxmlformats.org/drawingml/2006/main">
-              <a:ext uri="{FF2B5EF4-FFF2-40B4-BE49-F238E27FC236}">
-                <a16:creationId xmlns:a16="http://schemas.microsoft.com/office/drawing/2014/main" id="{8D7E381B-B19B-40E0-8B3C-4AE70117537B}"/>
-              </a:ext>
-            </a:extLst>
-          </p:cNvPr>
-          <p:cNvSpPr>
-            <a:spLocks xmlns:a="http://schemas.openxmlformats.org/drawingml/2006/main" noGrp="1"/>
-          </p:cNvSpPr>
-          <p:nvPr/>
-        </p:nvSpPr>
-        <p:spPr>
-          <a:xfrm xmlns:a="http://schemas.openxmlformats.org/drawingml/2006/main">
-            <a:off x="3490119" y="3435548"/>
-            <a:ext cx="74613" cy="74613"/>
-          </a:xfrm>
-          <a:prstGeom xmlns:a="http://schemas.openxmlformats.org/drawingml/2006/main" prst="ellipse">
-            <a:avLst/>
-          </a:prstGeom>
-          <a:solidFill xmlns:a="http://schemas.openxmlformats.org/drawingml/2006/main">
-            <a:srgbClr val="111111"/>
-          </a:solidFill>
-          <a:ln xmlns:a="http://schemas.openxmlformats.org/drawingml/2006/main" w="0">
-            <a:solidFill>
-              <a:srgbClr val="111111"/>
-            </a:solidFill>
-          </a:ln>
-        </p:spPr>
-        <p:txBody xmlns:a="http://schemas.openxmlformats.org/drawingml/2006/main">
-          <a:bodyPr/>
-          <a:p/>
-        </p:txBody>
-      </p:sp>
-      <p:sp>
-        <p:nvSpPr>
-          <p:cNvPr id="14" name="Y">
-            <a:extLst xmlns:a="http://schemas.openxmlformats.org/drawingml/2006/main">
-              <a:ext uri="{FF2B5EF4-FFF2-40B4-BE49-F238E27FC236}">
-                <a16:creationId xmlns:a16="http://schemas.microsoft.com/office/drawing/2014/main" id="{0F1C5C20-F171-4320-B4E8-02F296FA4283}"/>
-              </a:ext>
-            </a:extLst>
-          </p:cNvPr>
-          <p:cNvSpPr>
-            <a:spLocks xmlns:a="http://schemas.openxmlformats.org/drawingml/2006/main" noGrp="1"/>
-          </p:cNvSpPr>
-          <p:nvPr/>
-        </p:nvSpPr>
-        <p:spPr>
-          <a:xfrm xmlns:a="http://schemas.openxmlformats.org/drawingml/2006/main">
-            <a:off x="3173016" y="4452144"/>
-            <a:ext cx="746125" cy="335756"/>
-          </a:xfrm>
-          <a:prstGeom xmlns:a="http://schemas.openxmlformats.org/drawingml/2006/main" prst="rect">
-            <a:avLst/>
-          </a:prstGeom>
-          <a:noFill xmlns:a="http://schemas.openxmlformats.org/drawingml/2006/main"/>
-          <a:ln xmlns:a="http://schemas.openxmlformats.org/drawingml/2006/main" w="0">
-            <a:noFill/>
-          </a:ln>
-        </p:spPr>
-        <p:txBody>
-          <a:bodyPr xmlns:a="http://schemas.openxmlformats.org/drawingml/2006/main" wrap="square" lIns="0" tIns="0" rIns="0" bIns="0" anchor="t">
-            <a:noAutofit/>
-          </a:bodyPr>
-          <a:lstStyle xmlns:a="http://schemas.openxmlformats.org/drawingml/2006/main"/>
-          <a:p xmlns:a="http://schemas.openxmlformats.org/drawingml/2006/main">
-            <a:pPr algn="ctr">
-              <a:buNone/>
-              <a:defRPr sz="1763" b="0">
-                <a:solidFill>
-                  <a:srgbClr val="111111"/>
-                </a:solidFill>
-                <a:latin typeface="Calibri"/>
-                <a:ea typeface="Calibri"/>
-                <a:cs typeface="Calibri"/>
-              </a:defRPr>
-            </a:pPr>
-            <a:r>
-              <a:rPr sz="1763" b="0">
-                <a:solidFill>
-                  <a:srgbClr val="111111"/>
-                </a:solidFill>
-                <a:latin typeface="Calibri"/>
-                <a:ea typeface="Calibri"/>
-                <a:cs typeface="Calibri"/>
-              </a:rPr>
-              <a:t>Y</a:t>
-            </a:r>
-          </a:p>
-        </p:txBody>
-      </p:sp>
-      <p:sp>
-        <p:nvSpPr>
-          <p:cNvPr id="15" name="">
-            <a:extLst xmlns:a="http://schemas.openxmlformats.org/drawingml/2006/main">
-              <a:ext uri="{FF2B5EF4-FFF2-40B4-BE49-F238E27FC236}">
-                <a16:creationId xmlns:a16="http://schemas.microsoft.com/office/drawing/2014/main" id="{28646318-63EE-4E2C-9341-D24DFF17305E}"/>
-              </a:ext>
-            </a:extLst>
-          </p:cNvPr>
-          <p:cNvSpPr>
-            <a:spLocks xmlns:a="http://schemas.openxmlformats.org/drawingml/2006/main" noGrp="1"/>
-          </p:cNvSpPr>
-          <p:nvPr/>
-        </p:nvSpPr>
-        <p:spPr>
-          <a:xfrm xmlns:a="http://schemas.openxmlformats.org/drawingml/2006/main" flipH="0" flipV="0">
-            <a:off x="5597922" y="2866628"/>
-            <a:ext cx="1585516" cy="0"/>
-          </a:xfrm>
-          <a:prstGeom xmlns:a="http://schemas.openxmlformats.org/drawingml/2006/main" prst="line">
-            <a:avLst/>
-          </a:prstGeom>
-          <a:noFill xmlns:a="http://schemas.openxmlformats.org/drawingml/2006/main"/>
-          <a:ln xmlns:a="http://schemas.openxmlformats.org/drawingml/2006/main" w="20955">
-            <a:solidFill>
-              <a:srgbClr val="111111"/>
-            </a:solidFill>
-          </a:ln>
-        </p:spPr>
-        <p:txBody xmlns:a="http://schemas.openxmlformats.org/drawingml/2006/main">
-          <a:bodyPr/>
-          <a:p/>
-        </p:txBody>
-      </p:sp>
-      <p:sp>
-        <p:nvSpPr>
-          <p:cNvPr id="16" name="">
-            <a:extLst xmlns:a="http://schemas.openxmlformats.org/drawingml/2006/main">
-              <a:ext uri="{FF2B5EF4-FFF2-40B4-BE49-F238E27FC236}">
-                <a16:creationId xmlns:a16="http://schemas.microsoft.com/office/drawing/2014/main" id="{62F4FF1A-EACB-44F1-9660-1668BCFB45AA}"/>
-              </a:ext>
-            </a:extLst>
-          </p:cNvPr>
-          <p:cNvSpPr>
-            <a:spLocks xmlns:a="http://schemas.openxmlformats.org/drawingml/2006/main" noGrp="1"/>
-          </p:cNvSpPr>
-          <p:nvPr/>
-        </p:nvSpPr>
-        <p:spPr>
-          <a:xfrm xmlns:a="http://schemas.openxmlformats.org/drawingml/2006/main" flipH="1" flipV="0">
-            <a:off x="6390680" y="2866628"/>
-            <a:ext cx="792758" cy="1445617"/>
-          </a:xfrm>
-          <a:prstGeom xmlns:a="http://schemas.openxmlformats.org/drawingml/2006/main" prst="line">
-            <a:avLst/>
-          </a:prstGeom>
-          <a:noFill xmlns:a="http://schemas.openxmlformats.org/drawingml/2006/main"/>
-          <a:ln xmlns:a="http://schemas.openxmlformats.org/drawingml/2006/main" w="20955">
-            <a:solidFill>
-              <a:srgbClr val="111111"/>
-            </a:solidFill>
-          </a:ln>
-        </p:spPr>
-        <p:txBody xmlns:a="http://schemas.openxmlformats.org/drawingml/2006/main">
-          <a:bodyPr/>
-          <a:p/>
-        </p:txBody>
-      </p:sp>
-      <p:sp>
-        <p:nvSpPr>
-          <p:cNvPr id="17" name="">
-            <a:extLst xmlns:a="http://schemas.openxmlformats.org/drawingml/2006/main">
-              <a:ext uri="{FF2B5EF4-FFF2-40B4-BE49-F238E27FC236}">
-                <a16:creationId xmlns:a16="http://schemas.microsoft.com/office/drawing/2014/main" id="{FAB726B2-9F94-4242-A386-1B4A233CBA02}"/>
-              </a:ext>
-            </a:extLst>
-          </p:cNvPr>
-          <p:cNvSpPr>
-            <a:spLocks xmlns:a="http://schemas.openxmlformats.org/drawingml/2006/main" noGrp="1"/>
-          </p:cNvSpPr>
-          <p:nvPr/>
-        </p:nvSpPr>
-        <p:spPr>
-          <a:xfrm xmlns:a="http://schemas.openxmlformats.org/drawingml/2006/main" flipH="1" flipV="1">
-            <a:off x="5597922" y="2866628"/>
-            <a:ext cx="792758" cy="1445617"/>
-          </a:xfrm>
-          <a:prstGeom xmlns:a="http://schemas.openxmlformats.org/drawingml/2006/main" prst="line">
-            <a:avLst/>
-          </a:prstGeom>
-          <a:noFill xmlns:a="http://schemas.openxmlformats.org/drawingml/2006/main"/>
-          <a:ln xmlns:a="http://schemas.openxmlformats.org/drawingml/2006/main" w="20955">
-            <a:solidFill>
-              <a:srgbClr val="111111"/>
-            </a:solidFill>
-          </a:ln>
-        </p:spPr>
-        <p:txBody xmlns:a="http://schemas.openxmlformats.org/drawingml/2006/main">
-          <a:bodyPr/>
-          <a:p/>
-        </p:txBody>
-      </p:sp>
-      <p:sp>
-        <p:nvSpPr>
-          <p:cNvPr id="18" name="">
-            <a:extLst xmlns:a="http://schemas.openxmlformats.org/drawingml/2006/main">
-              <a:ext uri="{FF2B5EF4-FFF2-40B4-BE49-F238E27FC236}">
-                <a16:creationId xmlns:a16="http://schemas.microsoft.com/office/drawing/2014/main" id="{85756D3D-A3B5-433D-B6A4-E304A44BA11D}"/>
-              </a:ext>
-            </a:extLst>
-          </p:cNvPr>
-          <p:cNvSpPr>
-            <a:spLocks xmlns:a="http://schemas.openxmlformats.org/drawingml/2006/main" noGrp="1"/>
-          </p:cNvSpPr>
-          <p:nvPr/>
-        </p:nvSpPr>
-        <p:spPr>
-          <a:xfrm xmlns:a="http://schemas.openxmlformats.org/drawingml/2006/main">
-            <a:off x="5560616" y="2829322"/>
-            <a:ext cx="74613" cy="74613"/>
-          </a:xfrm>
-          <a:prstGeom xmlns:a="http://schemas.openxmlformats.org/drawingml/2006/main" prst="ellipse">
-            <a:avLst/>
-          </a:prstGeom>
-          <a:solidFill xmlns:a="http://schemas.openxmlformats.org/drawingml/2006/main">
-            <a:srgbClr val="111111"/>
-          </a:solidFill>
-          <a:ln xmlns:a="http://schemas.openxmlformats.org/drawingml/2006/main" w="0">
-            <a:solidFill>
-              <a:srgbClr val="111111"/>
-            </a:solidFill>
-          </a:ln>
-        </p:spPr>
-        <p:txBody xmlns:a="http://schemas.openxmlformats.org/drawingml/2006/main">
-          <a:bodyPr/>
-          <a:p/>
-        </p:txBody>
-      </p:sp>
-      <p:sp>
-        <p:nvSpPr>
-          <p:cNvPr id="19" name="L1">
-            <a:extLst xmlns:a="http://schemas.openxmlformats.org/drawingml/2006/main">
-              <a:ext uri="{FF2B5EF4-FFF2-40B4-BE49-F238E27FC236}">
-                <a16:creationId xmlns:a16="http://schemas.microsoft.com/office/drawing/2014/main" id="{C072C644-68DC-4354-A02A-0BD747057233}"/>
-              </a:ext>
-            </a:extLst>
-          </p:cNvPr>
-          <p:cNvSpPr>
-            <a:spLocks xmlns:a="http://schemas.openxmlformats.org/drawingml/2006/main" noGrp="1"/>
-          </p:cNvSpPr>
-          <p:nvPr/>
-        </p:nvSpPr>
-        <p:spPr>
-          <a:xfrm xmlns:a="http://schemas.openxmlformats.org/drawingml/2006/main">
-            <a:off x="5364758" y="2549525"/>
-            <a:ext cx="466328" cy="335756"/>
-          </a:xfrm>
-          <a:prstGeom xmlns:a="http://schemas.openxmlformats.org/drawingml/2006/main" prst="rect">
-            <a:avLst/>
-          </a:prstGeom>
-          <a:noFill xmlns:a="http://schemas.openxmlformats.org/drawingml/2006/main"/>
-          <a:ln xmlns:a="http://schemas.openxmlformats.org/drawingml/2006/main" w="0">
-            <a:noFill/>
-          </a:ln>
-        </p:spPr>
-        <p:txBody>
-          <a:bodyPr xmlns:a="http://schemas.openxmlformats.org/drawingml/2006/main" wrap="square" lIns="0" tIns="0" rIns="0" bIns="0" anchor="t">
-            <a:noAutofit/>
-          </a:bodyPr>
-          <a:lstStyle xmlns:a="http://schemas.openxmlformats.org/drawingml/2006/main"/>
-          <a:p xmlns:a="http://schemas.openxmlformats.org/drawingml/2006/main">
-            <a:pPr algn="ctr">
-              <a:buNone/>
-              <a:defRPr sz="1542" b="0">
-                <a:solidFill>
-                  <a:srgbClr val="111111"/>
-                </a:solidFill>
-                <a:latin typeface="Calibri"/>
-                <a:ea typeface="Calibri"/>
-                <a:cs typeface="Calibri"/>
-              </a:defRPr>
-            </a:pPr>
-            <a:r>
-              <a:rPr sz="1542" b="0">
-                <a:solidFill>
-                  <a:srgbClr val="111111"/>
-                </a:solidFill>
-                <a:latin typeface="Calibri"/>
-                <a:ea typeface="Calibri"/>
-                <a:cs typeface="Calibri"/>
-              </a:rPr>
-              <a:t>L1</a:t>
-            </a:r>
-          </a:p>
-        </p:txBody>
-      </p:sp>
-      <p:sp>
-        <p:nvSpPr>
-          <p:cNvPr id="20" name="">
-            <a:extLst xmlns:a="http://schemas.openxmlformats.org/drawingml/2006/main">
-              <a:ext uri="{FF2B5EF4-FFF2-40B4-BE49-F238E27FC236}">
-                <a16:creationId xmlns:a16="http://schemas.microsoft.com/office/drawing/2014/main" id="{3FE261DD-2BD7-4A26-9DCF-45C3BC969A3E}"/>
-              </a:ext>
-            </a:extLst>
-          </p:cNvPr>
-          <p:cNvSpPr>
-            <a:spLocks xmlns:a="http://schemas.openxmlformats.org/drawingml/2006/main" noGrp="1"/>
-          </p:cNvSpPr>
-          <p:nvPr/>
-        </p:nvSpPr>
-        <p:spPr>
-          <a:xfrm xmlns:a="http://schemas.openxmlformats.org/drawingml/2006/main">
-            <a:off x="7146131" y="2829322"/>
-            <a:ext cx="74613" cy="74613"/>
-          </a:xfrm>
-          <a:prstGeom xmlns:a="http://schemas.openxmlformats.org/drawingml/2006/main" prst="ellipse">
-            <a:avLst/>
-          </a:prstGeom>
-          <a:solidFill xmlns:a="http://schemas.openxmlformats.org/drawingml/2006/main">
-            <a:srgbClr val="111111"/>
-          </a:solidFill>
-          <a:ln xmlns:a="http://schemas.openxmlformats.org/drawingml/2006/main" w="0">
-            <a:solidFill>
-              <a:srgbClr val="111111"/>
-            </a:solidFill>
-          </a:ln>
-        </p:spPr>
-        <p:txBody xmlns:a="http://schemas.openxmlformats.org/drawingml/2006/main">
-          <a:bodyPr/>
-          <a:p/>
-        </p:txBody>
-      </p:sp>
-      <p:sp>
-        <p:nvSpPr>
-          <p:cNvPr id="21" name="L2">
-            <a:extLst xmlns:a="http://schemas.openxmlformats.org/drawingml/2006/main">
-              <a:ext uri="{FF2B5EF4-FFF2-40B4-BE49-F238E27FC236}">
-                <a16:creationId xmlns:a16="http://schemas.microsoft.com/office/drawing/2014/main" id="{660DC44C-15A1-41C2-A4CE-957918F92CCB}"/>
-              </a:ext>
-            </a:extLst>
-          </p:cNvPr>
-          <p:cNvSpPr>
-            <a:spLocks xmlns:a="http://schemas.openxmlformats.org/drawingml/2006/main" noGrp="1"/>
-          </p:cNvSpPr>
-          <p:nvPr/>
-        </p:nvSpPr>
-        <p:spPr>
-          <a:xfrm xmlns:a="http://schemas.openxmlformats.org/drawingml/2006/main">
-            <a:off x="6950273" y="2549525"/>
-            <a:ext cx="466328" cy="335756"/>
-          </a:xfrm>
-          <a:prstGeom xmlns:a="http://schemas.openxmlformats.org/drawingml/2006/main" prst="rect">
-            <a:avLst/>
-          </a:prstGeom>
-          <a:noFill xmlns:a="http://schemas.openxmlformats.org/drawingml/2006/main"/>
-          <a:ln xmlns:a="http://schemas.openxmlformats.org/drawingml/2006/main" w="0">
-            <a:noFill/>
-          </a:ln>
-        </p:spPr>
-        <p:txBody>
-          <a:bodyPr xmlns:a="http://schemas.openxmlformats.org/drawingml/2006/main" wrap="square" lIns="0" tIns="0" rIns="0" bIns="0" anchor="t">
-            <a:noAutofit/>
-          </a:bodyPr>
-          <a:lstStyle xmlns:a="http://schemas.openxmlformats.org/drawingml/2006/main"/>
-          <a:p xmlns:a="http://schemas.openxmlformats.org/drawingml/2006/main">
-            <a:pPr algn="ctr">
-              <a:buNone/>
-              <a:defRPr sz="1542" b="0">
-                <a:solidFill>
-                  <a:srgbClr val="111111"/>
-                </a:solidFill>
-                <a:latin typeface="Calibri"/>
-                <a:ea typeface="Calibri"/>
-                <a:cs typeface="Calibri"/>
-              </a:defRPr>
-            </a:pPr>
-            <a:r>
-              <a:rPr sz="1542" b="0">
-                <a:solidFill>
-                  <a:srgbClr val="111111"/>
-                </a:solidFill>
-                <a:latin typeface="Calibri"/>
-                <a:ea typeface="Calibri"/>
-                <a:cs typeface="Calibri"/>
-              </a:rPr>
-              <a:t>L2</a:t>
-            </a:r>
-          </a:p>
-        </p:txBody>
-      </p:sp>
-      <p:sp>
-        <p:nvSpPr>
-          <p:cNvPr id="22" name="">
-            <a:extLst xmlns:a="http://schemas.openxmlformats.org/drawingml/2006/main">
-              <a:ext uri="{FF2B5EF4-FFF2-40B4-BE49-F238E27FC236}">
-                <a16:creationId xmlns:a16="http://schemas.microsoft.com/office/drawing/2014/main" id="{D8D98E97-0211-4506-8583-10F06C526DF0}"/>
-              </a:ext>
-            </a:extLst>
-          </p:cNvPr>
-          <p:cNvSpPr>
-            <a:spLocks xmlns:a="http://schemas.openxmlformats.org/drawingml/2006/main" noGrp="1"/>
-          </p:cNvSpPr>
-          <p:nvPr/>
-        </p:nvSpPr>
-        <p:spPr>
-          <a:xfrm xmlns:a="http://schemas.openxmlformats.org/drawingml/2006/main">
-            <a:off x="6353373" y="4274939"/>
-            <a:ext cx="74613" cy="74613"/>
-          </a:xfrm>
-          <a:prstGeom xmlns:a="http://schemas.openxmlformats.org/drawingml/2006/main" prst="ellipse">
-            <a:avLst/>
-          </a:prstGeom>
-          <a:solidFill xmlns:a="http://schemas.openxmlformats.org/drawingml/2006/main">
-            <a:srgbClr val="111111"/>
-          </a:solidFill>
-          <a:ln xmlns:a="http://schemas.openxmlformats.org/drawingml/2006/main" w="0">
-            <a:solidFill>
-              <a:srgbClr val="111111"/>
-            </a:solidFill>
-          </a:ln>
-        </p:spPr>
-        <p:txBody xmlns:a="http://schemas.openxmlformats.org/drawingml/2006/main">
-          <a:bodyPr/>
-          <a:p/>
-        </p:txBody>
-      </p:sp>
-      <p:sp>
-        <p:nvSpPr>
-          <p:cNvPr id="23" name="L3">
-            <a:extLst xmlns:a="http://schemas.openxmlformats.org/drawingml/2006/main">
-              <a:ext uri="{FF2B5EF4-FFF2-40B4-BE49-F238E27FC236}">
-                <a16:creationId xmlns:a16="http://schemas.microsoft.com/office/drawing/2014/main" id="{2755A1CB-5FE0-4C8C-8259-C921E8237AB7}"/>
-              </a:ext>
-            </a:extLst>
-          </p:cNvPr>
-          <p:cNvSpPr>
-            <a:spLocks xmlns:a="http://schemas.openxmlformats.org/drawingml/2006/main" noGrp="1"/>
-          </p:cNvSpPr>
-          <p:nvPr/>
-        </p:nvSpPr>
-        <p:spPr>
-          <a:xfrm xmlns:a="http://schemas.openxmlformats.org/drawingml/2006/main">
-            <a:off x="6689130" y="4163020"/>
-            <a:ext cx="466328" cy="335756"/>
-          </a:xfrm>
-          <a:prstGeom xmlns:a="http://schemas.openxmlformats.org/drawingml/2006/main" prst="rect">
-            <a:avLst/>
-          </a:prstGeom>
-          <a:noFill xmlns:a="http://schemas.openxmlformats.org/drawingml/2006/main"/>
-          <a:ln xmlns:a="http://schemas.openxmlformats.org/drawingml/2006/main" w="0">
-            <a:noFill/>
-          </a:ln>
-        </p:spPr>
-        <p:txBody>
-          <a:bodyPr xmlns:a="http://schemas.openxmlformats.org/drawingml/2006/main" wrap="square" lIns="0" tIns="0" rIns="0" bIns="0" anchor="t">
-            <a:noAutofit/>
-          </a:bodyPr>
-          <a:lstStyle xmlns:a="http://schemas.openxmlformats.org/drawingml/2006/main"/>
-          <a:p xmlns:a="http://schemas.openxmlformats.org/drawingml/2006/main">
-            <a:pPr algn="ctr">
-              <a:buNone/>
-              <a:defRPr sz="1542" b="0">
-                <a:solidFill>
-                  <a:srgbClr val="111111"/>
-                </a:solidFill>
-                <a:latin typeface="Calibri"/>
-                <a:ea typeface="Calibri"/>
-                <a:cs typeface="Calibri"/>
-              </a:defRPr>
-            </a:pPr>
-            <a:r>
-              <a:rPr sz="1542" b="0">
-                <a:solidFill>
-                  <a:srgbClr val="111111"/>
-                </a:solidFill>
-                <a:latin typeface="Calibri"/>
-                <a:ea typeface="Calibri"/>
-                <a:cs typeface="Calibri"/>
-              </a:rPr>
-              <a:t>L3</a:t>
-            </a:r>
-          </a:p>
-        </p:txBody>
-      </p:sp>
-      <p:sp>
-        <p:nvSpPr>
-          <p:cNvPr id="24" name="Δ">
-            <a:extLst xmlns:a="http://schemas.openxmlformats.org/drawingml/2006/main">
-              <a:ext uri="{FF2B5EF4-FFF2-40B4-BE49-F238E27FC236}">
-                <a16:creationId xmlns:a16="http://schemas.microsoft.com/office/drawing/2014/main" id="{10FD4D96-767C-4392-AA44-406EBC6F08E7}"/>
-              </a:ext>
-            </a:extLst>
-          </p:cNvPr>
-          <p:cNvSpPr>
-            <a:spLocks xmlns:a="http://schemas.openxmlformats.org/drawingml/2006/main" noGrp="1"/>
-          </p:cNvSpPr>
-          <p:nvPr/>
-        </p:nvSpPr>
-        <p:spPr>
-          <a:xfrm xmlns:a="http://schemas.openxmlformats.org/drawingml/2006/main">
-            <a:off x="6064250" y="4452144"/>
-            <a:ext cx="746125" cy="335756"/>
-          </a:xfrm>
-          <a:prstGeom xmlns:a="http://schemas.openxmlformats.org/drawingml/2006/main" prst="rect">
-            <a:avLst/>
-          </a:prstGeom>
-          <a:noFill xmlns:a="http://schemas.openxmlformats.org/drawingml/2006/main"/>
-          <a:ln xmlns:a="http://schemas.openxmlformats.org/drawingml/2006/main" w="0">
-            <a:noFill/>
-          </a:ln>
-        </p:spPr>
-        <p:txBody>
-          <a:bodyPr xmlns:a="http://schemas.openxmlformats.org/drawingml/2006/main" wrap="square" lIns="0" tIns="0" rIns="0" bIns="0" anchor="t">
-            <a:noAutofit/>
-          </a:bodyPr>
-          <a:lstStyle xmlns:a="http://schemas.openxmlformats.org/drawingml/2006/main"/>
-          <a:p xmlns:a="http://schemas.openxmlformats.org/drawingml/2006/main">
-            <a:pPr algn="ctr">
-              <a:buNone/>
-              <a:defRPr sz="1763" b="0">
-                <a:solidFill>
-                  <a:srgbClr val="111111"/>
-                </a:solidFill>
-                <a:latin typeface="Calibri"/>
-                <a:ea typeface="Calibri"/>
-                <a:cs typeface="Calibri"/>
-              </a:defRPr>
-            </a:pPr>
-            <a:r>
-              <a:rPr sz="1763" b="0">
-                <a:solidFill>
-                  <a:srgbClr val="111111"/>
-                </a:solidFill>
-                <a:latin typeface="Calibri"/>
-                <a:ea typeface="Calibri"/>
-                <a:cs typeface="Calibri"/>
-              </a:rPr>
-              <a:t>Δ</a:t>
-            </a:r>
-          </a:p>
-        </p:txBody>
-      </p:sp>
-      <p:sp>
-        <p:nvSpPr>
-          <p:cNvPr id="25" name="Varje linje visar en lastgren">
-            <a:extLst xmlns:a="http://schemas.openxmlformats.org/drawingml/2006/main">
-              <a:ext uri="{FF2B5EF4-FFF2-40B4-BE49-F238E27FC236}">
-                <a16:creationId xmlns:a16="http://schemas.microsoft.com/office/drawing/2014/main" id="{9095EC32-A18D-4201-9747-4D8D1BE1DC42}"/>
-              </a:ext>
-            </a:extLst>
-          </p:cNvPr>
-          <p:cNvSpPr>
-            <a:spLocks xmlns:a="http://schemas.openxmlformats.org/drawingml/2006/main" noGrp="1"/>
-          </p:cNvSpPr>
-          <p:nvPr/>
-        </p:nvSpPr>
-        <p:spPr>
-          <a:xfrm xmlns:a="http://schemas.openxmlformats.org/drawingml/2006/main">
-            <a:off x="2147094" y="2353667"/>
-            <a:ext cx="4849813" cy="335756"/>
-          </a:xfrm>
-          <a:prstGeom xmlns:a="http://schemas.openxmlformats.org/drawingml/2006/main" prst="rect">
-            <a:avLst/>
-          </a:prstGeom>
-          <a:noFill xmlns:a="http://schemas.openxmlformats.org/drawingml/2006/main"/>
-          <a:ln xmlns:a="http://schemas.openxmlformats.org/drawingml/2006/main" w="0">
-            <a:noFill/>
-          </a:ln>
-        </p:spPr>
-        <p:txBody>
-          <a:bodyPr xmlns:a="http://schemas.openxmlformats.org/drawingml/2006/main" wrap="square" lIns="0" tIns="0" rIns="0" bIns="0" anchor="t">
-            <a:noAutofit/>
-          </a:bodyPr>
-          <a:lstStyle xmlns:a="http://schemas.openxmlformats.org/drawingml/2006/main"/>
-          <a:p xmlns:a="http://schemas.openxmlformats.org/drawingml/2006/main">
-            <a:pPr algn="ctr">
-              <a:buNone/>
-              <a:defRPr sz="1542" b="0">
-                <a:solidFill>
-                  <a:srgbClr val="111111"/>
-                </a:solidFill>
-                <a:latin typeface="Calibri"/>
-                <a:ea typeface="Calibri"/>
-                <a:cs typeface="Calibri"/>
-              </a:defRPr>
-            </a:pPr>
-            <a:r>
-              <a:rPr sz="1542" b="0">
-                <a:solidFill>
-                  <a:srgbClr val="111111"/>
-                </a:solidFill>
-                <a:latin typeface="Calibri"/>
-                <a:ea typeface="Calibri"/>
-                <a:cs typeface="Calibri"/>
-              </a:rPr>
-              <a:t>Varje linje visar en lastgren</a:t>
-            </a:r>
-          </a:p>
-        </p:txBody>
-      </p:sp>
-      <p:sp>
-        <p:nvSpPr>
           <p:cNvPr id="26" name="Y: Ugren = UL/√3     Δ: Ugren = UL">
             <a:extLst xmlns:a="http://schemas.openxmlformats.org/drawingml/2006/main">
               <a:ext uri="{FF2B5EF4-FFF2-40B4-BE49-F238E27FC236}">
@@ -18360,6 +17382,30 @@
           </a:p>
         </p:txBody>
       </p:sp>
+      <p:pic xmlns:a="http://schemas.openxmlformats.org/drawingml/2006/main" xmlns:r="http://schemas.openxmlformats.org/officeDocument/2006/relationships">
+        <p:nvPicPr>
+          <p:cNvPr id="31" name="schema-y-delta" descr="Y: tre grenar mellan fas och stjärnpunkt. Δ: tre grenar mellan två faser."/>
+          <p:cNvPicPr>
+            <a:picLocks noChangeAspect="1"/>
+          </p:cNvPicPr>
+          <p:nvPr/>
+        </p:nvPicPr>
+        <p:blipFill>
+          <a:blip r:embed="rId3"/>
+          <a:stretch>
+            <a:fillRect/>
+          </a:stretch>
+        </p:blipFill>
+        <p:spPr>
+          <a:xfrm>
+            <a:off x="1542647" y="2395728"/>
+            <a:ext cx="6058706" cy="2340864"/>
+          </a:xfrm>
+          <a:prstGeom prst="rect">
+            <a:avLst/>
+          </a:prstGeom>
+        </p:spPr>
+      </p:pic>
     </p:spTree>
     <p:extLst>
       <p:ext uri="{BB962C8B-B14F-4D97-AF65-F5344CB8AC3E}">

--- a/sjoskolan/vecka-41/aktuell/v41_02_Y_och_trefaseffekt_elev.pptx
+++ b/sjoskolan/vecka-41/aktuell/v41_02_Y_och_trefaseffekt_elev.pptx
@@ -5317,7 +5317,7 @@
                 <a:ea typeface="Calibri"/>
                 <a:cs typeface="Calibri"/>
               </a:rPr>
-              <a:t>Använd Y-lasten i uppgift 1. Bestäm grenströmmen och linjeströmmen.</a:t>
+              <a:t>Använd Y-lasten i föregående övning. Bestäm grenströmmen och linjeströmmen.</a:t>
             </a:r>
           </a:p>
         </p:txBody>

--- a/sjoskolan/vecka-41/aktuell/v41_02_Y_och_trefaseffekt_elev.pptx
+++ b/sjoskolan/vecka-41/aktuell/v41_02_Y_och_trefaseffekt_elev.pptx
@@ -9594,7 +9594,51 @@
                 <a:ea typeface="Calibri"/>
                 <a:cs typeface="Calibri"/>
               </a:rPr>
-              <a:t>Pᵢₙ = Paxel/η</a:t>
+              <a:t>P</a:t>
+            </a:r>
+            <a:r>
+              <a:rPr sz="2925" b="1" baseline="-25000">
+                <a:solidFill>
+                  <a:srgbClr val="064F91"/>
+                </a:solidFill>
+                <a:latin typeface="Calibri"/>
+                <a:ea typeface="Calibri"/>
+                <a:cs typeface="Calibri"/>
+              </a:rPr>
+              <a:t>in</a:t>
+            </a:r>
+            <a:r>
+              <a:rPr sz="2925" b="1">
+                <a:solidFill>
+                  <a:srgbClr val="064F91"/>
+                </a:solidFill>
+                <a:latin typeface="Calibri"/>
+                <a:ea typeface="Calibri"/>
+                <a:cs typeface="Calibri"/>
+              </a:rPr>
+              <a:t> = P</a:t>
+            </a:r>
+            <a:r>
+              <a:rPr sz="2925" b="1" baseline="-25000">
+                <a:solidFill>
+                  <a:srgbClr val="064F91"/>
+                </a:solidFill>
+                <a:latin typeface="Calibri"/>
+                <a:ea typeface="Calibri"/>
+                <a:cs typeface="Calibri"/>
+              </a:rPr>
+              <a:t>axel</a:t>
+            </a:r>
+            <a:r>
+              <a:rPr sz="2925" b="1">
+                <a:solidFill>
+                  <a:srgbClr val="064F91"/>
+                </a:solidFill>
+                <a:latin typeface="Calibri"/>
+                <a:ea typeface="Calibri"/>
+                <a:cs typeface="Calibri"/>
+              </a:rPr>
+              <a:t>/η</a:t>
             </a:r>
           </a:p>
         </p:txBody>
@@ -9652,7 +9696,51 @@
                 <a:ea typeface="Calibri"/>
                 <a:cs typeface="Calibri"/>
               </a:rPr>
-              <a:t>Paxel = 11 kW, η = 0,90 ger Pᵢₙ ≈ 12,2 kW.</a:t>
+              <a:t>P</a:t>
+            </a:r>
+            <a:r>
+              <a:rPr sz="2100" b="0" baseline="-25000">
+                <a:solidFill>
+                  <a:srgbClr val="111111"/>
+                </a:solidFill>
+                <a:latin typeface="Calibri"/>
+                <a:ea typeface="Calibri"/>
+                <a:cs typeface="Calibri"/>
+              </a:rPr>
+              <a:t>axel</a:t>
+            </a:r>
+            <a:r>
+              <a:rPr sz="2100" b="0">
+                <a:solidFill>
+                  <a:srgbClr val="111111"/>
+                </a:solidFill>
+                <a:latin typeface="Calibri"/>
+                <a:ea typeface="Calibri"/>
+                <a:cs typeface="Calibri"/>
+              </a:rPr>
+              <a:t> = 11 kW, η = 0,90 ger P</a:t>
+            </a:r>
+            <a:r>
+              <a:rPr sz="2100" b="0" baseline="-25000">
+                <a:solidFill>
+                  <a:srgbClr val="111111"/>
+                </a:solidFill>
+                <a:latin typeface="Calibri"/>
+                <a:ea typeface="Calibri"/>
+                <a:cs typeface="Calibri"/>
+              </a:rPr>
+              <a:t>in</a:t>
+            </a:r>
+            <a:r>
+              <a:rPr sz="2100" b="0">
+                <a:solidFill>
+                  <a:srgbClr val="111111"/>
+                </a:solidFill>
+                <a:latin typeface="Calibri"/>
+                <a:ea typeface="Calibri"/>
+                <a:cs typeface="Calibri"/>
+              </a:rPr>
+              <a:t> ≈ 12,2 kW.</a:t>
             </a:r>
           </a:p>
           <a:p xmlns:a="http://schemas.openxmlformats.org/drawingml/2006/main">
@@ -9770,7 +9858,7 @@
           <p:nvPr/>
         </p:nvPicPr>
         <p:blipFill>
-          <a:blip r:embed="rId3"/>
+          <a:blip r:embed="rId4"/>
           <a:stretch>
             <a:fillRect/>
           </a:stretch>
@@ -10024,7 +10112,51 @@
                 <a:ea typeface="Calibri"/>
                 <a:cs typeface="Calibri"/>
               </a:rPr>
-              <a:t>U₁,gren/U₂,gren = N₁/N₂</a:t>
+              <a:t>U</a:t>
+            </a:r>
+            <a:r>
+              <a:rPr sz="2925" b="1" baseline="-25000">
+                <a:solidFill>
+                  <a:srgbClr val="064F91"/>
+                </a:solidFill>
+                <a:latin typeface="Calibri"/>
+                <a:ea typeface="Calibri"/>
+                <a:cs typeface="Calibri"/>
+              </a:rPr>
+              <a:t>1,gren</a:t>
+            </a:r>
+            <a:r>
+              <a:rPr sz="2925" b="1">
+                <a:solidFill>
+                  <a:srgbClr val="064F91"/>
+                </a:solidFill>
+                <a:latin typeface="Calibri"/>
+                <a:ea typeface="Calibri"/>
+                <a:cs typeface="Calibri"/>
+              </a:rPr>
+              <a:t>/U</a:t>
+            </a:r>
+            <a:r>
+              <a:rPr sz="2925" b="1" baseline="-25000">
+                <a:solidFill>
+                  <a:srgbClr val="064F91"/>
+                </a:solidFill>
+                <a:latin typeface="Calibri"/>
+                <a:ea typeface="Calibri"/>
+                <a:cs typeface="Calibri"/>
+              </a:rPr>
+              <a:t>2,gren</a:t>
+            </a:r>
+            <a:r>
+              <a:rPr sz="2925" b="1">
+                <a:solidFill>
+                  <a:srgbClr val="064F91"/>
+                </a:solidFill>
+                <a:latin typeface="Calibri"/>
+                <a:ea typeface="Calibri"/>
+                <a:cs typeface="Calibri"/>
+              </a:rPr>
+              <a:t> = N₁/N₂</a:t>
             </a:r>
           </a:p>
         </p:txBody>
@@ -10368,7 +10500,29 @@
                 <a:ea typeface="Calibri"/>
                 <a:cs typeface="Calibri"/>
               </a:rPr>
-              <a:t>Motor: Paxel = 2,4 kW, η = 0,80, PF = 0,75 och U</a:t>
+              <a:t>Motor: P</a:t>
+            </a:r>
+            <a:r>
+              <a:rPr sz="2175" b="0" baseline="-25000">
+                <a:solidFill>
+                  <a:srgbClr val="111111"/>
+                </a:solidFill>
+                <a:latin typeface="Calibri"/>
+                <a:ea typeface="Calibri"/>
+                <a:cs typeface="Calibri"/>
+              </a:rPr>
+              <a:t>axel</a:t>
+            </a:r>
+            <a:r>
+              <a:rPr sz="2175" b="0">
+                <a:solidFill>
+                  <a:srgbClr val="111111"/>
+                </a:solidFill>
+                <a:latin typeface="Calibri"/>
+                <a:ea typeface="Calibri"/>
+                <a:cs typeface="Calibri"/>
+              </a:rPr>
+              <a:t> = 2,4 kW, η = 0,80, PF = 0,75 och U</a:t>
             </a:r>
             <a:r>
               <a:rPr sz="2175" b="0" baseline="-25000">
@@ -10447,7 +10601,7 @@
                 <a:ea typeface="Calibri"/>
                 <a:cs typeface="Calibri"/>
               </a:rPr>
-              <a:t>Pᵢₙ = Paxel/η     I</a:t>
+              <a:t>P</a:t>
             </a:r>
             <a:r>
               <a:rPr sz="2325" b="1" baseline="-25000">
@@ -10458,6 +10612,50 @@
                 <a:ea typeface="Calibri"/>
                 <a:cs typeface="Calibri"/>
               </a:rPr>
+              <a:t>in</a:t>
+            </a:r>
+            <a:r>
+              <a:rPr sz="2325" b="1">
+                <a:solidFill>
+                  <a:srgbClr val="064F91"/>
+                </a:solidFill>
+                <a:latin typeface="Calibri"/>
+                <a:ea typeface="Calibri"/>
+                <a:cs typeface="Calibri"/>
+              </a:rPr>
+              <a:t> = P</a:t>
+            </a:r>
+            <a:r>
+              <a:rPr sz="2325" b="1" baseline="-25000">
+                <a:solidFill>
+                  <a:srgbClr val="064F91"/>
+                </a:solidFill>
+                <a:latin typeface="Calibri"/>
+                <a:ea typeface="Calibri"/>
+                <a:cs typeface="Calibri"/>
+              </a:rPr>
+              <a:t>axel</a:t>
+            </a:r>
+            <a:r>
+              <a:rPr sz="2325" b="1">
+                <a:solidFill>
+                  <a:srgbClr val="064F91"/>
+                </a:solidFill>
+                <a:latin typeface="Calibri"/>
+                <a:ea typeface="Calibri"/>
+                <a:cs typeface="Calibri"/>
+              </a:rPr>
+              <a:t>/η     I</a:t>
+            </a:r>
+            <a:r>
+              <a:rPr sz="2325" b="1" baseline="-25000">
+                <a:solidFill>
+                  <a:srgbClr val="064F91"/>
+                </a:solidFill>
+                <a:latin typeface="Calibri"/>
+                <a:ea typeface="Calibri"/>
+                <a:cs typeface="Calibri"/>
+              </a:rPr>
               <a:t>L</a:t>
             </a:r>
             <a:r>
@@ -10469,7 +10667,29 @@
                 <a:ea typeface="Calibri"/>
                 <a:cs typeface="Calibri"/>
               </a:rPr>
-              <a:t> = Pᵢₙ/(√3 U</a:t>
+              <a:t> = P</a:t>
+            </a:r>
+            <a:r>
+              <a:rPr sz="2325" b="1" baseline="-25000">
+                <a:solidFill>
+                  <a:srgbClr val="064F91"/>
+                </a:solidFill>
+                <a:latin typeface="Calibri"/>
+                <a:ea typeface="Calibri"/>
+                <a:cs typeface="Calibri"/>
+              </a:rPr>
+              <a:t>in</a:t>
+            </a:r>
+            <a:r>
+              <a:rPr sz="2325" b="1">
+                <a:solidFill>
+                  <a:srgbClr val="064F91"/>
+                </a:solidFill>
+                <a:latin typeface="Calibri"/>
+                <a:ea typeface="Calibri"/>
+                <a:cs typeface="Calibri"/>
+              </a:rPr>
+              <a:t>/(√3 U</a:t>
             </a:r>
             <a:r>
               <a:rPr sz="2325" b="1" baseline="-25000">
@@ -10548,7 +10768,29 @@
                 <a:ea typeface="Calibri"/>
                 <a:cs typeface="Calibri"/>
               </a:rPr>
-              <a:t>1. Pᵢₙ = 2,4/0,80 = 3,0 kW = 3 000 W.</a:t>
+              <a:t>1. P</a:t>
+            </a:r>
+            <a:r>
+              <a:rPr sz="2063" b="0" baseline="-25000">
+                <a:solidFill>
+                  <a:srgbClr val="111111"/>
+                </a:solidFill>
+                <a:latin typeface="Calibri"/>
+                <a:ea typeface="Calibri"/>
+                <a:cs typeface="Calibri"/>
+              </a:rPr>
+              <a:t>in</a:t>
+            </a:r>
+            <a:r>
+              <a:rPr sz="2063" b="0">
+                <a:solidFill>
+                  <a:srgbClr val="111111"/>
+                </a:solidFill>
+                <a:latin typeface="Calibri"/>
+                <a:ea typeface="Calibri"/>
+                <a:cs typeface="Calibri"/>
+              </a:rPr>
+              <a:t> = 2,4/0,80 = 3,0 kW = 3 000 W.</a:t>
             </a:r>
           </a:p>
           <a:p xmlns:a="http://schemas.openxmlformats.org/drawingml/2006/main">
@@ -12485,7 +12727,51 @@
                 <a:ea typeface="Calibri"/>
                 <a:cs typeface="Calibri"/>
               </a:rPr>
-              <a:t>Pᵢₙ = Paxel/η</a:t>
+              <a:t>P</a:t>
+            </a:r>
+            <a:r>
+              <a:rPr sz="2400" b="1" baseline="-25000">
+                <a:solidFill>
+                  <a:srgbClr val="064F91"/>
+                </a:solidFill>
+                <a:latin typeface="Calibri"/>
+                <a:ea typeface="Calibri"/>
+                <a:cs typeface="Calibri"/>
+              </a:rPr>
+              <a:t>in</a:t>
+            </a:r>
+            <a:r>
+              <a:rPr sz="2400" b="1">
+                <a:solidFill>
+                  <a:srgbClr val="064F91"/>
+                </a:solidFill>
+                <a:latin typeface="Calibri"/>
+                <a:ea typeface="Calibri"/>
+                <a:cs typeface="Calibri"/>
+              </a:rPr>
+              <a:t> = P</a:t>
+            </a:r>
+            <a:r>
+              <a:rPr sz="2400" b="1" baseline="-25000">
+                <a:solidFill>
+                  <a:srgbClr val="064F91"/>
+                </a:solidFill>
+                <a:latin typeface="Calibri"/>
+                <a:ea typeface="Calibri"/>
+                <a:cs typeface="Calibri"/>
+              </a:rPr>
+              <a:t>axel</a:t>
+            </a:r>
+            <a:r>
+              <a:rPr sz="2400" b="1">
+                <a:solidFill>
+                  <a:srgbClr val="064F91"/>
+                </a:solidFill>
+                <a:latin typeface="Calibri"/>
+                <a:ea typeface="Calibri"/>
+                <a:cs typeface="Calibri"/>
+              </a:rPr>
+              <a:t>/η</a:t>
             </a:r>
           </a:p>
           <a:p xmlns:a="http://schemas.openxmlformats.org/drawingml/2006/main">
@@ -12530,7 +12816,29 @@
                 <a:ea typeface="Calibri"/>
                 <a:cs typeface="Calibri"/>
               </a:rPr>
-              <a:t> = Pᵢₙ/(√3 · U</a:t>
+              <a:t> = P</a:t>
+            </a:r>
+            <a:r>
+              <a:rPr sz="2400" b="1" baseline="-25000">
+                <a:solidFill>
+                  <a:srgbClr val="064F91"/>
+                </a:solidFill>
+                <a:latin typeface="Calibri"/>
+                <a:ea typeface="Calibri"/>
+                <a:cs typeface="Calibri"/>
+              </a:rPr>
+              <a:t>in</a:t>
+            </a:r>
+            <a:r>
+              <a:rPr sz="2400" b="1">
+                <a:solidFill>
+                  <a:srgbClr val="064F91"/>
+                </a:solidFill>
+                <a:latin typeface="Calibri"/>
+                <a:ea typeface="Calibri"/>
+                <a:cs typeface="Calibri"/>
+              </a:rPr>
+              <a:t>/(√3 · U</a:t>
             </a:r>
             <a:r>
               <a:rPr sz="2400" b="1" baseline="-25000">
@@ -12609,7 +12917,29 @@
                 <a:ea typeface="Calibri"/>
                 <a:cs typeface="Calibri"/>
               </a:rPr>
-              <a:t>Paxel är effekten på axeln och P</a:t>
+              <a:t>P</a:t>
+            </a:r>
+            <a:r>
+              <a:rPr sz="2100" b="0" baseline="-25000">
+                <a:solidFill>
+                  <a:srgbClr val="111111"/>
+                </a:solidFill>
+                <a:latin typeface="Calibri"/>
+                <a:ea typeface="Calibri"/>
+                <a:cs typeface="Calibri"/>
+              </a:rPr>
+              <a:t>axel</a:t>
+            </a:r>
+            <a:r>
+              <a:rPr sz="2100" b="0">
+                <a:solidFill>
+                  <a:srgbClr val="111111"/>
+                </a:solidFill>
+                <a:latin typeface="Calibri"/>
+                <a:ea typeface="Calibri"/>
+                <a:cs typeface="Calibri"/>
+              </a:rPr>
+              <a:t> är effekten på axeln och P</a:t>
             </a:r>
             <a:r>
               <a:rPr sz="2100" b="0" baseline="-25000">
@@ -12688,7 +13018,29 @@
                 <a:ea typeface="Calibri"/>
                 <a:cs typeface="Calibri"/>
               </a:rPr>
-              <a:t>Förutsättningar: Paxel = 5,5 kW, η = 0,88, PF = 0,80 och U</a:t>
+              <a:t>Förutsättningar: P</a:t>
+            </a:r>
+            <a:r>
+              <a:rPr sz="2025" b="0" baseline="-25000">
+                <a:solidFill>
+                  <a:srgbClr val="111111"/>
+                </a:solidFill>
+                <a:latin typeface="Calibri"/>
+                <a:ea typeface="Calibri"/>
+                <a:cs typeface="Calibri"/>
+              </a:rPr>
+              <a:t>axel</a:t>
+            </a:r>
+            <a:r>
+              <a:rPr sz="2025" b="0">
+                <a:solidFill>
+                  <a:srgbClr val="111111"/>
+                </a:solidFill>
+                <a:latin typeface="Calibri"/>
+                <a:ea typeface="Calibri"/>
+                <a:cs typeface="Calibri"/>
+              </a:rPr>
+              <a:t> = 5,5 kW, η = 0,88, PF = 0,80 och U</a:t>
             </a:r>
             <a:r>
               <a:rPr sz="2025" b="0" baseline="-25000">
@@ -13580,7 +13932,29 @@
                 <a:ea typeface="Calibri"/>
                 <a:cs typeface="Calibri"/>
               </a:rPr>
-              <a:t>En motor ger Paxel = 5,5 kW med η = 0,88 och PF = 0,80 vid U</a:t>
+              <a:t>En motor ger P</a:t>
+            </a:r>
+            <a:r>
+              <a:rPr sz="2400" b="0" baseline="-25000">
+                <a:solidFill>
+                  <a:srgbClr val="111111"/>
+                </a:solidFill>
+                <a:latin typeface="Calibri"/>
+                <a:ea typeface="Calibri"/>
+                <a:cs typeface="Calibri"/>
+              </a:rPr>
+              <a:t>axel</a:t>
+            </a:r>
+            <a:r>
+              <a:rPr sz="2400" b="0">
+                <a:solidFill>
+                  <a:srgbClr val="111111"/>
+                </a:solidFill>
+                <a:latin typeface="Calibri"/>
+                <a:ea typeface="Calibri"/>
+                <a:cs typeface="Calibri"/>
+              </a:rPr>
+              <a:t> = 5,5 kW med η = 0,88 och PF = 0,80 vid U</a:t>
             </a:r>
             <a:r>
               <a:rPr sz="2400" b="0" baseline="-25000">
@@ -13732,7 +14106,7 @@
           <p:nvPr/>
         </p:nvPicPr>
         <p:blipFill>
-          <a:blip r:embed="rId3"/>
+          <a:blip r:embed="rId4"/>
           <a:stretch>
             <a:fillRect/>
           </a:stretch>
@@ -14694,7 +15068,29 @@
                 <a:ea typeface="Calibri"/>
                 <a:cs typeface="Calibri"/>
               </a:rPr>
-              <a:t>Ptotal = P₁ + P₂ + P₃</a:t>
+              <a:t>P</a:t>
+            </a:r>
+            <a:r>
+              <a:rPr sz="2400" b="1" baseline="-25000">
+                <a:solidFill>
+                  <a:srgbClr val="064F91"/>
+                </a:solidFill>
+                <a:latin typeface="Calibri"/>
+                <a:ea typeface="Calibri"/>
+                <a:cs typeface="Calibri"/>
+              </a:rPr>
+              <a:t>total</a:t>
+            </a:r>
+            <a:r>
+              <a:rPr sz="2400" b="1">
+                <a:solidFill>
+                  <a:srgbClr val="064F91"/>
+                </a:solidFill>
+                <a:latin typeface="Calibri"/>
+                <a:ea typeface="Calibri"/>
+                <a:cs typeface="Calibri"/>
+              </a:rPr>
+              <a:t> = P₁ + P₂ + P₃</a:t>
             </a:r>
           </a:p>
         </p:txBody>
@@ -15294,7 +15690,7 @@
           <p:nvPr/>
         </p:nvPicPr>
         <p:blipFill>
-          <a:blip r:embed="rId3"/>
+          <a:blip r:embed="rId4"/>
           <a:stretch>
             <a:fillRect/>
           </a:stretch>

--- a/sjoskolan/vecka-41/aktuell/v41_02_Y_och_trefaseffekt_elev.pptx
+++ b/sjoskolan/vecka-41/aktuell/v41_02_Y_och_trefaseffekt_elev.pptx
@@ -10858,7 +10858,29 @@
                 <a:ea typeface="Calibri"/>
                 <a:cs typeface="Calibri"/>
               </a:rPr>
-              <a:t>3. Pförlust = 3,0 − 2,4 = 0,60 kW.</a:t>
+              <a:t>3. P</a:t>
+            </a:r>
+            <a:r>
+              <a:rPr sz="2063" b="0" baseline="-25000">
+                <a:solidFill>
+                  <a:srgbClr val="111111"/>
+                </a:solidFill>
+                <a:latin typeface="Calibri"/>
+                <a:ea typeface="Calibri"/>
+                <a:cs typeface="Calibri"/>
+              </a:rPr>
+              <a:t>förlust</a:t>
+            </a:r>
+            <a:r>
+              <a:rPr sz="2063" b="0">
+                <a:solidFill>
+                  <a:srgbClr val="111111"/>
+                </a:solidFill>
+                <a:latin typeface="Calibri"/>
+                <a:ea typeface="Calibri"/>
+                <a:cs typeface="Calibri"/>
+              </a:rPr>
+              <a:t> = 3,0 − 2,4 = 0,60 kW.</a:t>
             </a:r>
           </a:p>
         </p:txBody>

--- a/sjoskolan/vecka-41/aktuell/v41_02_Y_och_trefaseffekt_elev.pptx
+++ b/sjoskolan/vecka-41/aktuell/v41_02_Y_och_trefaseffekt_elev.pptx
@@ -4048,7 +4048,7 @@
                 <a:ea typeface="Calibri"/>
                 <a:cs typeface="Calibri"/>
               </a:rPr>
-              <a:t>Förutsättningar: Symmetrisk källa och tre lika resistorer på 40 Ω. U</a:t>
+              <a:t>Förutsättningar: Landström vid kaj, 50 Hz. Symmetrisk källa och tre lika resistorer på 40 Ω. U</a:t>
             </a:r>
             <a:r>
               <a:rPr sz="2025" b="0" baseline="-25000">
@@ -4939,7 +4939,7 @@
                 <a:ea typeface="Calibri"/>
                 <a:cs typeface="Calibri"/>
               </a:rPr>
-              <a:t>Förutsättningar: Y-last med tre 40 Ω-resistorer och U</a:t>
+              <a:t>Förutsättningar: Landström vid kaj, 50 Hz. Y-last med tre 40 Ω-resistorer och U</a:t>
             </a:r>
             <a:r>
               <a:rPr sz="2025" b="0" baseline="-25000">
@@ -5875,7 +5875,7 @@
                 <a:ea typeface="Calibri"/>
                 <a:cs typeface="Calibri"/>
               </a:rPr>
-              <a:t>Förutsättningar: Symmetrisk Δ-last, tre resistorer på 40 Ω och U</a:t>
+              <a:t>Förutsättningar: Landström vid kaj, 50 Hz. Symmetrisk Δ-last, tre resistorer på 40 Ω och U</a:t>
             </a:r>
             <a:r>
               <a:rPr sz="2025" b="0" baseline="-25000">
@@ -6733,7 +6733,7 @@
                 <a:ea typeface="Calibri"/>
                 <a:cs typeface="Calibri"/>
               </a:rPr>
-              <a:t>Förutsättningar: Symmetrisk sinusformad last, U</a:t>
+              <a:t>Förutsättningar: Landström vid kaj, 50 Hz. Symmetrisk sinusformad last, U</a:t>
             </a:r>
             <a:r>
               <a:rPr sz="2025" b="0" baseline="-25000">
@@ -7636,7 +7636,7 @@
                 <a:ea typeface="Calibri"/>
                 <a:cs typeface="Calibri"/>
               </a:rPr>
-              <a:t>Förutsättningar: U</a:t>
+              <a:t>Förutsättningar: Landström vid kaj, 50 Hz. U</a:t>
             </a:r>
             <a:r>
               <a:rPr sz="2025" b="0" baseline="-25000">
@@ -11345,7 +11345,7 @@
                 <a:ea typeface="Calibri"/>
                 <a:cs typeface="Calibri"/>
               </a:rPr>
-              <a:t>Förutsättningar: Motorn är märkt Δ/Y 230/400 V. Matningen är 400 V mellan faserna.</a:t>
+              <a:t>Förutsättningar: Landström vid kaj, 50 Hz. Motorn är märkt Δ/Y 230/400 V. Matningen är 400 V mellan faserna.</a:t>
             </a:r>
           </a:p>
         </p:txBody>
@@ -12115,7 +12115,7 @@
                 <a:ea typeface="Calibri"/>
                 <a:cs typeface="Calibri"/>
               </a:rPr>
-              <a:t>Förutsättningar: Nätet ger 400 V mellan faserna. Frågan gäller bara vilken koppling motorn ska ha i drift.</a:t>
+              <a:t>Förutsättningar: Landström vid kaj, 50 Hz. Nätet ger 400 V mellan faserna. Frågan gäller bara vilken koppling motorn ska ha i drift.</a:t>
             </a:r>
           </a:p>
         </p:txBody>
@@ -13040,7 +13040,7 @@
                 <a:ea typeface="Calibri"/>
                 <a:cs typeface="Calibri"/>
               </a:rPr>
-              <a:t>Förutsättningar: P</a:t>
+              <a:t>Förutsättningar: Landström vid kaj, 50 Hz. P</a:t>
             </a:r>
             <a:r>
               <a:rPr sz="2025" b="0" baseline="-25000">
@@ -14456,7 +14456,7 @@
                 <a:ea typeface="Calibri"/>
                 <a:cs typeface="Calibri"/>
               </a:rPr>
-              <a:t>Förutsättningar: Ideal symmetrisk trefastransformator, 100 kVA och 10 kV/400 V.</a:t>
+              <a:t>Förutsättningar: Nätstation i land. Ideal symmetrisk trefastransformator, 100 kVA och 10 kV/400 V.</a:t>
             </a:r>
           </a:p>
         </p:txBody>

--- a/sjoskolan/vecka-41/aktuell/v41_02_Y_och_trefaseffekt_elev.pptx
+++ b/sjoskolan/vecka-41/aktuell/v41_02_Y_och_trefaseffekt_elev.pptx
@@ -10522,7 +10522,7 @@
                 <a:ea typeface="Calibri"/>
                 <a:cs typeface="Calibri"/>
               </a:rPr>
-              <a:t> = 2,4 kW, η = 0,80, PF = 0,75 och U</a:t>
+              <a:t> = 3,0 kW, η = 0,80, PF = 0,75 och U</a:t>
             </a:r>
             <a:r>
               <a:rPr sz="2175" b="0" baseline="-25000">
@@ -10544,7 +10544,7 @@
                 <a:ea typeface="Calibri"/>
                 <a:cs typeface="Calibri"/>
               </a:rPr>
-              <a:t> = 400 V. Symmetrisk trefas.</a:t>
+              <a:t> = 440 V ombord. Symmetrisk trefas.</a:t>
             </a:r>
           </a:p>
         </p:txBody>
@@ -10790,7 +10790,7 @@
                 <a:ea typeface="Calibri"/>
                 <a:cs typeface="Calibri"/>
               </a:rPr>
-              <a:t> = 2,4/0,80 = 3,0 kW = 3 000 W.</a:t>
+              <a:t> = 3,0/0,80 = 3,75 kW = 3 750 W.</a:t>
             </a:r>
           </a:p>
           <a:p xmlns:a="http://schemas.openxmlformats.org/drawingml/2006/main">
@@ -10835,7 +10835,7 @@
                 <a:ea typeface="Calibri"/>
                 <a:cs typeface="Calibri"/>
               </a:rPr>
-              <a:t> = 3 000/(√3 · 400 · 0,75) ≈ 5,77 A.</a:t>
+              <a:t> = 3 750/(√3 · 440 · 0,75) ≈ 6,56 A.</a:t>
             </a:r>
           </a:p>
           <a:p xmlns:a="http://schemas.openxmlformats.org/drawingml/2006/main">
@@ -10880,7 +10880,7 @@
                 <a:ea typeface="Calibri"/>
                 <a:cs typeface="Calibri"/>
               </a:rPr>
-              <a:t> = 3,0 − 2,4 = 0,60 kW.</a:t>
+              <a:t> = 3,75 − 3,0 = 0,75 kW.</a:t>
             </a:r>
           </a:p>
         </p:txBody>
@@ -11979,7 +11979,7 @@
                 <a:ea typeface="Calibri"/>
                 <a:cs typeface="Calibri"/>
               </a:rPr>
-              <a:t>Jämför nätets U</a:t>
+              <a:t>Nätets U</a:t>
             </a:r>
             <a:r>
               <a:rPr sz="2400" b="1" baseline="-25000">
@@ -12001,7 +12001,7 @@
                 <a:ea typeface="Calibri"/>
                 <a:cs typeface="Calibri"/>
               </a:rPr>
-              <a:t> med båda märkvärdena</a:t>
+              <a:t> = märkvärdet för driftkopplingen</a:t>
             </a:r>
           </a:p>
         </p:txBody>
@@ -16695,7 +16695,7 @@
                 <a:ea typeface="Calibri"/>
                 <a:cs typeface="Calibri"/>
               </a:rPr>
-              <a:t>I symmetrisk Δ är grenspänning och linjespänning lika.</a:t>
+              <a:t>I Δ är grenspänning och linjespänning alltid lika.</a:t>
             </a:r>
           </a:p>
         </p:txBody>
@@ -18535,6 +18535,30 @@
                 <a:cs typeface="Calibri"/>
               </a:rPr>
               <a:t>Vid sinusform gäller PF = cos φ.</a:t>
+            </a:r>
+          </a:p>
+          <a:p xmlns:a="http://schemas.openxmlformats.org/drawingml/2006/main">
+            <a:pPr algn="l">
+              <a:buNone/>
+              <a:defRPr sz="2400" b="0">
+                <a:solidFill>
+                  <a:srgbClr val="111111"/>
+                </a:solidFill>
+                <a:latin typeface="Calibri"/>
+                <a:ea typeface="Calibri"/>
+                <a:cs typeface="Calibri"/>
+              </a:defRPr>
+            </a:pPr>
+            <a:r>
+              <a:rPr sz="2400" b="0">
+                <a:solidFill>
+                  <a:srgbClr val="111111"/>
+                </a:solidFill>
+                <a:latin typeface="Calibri"/>
+                <a:ea typeface="Calibri"/>
+                <a:cs typeface="Calibri"/>
+              </a:rPr>
+              <a:t>Osymmetrisk last: summera fasernas aktiva effekter.</a:t>
             </a:r>
           </a:p>
         </p:txBody>

--- a/sjoskolan/vecka-41/aktuell/v41_02_Y_och_trefaseffekt_elev.pptx
+++ b/sjoskolan/vecka-41/aktuell/v41_02_Y_och_trefaseffekt_elev.pptx
@@ -9060,7 +9060,29 @@
                 <a:ea typeface="Calibri"/>
                 <a:cs typeface="Calibri"/>
               </a:rPr>
-              <a:t>Märkningen Δ/Y 230/400 V anger spänningen för varje koppling.</a:t>
+              <a:t>Märkningen Δ/Y 230/400 V anger nätets U</a:t>
+            </a:r>
+            <a:r>
+              <a:rPr sz="1800" b="0" baseline="-25000">
+                <a:solidFill>
+                  <a:srgbClr val="111111"/>
+                </a:solidFill>
+                <a:latin typeface="Calibri"/>
+                <a:ea typeface="Calibri"/>
+                <a:cs typeface="Calibri"/>
+              </a:rPr>
+              <a:t>L</a:t>
+            </a:r>
+            <a:r>
+              <a:rPr sz="1800" b="0">
+                <a:solidFill>
+                  <a:srgbClr val="111111"/>
+                </a:solidFill>
+                <a:latin typeface="Calibri"/>
+                <a:ea typeface="Calibri"/>
+                <a:cs typeface="Calibri"/>
+              </a:rPr>
+              <a:t> för varje koppling.</a:t>
             </a:r>
           </a:p>
           <a:p xmlns:a="http://schemas.openxmlformats.org/drawingml/2006/main">
@@ -9333,7 +9355,7 @@
       </p:sp>
       <p:pic xmlns:a="http://schemas.openxmlformats.org/drawingml/2006/main" xmlns:r="http://schemas.openxmlformats.org/officeDocument/2006/relationships">
         <p:nvPicPr>
-          <p:cNvPr id="9" name="Figur: Motorns kopplingsplint: Y med bygel över" descr="Motorns kopplingsplint: Y med bygel över W2, U2, V2 och Δ med byglar U1–W2, V1–U2, W1–V2"/>
+          <p:cNvPr id="9" name="Figur: Motorns kopplingsplint: Y med bygel över" descr="Motorns kopplingsplint: Y med bygel över W2, U2, V2 ger lindningsspänningen UL/√3; Δ med byglar U1–W2, V1–U2, W1–V2 ger lindningsspänningen UL"/>
           <p:cNvPicPr>
             <a:picLocks noChangeAspect="1"/>
           </p:cNvPicPr>
@@ -9348,7 +9370,7 @@
         <p:spPr>
           <a:xfrm>
             <a:off x="4892040" y="1645920"/>
-            <a:ext cx="3886200" cy="3071293"/>
+            <a:ext cx="3886200" cy="3252383"/>
           </a:xfrm>
           <a:prstGeom prst="rect">
             <a:avLst/>
@@ -17496,7 +17518,51 @@
                 <a:ea typeface="Calibri"/>
                 <a:cs typeface="Calibri"/>
               </a:rPr>
-              <a:t>I Y ligger varje lastgren mellan en fas och stjärnpunkten.</a:t>
+              <a:t>I Y ligger varje lastgren mellan en fas och stjärnpunkten: U</a:t>
+            </a:r>
+            <a:r>
+              <a:rPr sz="2100" b="0" baseline="-25000">
+                <a:solidFill>
+                  <a:srgbClr val="111111"/>
+                </a:solidFill>
+                <a:latin typeface="Calibri"/>
+                <a:ea typeface="Calibri"/>
+                <a:cs typeface="Calibri"/>
+              </a:rPr>
+              <a:t>gren</a:t>
+            </a:r>
+            <a:r>
+              <a:rPr sz="2100" b="0">
+                <a:solidFill>
+                  <a:srgbClr val="111111"/>
+                </a:solidFill>
+                <a:latin typeface="Calibri"/>
+                <a:ea typeface="Calibri"/>
+                <a:cs typeface="Calibri"/>
+              </a:rPr>
+              <a:t> = U</a:t>
+            </a:r>
+            <a:r>
+              <a:rPr sz="2100" b="0" baseline="-25000">
+                <a:solidFill>
+                  <a:srgbClr val="111111"/>
+                </a:solidFill>
+                <a:latin typeface="Calibri"/>
+                <a:ea typeface="Calibri"/>
+                <a:cs typeface="Calibri"/>
+              </a:rPr>
+              <a:t>F</a:t>
+            </a:r>
+            <a:r>
+              <a:rPr sz="2100" b="0">
+                <a:solidFill>
+                  <a:srgbClr val="111111"/>
+                </a:solidFill>
+                <a:latin typeface="Calibri"/>
+                <a:ea typeface="Calibri"/>
+                <a:cs typeface="Calibri"/>
+              </a:rPr>
+              <a:t>.</a:t>
             </a:r>
           </a:p>
           <a:p xmlns:a="http://schemas.openxmlformats.org/drawingml/2006/main">
@@ -17520,7 +17586,51 @@
                 <a:ea typeface="Calibri"/>
                 <a:cs typeface="Calibri"/>
               </a:rPr>
-              <a:t>I Δ ligger varje lastgren mellan två faser.</a:t>
+              <a:t>I Δ ligger varje lastgren mellan två faser: U</a:t>
+            </a:r>
+            <a:r>
+              <a:rPr sz="2100" b="0" baseline="-25000">
+                <a:solidFill>
+                  <a:srgbClr val="111111"/>
+                </a:solidFill>
+                <a:latin typeface="Calibri"/>
+                <a:ea typeface="Calibri"/>
+                <a:cs typeface="Calibri"/>
+              </a:rPr>
+              <a:t>gren</a:t>
+            </a:r>
+            <a:r>
+              <a:rPr sz="2100" b="0">
+                <a:solidFill>
+                  <a:srgbClr val="111111"/>
+                </a:solidFill>
+                <a:latin typeface="Calibri"/>
+                <a:ea typeface="Calibri"/>
+                <a:cs typeface="Calibri"/>
+              </a:rPr>
+              <a:t> = U</a:t>
+            </a:r>
+            <a:r>
+              <a:rPr sz="2100" b="0" baseline="-25000">
+                <a:solidFill>
+                  <a:srgbClr val="111111"/>
+                </a:solidFill>
+                <a:latin typeface="Calibri"/>
+                <a:ea typeface="Calibri"/>
+                <a:cs typeface="Calibri"/>
+              </a:rPr>
+              <a:t>L</a:t>
+            </a:r>
+            <a:r>
+              <a:rPr sz="2100" b="0">
+                <a:solidFill>
+                  <a:srgbClr val="111111"/>
+                </a:solidFill>
+                <a:latin typeface="Calibri"/>
+                <a:ea typeface="Calibri"/>
+                <a:cs typeface="Calibri"/>
+              </a:rPr>
+              <a:t>.</a:t>
             </a:r>
           </a:p>
         </p:txBody>
@@ -17802,22 +17912,22 @@
       </p:sp>
       <p:pic xmlns:a="http://schemas.openxmlformats.org/drawingml/2006/main" xmlns:r="http://schemas.openxmlformats.org/officeDocument/2006/relationships">
         <p:nvPicPr>
-          <p:cNvPr id="31" name="schema-y-delta" descr="Y: tre grenar mellan fas och stjärnpunkt. Δ: tre grenar mellan två faser."/>
+          <p:cNvPr id="31" name="schema-y-delta" descr="Y: varje gren ligger mellan en fas och stjärnpunkten, Ugren = UL/√3. Δ: varje gren ligger mellan två faser, Ugren = UL."/>
           <p:cNvPicPr>
             <a:picLocks noChangeAspect="1"/>
           </p:cNvPicPr>
           <p:nvPr/>
         </p:nvPicPr>
         <p:blipFill>
-          <a:blip r:embed="rId3"/>
+          <a:blip r:embed="rId5"/>
           <a:stretch>
             <a:fillRect/>
           </a:stretch>
         </p:blipFill>
         <p:spPr>
           <a:xfrm>
-            <a:off x="1542647" y="2395728"/>
-            <a:ext cx="6058706" cy="2340864"/>
+            <a:off x="2059853" y="2395728"/>
+            <a:ext cx="5024293" cy="2340864"/>
           </a:xfrm>
           <a:prstGeom prst="rect">
             <a:avLst/>
@@ -17981,7 +18091,51 @@
                 <a:ea typeface="Calibri"/>
                 <a:cs typeface="Calibri"/>
               </a:rPr>
-              <a:t>I Y passerar linjeströmmen genom en lastgren.</a:t>
+              <a:t>I Y går linjeströmmen rakt genom en gren: I</a:t>
+            </a:r>
+            <a:r>
+              <a:rPr sz="1900" b="0" baseline="-25000">
+                <a:solidFill>
+                  <a:srgbClr val="111111"/>
+                </a:solidFill>
+                <a:latin typeface="Calibri"/>
+                <a:ea typeface="Calibri"/>
+                <a:cs typeface="Calibri"/>
+              </a:rPr>
+              <a:t>L</a:t>
+            </a:r>
+            <a:r>
+              <a:rPr sz="1900" b="0">
+                <a:solidFill>
+                  <a:srgbClr val="111111"/>
+                </a:solidFill>
+                <a:latin typeface="Calibri"/>
+                <a:ea typeface="Calibri"/>
+                <a:cs typeface="Calibri"/>
+              </a:rPr>
+              <a:t> = I</a:t>
+            </a:r>
+            <a:r>
+              <a:rPr sz="1900" b="0" baseline="-25000">
+                <a:solidFill>
+                  <a:srgbClr val="111111"/>
+                </a:solidFill>
+                <a:latin typeface="Calibri"/>
+                <a:ea typeface="Calibri"/>
+                <a:cs typeface="Calibri"/>
+              </a:rPr>
+              <a:t>gren</a:t>
+            </a:r>
+            <a:r>
+              <a:rPr sz="1900" b="0">
+                <a:solidFill>
+                  <a:srgbClr val="111111"/>
+                </a:solidFill>
+                <a:latin typeface="Calibri"/>
+                <a:ea typeface="Calibri"/>
+                <a:cs typeface="Calibri"/>
+              </a:rPr>
+              <a:t>.</a:t>
             </a:r>
           </a:p>
           <a:p xmlns:a="http://schemas.openxmlformats.org/drawingml/2006/main">
@@ -18005,7 +18159,73 @@
                 <a:ea typeface="Calibri"/>
                 <a:cs typeface="Calibri"/>
               </a:rPr>
-              <a:t>I symmetrisk Δ är linjeströmmen en skillnad av grenvisare.</a:t>
+              <a:t>I Δ är linjeströmmen en vektoriell skillnad: I</a:t>
+            </a:r>
+            <a:r>
+              <a:rPr sz="1900" b="0" baseline="-25000">
+                <a:solidFill>
+                  <a:srgbClr val="111111"/>
+                </a:solidFill>
+                <a:latin typeface="Calibri"/>
+                <a:ea typeface="Calibri"/>
+                <a:cs typeface="Calibri"/>
+              </a:rPr>
+              <a:t>L1</a:t>
+            </a:r>
+            <a:r>
+              <a:rPr sz="1900" b="0">
+                <a:solidFill>
+                  <a:srgbClr val="111111"/>
+                </a:solidFill>
+                <a:latin typeface="Calibri"/>
+                <a:ea typeface="Calibri"/>
+                <a:cs typeface="Calibri"/>
+              </a:rPr>
+              <a:t> = I</a:t>
+            </a:r>
+            <a:r>
+              <a:rPr sz="1900" b="0" baseline="-25000">
+                <a:solidFill>
+                  <a:srgbClr val="111111"/>
+                </a:solidFill>
+                <a:latin typeface="Calibri"/>
+                <a:ea typeface="Calibri"/>
+                <a:cs typeface="Calibri"/>
+              </a:rPr>
+              <a:t>12</a:t>
+            </a:r>
+            <a:r>
+              <a:rPr sz="1900" b="0">
+                <a:solidFill>
+                  <a:srgbClr val="111111"/>
+                </a:solidFill>
+                <a:latin typeface="Calibri"/>
+                <a:ea typeface="Calibri"/>
+                <a:cs typeface="Calibri"/>
+              </a:rPr>
+              <a:t> − I</a:t>
+            </a:r>
+            <a:r>
+              <a:rPr sz="1900" b="0" baseline="-25000">
+                <a:solidFill>
+                  <a:srgbClr val="111111"/>
+                </a:solidFill>
+                <a:latin typeface="Calibri"/>
+                <a:ea typeface="Calibri"/>
+                <a:cs typeface="Calibri"/>
+              </a:rPr>
+              <a:t>31</a:t>
+            </a:r>
+            <a:r>
+              <a:rPr sz="1900" b="0">
+                <a:solidFill>
+                  <a:srgbClr val="111111"/>
+                </a:solidFill>
+                <a:latin typeface="Calibri"/>
+                <a:ea typeface="Calibri"/>
+                <a:cs typeface="Calibri"/>
+              </a:rPr>
+              <a:t>.</a:t>
             </a:r>
           </a:p>
         </p:txBody>
@@ -18331,7 +18551,7 @@
       </p:sp>
       <p:pic xmlns:a="http://schemas.openxmlformats.org/drawingml/2006/main" xmlns:r="http://schemas.openxmlformats.org/officeDocument/2006/relationships">
         <p:nvPicPr>
-          <p:cNvPr id="9" name="Figur: Δ-last där linjeströmmen i L1 delar sig " descr="Δ-last där linjeströmmen i L1 delar sig i två grenströmmar"/>
+          <p:cNvPr id="9" name="Figur: Δ-last där linjeströmmen i L1 delar sig " descr="Δ-last: linjeströmmen IL1 delar sig i grenströmmarna I12 och I31. Visarbilden visar IL1 = I12 − I31 som vektoriell skillnad, √3 gånger grenströmmen"/>
           <p:cNvPicPr>
             <a:picLocks noChangeAspect="1"/>
           </p:cNvPicPr>
@@ -18345,8 +18565,8 @@
         </p:blipFill>
         <p:spPr>
           <a:xfrm>
-            <a:off x="4892040" y="1645920"/>
-            <a:ext cx="3886200" cy="3252383"/>
+            <a:off x="4578240" y="1645920"/>
+            <a:ext cx="4200000" cy="2907941"/>
           </a:xfrm>
           <a:prstGeom prst="rect">
             <a:avLst/>

--- a/sjoskolan/vecka-41/aktuell/v41_02_Y_och_trefaseffekt_elev.pptx
+++ b/sjoskolan/vecka-41/aktuell/v41_02_Y_och_trefaseffekt_elev.pptx
@@ -10016,7 +10016,7 @@
         <p:spPr>
           <a:xfrm xmlns:a="http://schemas.openxmlformats.org/drawingml/2006/main">
             <a:off x="762000" y="1619250"/>
-            <a:ext cx="7620000" cy="1466850"/>
+            <a:ext cx="3977639" cy="1466850"/>
           </a:xfrm>
           <a:prstGeom xmlns:a="http://schemas.openxmlformats.org/drawingml/2006/main" prst="rect">
             <a:avLst/>
@@ -10044,7 +10044,7 @@
               </a:defRPr>
             </a:pPr>
             <a:r>
-              <a:rPr sz="2400" b="0">
+              <a:rPr sz="1900" b="0">
                 <a:solidFill>
                   <a:srgbClr val="111111"/>
                 </a:solidFill>
@@ -10068,7 +10068,7 @@
               </a:defRPr>
             </a:pPr>
             <a:r>
-              <a:rPr sz="2400" b="0">
+              <a:rPr sz="1900" b="0">
                 <a:solidFill>
                   <a:srgbClr val="111111"/>
                 </a:solidFill>
@@ -10098,7 +10098,7 @@
         <p:spPr>
           <a:xfrm xmlns:a="http://schemas.openxmlformats.org/drawingml/2006/main">
             <a:off x="762000" y="3200400"/>
-            <a:ext cx="7620000" cy="838200"/>
+            <a:ext cx="3977639" cy="838200"/>
           </a:xfrm>
           <a:prstGeom xmlns:a="http://schemas.openxmlformats.org/drawingml/2006/main" prst="rect">
             <a:avLst/>
@@ -10126,7 +10126,7 @@
               </a:defRPr>
             </a:pPr>
             <a:r>
-              <a:rPr sz="2925" b="1">
+              <a:rPr sz="2650" b="1">
                 <a:solidFill>
                   <a:srgbClr val="064F91"/>
                 </a:solidFill>
@@ -10137,7 +10137,7 @@
               <a:t>U</a:t>
             </a:r>
             <a:r>
-              <a:rPr sz="2925" b="1" baseline="-25000">
+              <a:rPr sz="2650" b="1" baseline="-25000">
                 <a:solidFill>
                   <a:srgbClr val="064F91"/>
                 </a:solidFill>
@@ -10148,7 +10148,7 @@
               <a:t>1,gren</a:t>
             </a:r>
             <a:r>
-              <a:rPr sz="2925" b="1">
+              <a:rPr sz="2650" b="1">
                 <a:solidFill>
                   <a:srgbClr val="064F91"/>
                 </a:solidFill>
@@ -10159,7 +10159,7 @@
               <a:t>/U</a:t>
             </a:r>
             <a:r>
-              <a:rPr sz="2925" b="1" baseline="-25000">
+              <a:rPr sz="2650" b="1" baseline="-25000">
                 <a:solidFill>
                   <a:srgbClr val="064F91"/>
                 </a:solidFill>
@@ -10170,7 +10170,7 @@
               <a:t>2,gren</a:t>
             </a:r>
             <a:r>
-              <a:rPr sz="2925" b="1">
+              <a:rPr sz="2650" b="1">
                 <a:solidFill>
                   <a:srgbClr val="064F91"/>
                 </a:solidFill>
@@ -10178,7 +10178,7 @@
                 <a:ea typeface="Calibri"/>
                 <a:cs typeface="Calibri"/>
               </a:rPr>
-              <a:t> = N₁/N₂</a:t>
+              <a:t> = N₁/N₂</a:t>
             </a:r>
           </a:p>
         </p:txBody>
@@ -10200,7 +10200,7 @@
         <p:spPr>
           <a:xfrm xmlns:a="http://schemas.openxmlformats.org/drawingml/2006/main">
             <a:off x="762000" y="4429125"/>
-            <a:ext cx="7620000" cy="1352550"/>
+            <a:ext cx="3977639" cy="1352550"/>
           </a:xfrm>
           <a:prstGeom xmlns:a="http://schemas.openxmlformats.org/drawingml/2006/main" prst="rect">
             <a:avLst/>
@@ -10228,18 +10228,18 @@
               </a:defRPr>
             </a:pPr>
             <a:r>
-              <a:rPr sz="2250" b="0">
-                <a:solidFill>
-                  <a:srgbClr val="111111"/>
-                </a:solidFill>
-                <a:latin typeface="Calibri"/>
-                <a:ea typeface="Calibri"/>
-                <a:cs typeface="Calibri"/>
-              </a:rPr>
-              <a:t>I uppgifterna med angivna linjespänningar används S = √3 U</a:t>
-            </a:r>
-            <a:r>
-              <a:rPr sz="2250" b="0" baseline="-25000">
+              <a:rPr sz="1800" b="0">
+                <a:solidFill>
+                  <a:srgbClr val="111111"/>
+                </a:solidFill>
+                <a:latin typeface="Calibri"/>
+                <a:ea typeface="Calibri"/>
+                <a:cs typeface="Calibri"/>
+              </a:rPr>
+              <a:t>I uppgifterna med angivna linjespänningar används S = √3 U</a:t>
+            </a:r>
+            <a:r>
+              <a:rPr sz="1800" b="0" baseline="-25000">
                 <a:solidFill>
                   <a:srgbClr val="111111"/>
                 </a:solidFill>
@@ -10250,7 +10250,7 @@
               <a:t>L</a:t>
             </a:r>
             <a:r>
-              <a:rPr sz="2250" b="0">
+              <a:rPr sz="1800" b="0">
                 <a:solidFill>
                   <a:srgbClr val="111111"/>
                 </a:solidFill>
@@ -10261,7 +10261,7 @@
               <a:t>I</a:t>
             </a:r>
             <a:r>
-              <a:rPr sz="2250" b="0" baseline="-25000">
+              <a:rPr sz="1800" b="0" baseline="-25000">
                 <a:solidFill>
                   <a:srgbClr val="111111"/>
                 </a:solidFill>
@@ -10272,7 +10272,7 @@
               <a:t>L</a:t>
             </a:r>
             <a:r>
-              <a:rPr sz="2250" b="0">
+              <a:rPr sz="1800" b="0">
                 <a:solidFill>
                   <a:srgbClr val="111111"/>
                 </a:solidFill>
@@ -10296,7 +10296,7 @@
               </a:defRPr>
             </a:pPr>
             <a:r>
-              <a:rPr sz="2250" b="0">
+              <a:rPr sz="1800" b="0">
                 <a:solidFill>
                   <a:srgbClr val="111111"/>
                 </a:solidFill>
@@ -10367,6 +10367,30 @@
           </a:p>
         </p:txBody>
       </p:sp>
+      <p:pic xmlns:a="http://schemas.openxmlformats.org/drawingml/2006/main" xmlns:r="http://schemas.openxmlformats.org/officeDocument/2006/relationships">
+        <p:nvPicPr>
+          <p:cNvPr id="9" name="Figur: Trefastransformator Dyn: primär Δ 6,6 kV" descr="Trefastransformator Dyn: primär Δ 6,6 kV med U1,gren = 6 600 V, sekundär Y 440 V med U2,gren ≈ 254 V; N1/N2 = U1,gren/U2,gren"/>
+          <p:cNvPicPr>
+            <a:picLocks noChangeAspect="1"/>
+          </p:cNvPicPr>
+          <p:nvPr/>
+        </p:nvPicPr>
+        <p:blipFill>
+          <a:blip r:embed="rId3"/>
+          <a:stretch>
+            <a:fillRect/>
+          </a:stretch>
+        </p:blipFill>
+        <p:spPr>
+          <a:xfrm>
+            <a:off x="4892040" y="1645920"/>
+            <a:ext cx="3886200" cy="2426442"/>
+          </a:xfrm>
+          <a:prstGeom prst="rect">
+            <a:avLst/>
+          </a:prstGeom>
+        </p:spPr>
+      </p:pic>
     </p:spTree>
     <p:extLst>
       <p:ext uri="{BB962C8B-B14F-4D97-AF65-F5344CB8AC3E}">
@@ -18694,7 +18718,7 @@
         <p:spPr>
           <a:xfrm xmlns:a="http://schemas.openxmlformats.org/drawingml/2006/main">
             <a:off x="762000" y="1619250"/>
-            <a:ext cx="7620000" cy="1466850"/>
+            <a:ext cx="3977639" cy="1466850"/>
           </a:xfrm>
           <a:prstGeom xmlns:a="http://schemas.openxmlformats.org/drawingml/2006/main" prst="rect">
             <a:avLst/>
@@ -18722,7 +18746,7 @@
               </a:defRPr>
             </a:pPr>
             <a:r>
-              <a:rPr sz="2400" b="0">
+              <a:rPr sz="1750" b="0">
                 <a:solidFill>
                   <a:srgbClr val="111111"/>
                 </a:solidFill>
@@ -18746,15 +18770,15 @@
               </a:defRPr>
             </a:pPr>
             <a:r>
-              <a:rPr sz="2400" b="0">
-                <a:solidFill>
-                  <a:srgbClr val="111111"/>
-                </a:solidFill>
-                <a:latin typeface="Calibri"/>
-                <a:ea typeface="Calibri"/>
-                <a:cs typeface="Calibri"/>
-              </a:rPr>
-              <a:t>Vid sinusform gäller PF = cos φ.</a:t>
+              <a:rPr sz="1750" b="0">
+                <a:solidFill>
+                  <a:srgbClr val="111111"/>
+                </a:solidFill>
+                <a:latin typeface="Calibri"/>
+                <a:ea typeface="Calibri"/>
+                <a:cs typeface="Calibri"/>
+              </a:rPr>
+              <a:t>Vid sinusform gäller PF = cos φ.</a:t>
             </a:r>
           </a:p>
           <a:p xmlns:a="http://schemas.openxmlformats.org/drawingml/2006/main">
@@ -18770,7 +18794,7 @@
               </a:defRPr>
             </a:pPr>
             <a:r>
-              <a:rPr sz="2400" b="0">
+              <a:rPr sz="1750" b="0">
                 <a:solidFill>
                   <a:srgbClr val="111111"/>
                 </a:solidFill>
@@ -18800,7 +18824,7 @@
         <p:spPr>
           <a:xfrm xmlns:a="http://schemas.openxmlformats.org/drawingml/2006/main">
             <a:off x="762000" y="3200400"/>
-            <a:ext cx="7620000" cy="838200"/>
+            <a:ext cx="3977639" cy="838200"/>
           </a:xfrm>
           <a:prstGeom xmlns:a="http://schemas.openxmlformats.org/drawingml/2006/main" prst="rect">
             <a:avLst/>
@@ -18828,7 +18852,7 @@
               </a:defRPr>
             </a:pPr>
             <a:r>
-              <a:rPr sz="2925" b="1">
+              <a:rPr sz="2650" b="1">
                 <a:solidFill>
                   <a:srgbClr val="064F91"/>
                 </a:solidFill>
@@ -18836,10 +18860,10 @@
                 <a:ea typeface="Calibri"/>
                 <a:cs typeface="Calibri"/>
               </a:rPr>
-              <a:t>S = √3 U</a:t>
-            </a:r>
-            <a:r>
-              <a:rPr sz="2925" b="1" baseline="-25000">
+              <a:t>S = √3 U</a:t>
+            </a:r>
+            <a:r>
+              <a:rPr sz="2650" b="1" baseline="-25000">
                 <a:solidFill>
                   <a:srgbClr val="064F91"/>
                 </a:solidFill>
@@ -18850,7 +18874,7 @@
               <a:t>L</a:t>
             </a:r>
             <a:r>
-              <a:rPr sz="2925" b="1">
+              <a:rPr sz="2650" b="1">
                 <a:solidFill>
                   <a:srgbClr val="064F91"/>
                 </a:solidFill>
@@ -18861,7 +18885,7 @@
               <a:t>I</a:t>
             </a:r>
             <a:r>
-              <a:rPr sz="2925" b="1" baseline="-25000">
+              <a:rPr sz="2650" b="1" baseline="-25000">
                 <a:solidFill>
                   <a:srgbClr val="064F91"/>
                 </a:solidFill>
@@ -18872,7 +18896,7 @@
               <a:t>L</a:t>
             </a:r>
             <a:r>
-              <a:rPr sz="2925" b="1">
+              <a:rPr sz="2650" b="1">
                 <a:solidFill>
                   <a:srgbClr val="064F91"/>
                 </a:solidFill>
@@ -18880,10 +18904,10 @@
                 <a:ea typeface="Calibri"/>
                 <a:cs typeface="Calibri"/>
               </a:rPr>
-              <a:t>     P = √3 U</a:t>
-            </a:r>
-            <a:r>
-              <a:rPr sz="2925" b="1" baseline="-25000">
+              <a:t>     P = √3 U</a:t>
+            </a:r>
+            <a:r>
+              <a:rPr sz="2650" b="1" baseline="-25000">
                 <a:solidFill>
                   <a:srgbClr val="064F91"/>
                 </a:solidFill>
@@ -18894,7 +18918,7 @@
               <a:t>L</a:t>
             </a:r>
             <a:r>
-              <a:rPr sz="2925" b="1">
+              <a:rPr sz="2650" b="1">
                 <a:solidFill>
                   <a:srgbClr val="064F91"/>
                 </a:solidFill>
@@ -18905,7 +18929,7 @@
               <a:t>I</a:t>
             </a:r>
             <a:r>
-              <a:rPr sz="2925" b="1" baseline="-25000">
+              <a:rPr sz="2650" b="1" baseline="-25000">
                 <a:solidFill>
                   <a:srgbClr val="064F91"/>
                 </a:solidFill>
@@ -18916,7 +18940,7 @@
               <a:t>L</a:t>
             </a:r>
             <a:r>
-              <a:rPr sz="2925" b="1">
+              <a:rPr sz="2650" b="1">
                 <a:solidFill>
                   <a:srgbClr val="064F91"/>
                 </a:solidFill>
@@ -18924,7 +18948,7 @@
                 <a:ea typeface="Calibri"/>
                 <a:cs typeface="Calibri"/>
               </a:rPr>
-              <a:t> cos φ</a:t>
+              <a:t> cos φ</a:t>
             </a:r>
           </a:p>
         </p:txBody>
@@ -18946,7 +18970,7 @@
         <p:spPr>
           <a:xfrm xmlns:a="http://schemas.openxmlformats.org/drawingml/2006/main">
             <a:off x="762000" y="4429125"/>
-            <a:ext cx="7620000" cy="1352550"/>
+            <a:ext cx="3977639" cy="1352550"/>
           </a:xfrm>
           <a:prstGeom xmlns:a="http://schemas.openxmlformats.org/drawingml/2006/main" prst="rect">
             <a:avLst/>
@@ -18974,15 +18998,15 @@
               </a:defRPr>
             </a:pPr>
             <a:r>
-              <a:rPr sz="2250" b="0">
-                <a:solidFill>
-                  <a:srgbClr val="111111"/>
-                </a:solidFill>
-                <a:latin typeface="Calibri"/>
-                <a:ea typeface="Calibri"/>
-                <a:cs typeface="Calibri"/>
-              </a:rPr>
-              <a:t>440 V, 20 A och cos φ = 0,85 ger</a:t>
+              <a:rPr sz="2100" b="0">
+                <a:solidFill>
+                  <a:srgbClr val="111111"/>
+                </a:solidFill>
+                <a:latin typeface="Calibri"/>
+                <a:ea typeface="Calibri"/>
+                <a:cs typeface="Calibri"/>
+              </a:rPr>
+              <a:t>440 V, 20 A och cos φ = 0,85 ger</a:t>
             </a:r>
           </a:p>
           <a:p xmlns:a="http://schemas.openxmlformats.org/drawingml/2006/main">
@@ -18998,15 +19022,15 @@
               </a:defRPr>
             </a:pPr>
             <a:r>
-              <a:rPr sz="2250" b="0">
-                <a:solidFill>
-                  <a:srgbClr val="111111"/>
-                </a:solidFill>
-                <a:latin typeface="Calibri"/>
-                <a:ea typeface="Calibri"/>
-                <a:cs typeface="Calibri"/>
-              </a:rPr>
-              <a:t>S ≈ 15,2 kVA och P ≈ 13,0 kW.</a:t>
+              <a:rPr sz="2100" b="0">
+                <a:solidFill>
+                  <a:srgbClr val="111111"/>
+                </a:solidFill>
+                <a:latin typeface="Calibri"/>
+                <a:ea typeface="Calibri"/>
+                <a:cs typeface="Calibri"/>
+              </a:rPr>
+              <a:t>S ≈ 15,2 kVA och P ≈ 13,0 kW.</a:t>
             </a:r>
           </a:p>
         </p:txBody>
@@ -19069,6 +19093,30 @@
           </a:p>
         </p:txBody>
       </p:sp>
+      <p:pic xmlns:a="http://schemas.openxmlformats.org/drawingml/2006/main" xmlns:r="http://schemas.openxmlformats.org/officeDocument/2006/relationships">
+        <p:nvPicPr>
+          <p:cNvPr id="9" name="Figur: Effekttriangel för 440 V, 20 A och cos φ" descr="Effekttriangel för 440 V, 20 A och cos φ = 0,85: P ≈ 13,0 kW, Q ≈ 8,0 kvar och S ≈ 15,2 kVA"/>
+          <p:cNvPicPr>
+            <a:picLocks noChangeAspect="1"/>
+          </p:cNvPicPr>
+          <p:nvPr/>
+        </p:nvPicPr>
+        <p:blipFill>
+          <a:blip r:embed="rId3"/>
+          <a:stretch>
+            <a:fillRect/>
+          </a:stretch>
+        </p:blipFill>
+        <p:spPr>
+          <a:xfrm>
+            <a:off x="4892040" y="1645920"/>
+            <a:ext cx="3886200" cy="2890202"/>
+          </a:xfrm>
+          <a:prstGeom prst="rect">
+            <a:avLst/>
+          </a:prstGeom>
+        </p:spPr>
+      </p:pic>
     </p:spTree>
     <p:extLst>
       <p:ext uri="{BB962C8B-B14F-4D97-AF65-F5344CB8AC3E}">

--- a/sjoskolan/vecka-41/aktuell/v41_02_Y_och_trefaseffekt_elev.pptx
+++ b/sjoskolan/vecka-41/aktuell/v41_02_Y_och_trefaseffekt_elev.pptx
@@ -9355,14 +9355,14 @@
       </p:sp>
       <p:pic xmlns:a="http://schemas.openxmlformats.org/drawingml/2006/main" xmlns:r="http://schemas.openxmlformats.org/officeDocument/2006/relationships">
         <p:nvPicPr>
-          <p:cNvPr id="9" name="Figur: Motorns kopplingsplint: Y med bygel över" descr="Motorns kopplingsplint: Y med bygel över W2, U2, V2 ger lindningsspänningen UL/√3; Δ med byglar U1–W2, V1–U2, W1–V2 ger lindningsspänningen UL"/>
+          <p:cNvPr id="9" name="Figur: Motorns kopplingsplint i 3D: Y med bleck" descr="Motorns kopplingsplint i 3D: Y med bleck över W2, U2, V2 ger lindningsspänningen UL/√3; Δ med bleck U1–W2, V1–U2, W1–V2 ger lindningsspänningen UL"/>
           <p:cNvPicPr>
             <a:picLocks noChangeAspect="1"/>
           </p:cNvPicPr>
           <p:nvPr/>
         </p:nvPicPr>
         <p:blipFill>
-          <a:blip r:embed="rId3"/>
+          <a:blip r:embed="rId5"/>
           <a:stretch>
             <a:fillRect/>
           </a:stretch>
@@ -9370,7 +9370,7 @@
         <p:spPr>
           <a:xfrm>
             <a:off x="4892040" y="1645920"/>
-            <a:ext cx="3886200" cy="3252383"/>
+            <a:ext cx="3886200" cy="1881218"/>
           </a:xfrm>
           <a:prstGeom prst="rect">
             <a:avLst/>
@@ -10369,14 +10369,14 @@
       </p:sp>
       <p:pic xmlns:a="http://schemas.openxmlformats.org/drawingml/2006/main" xmlns:r="http://schemas.openxmlformats.org/officeDocument/2006/relationships">
         <p:nvPicPr>
-          <p:cNvPr id="9" name="Figur: Trefastransformator Dyn: primär Δ 6,6 kV" descr="Trefastransformator Dyn: primär Δ 6,6 kV med U1,gren = 6 600 V, sekundär Y 440 V med U2,gren ≈ 254 V; N1/N2 = U1,gren/U2,gren"/>
+          <p:cNvPr id="9" name="Figur: Trefastransformator med järnkärna i tre " descr="Trefastransformator med järnkärna i tre ben: primärlindning 6,6 kV kopplad i Δ, sekundärlindning 440 V kopplad i Y; per ben N1/N2 = U1,gren/U2,gren"/>
           <p:cNvPicPr>
             <a:picLocks noChangeAspect="1"/>
           </p:cNvPicPr>
           <p:nvPr/>
         </p:nvPicPr>
         <p:blipFill>
-          <a:blip r:embed="rId3"/>
+          <a:blip r:embed="rId5"/>
           <a:stretch>
             <a:fillRect/>
           </a:stretch>
@@ -10384,7 +10384,7 @@
         <p:spPr>
           <a:xfrm>
             <a:off x="4892040" y="1645920"/>
-            <a:ext cx="3886200" cy="2426442"/>
+            <a:ext cx="3886200" cy="2356894"/>
           </a:xfrm>
           <a:prstGeom prst="rect">
             <a:avLst/>
